--- a/MyTrip_Final_Submission/documents/MyTrip_Final_Presentation.pptx
+++ b/MyTrip_Final_Submission/documents/MyTrip_Final_Presentation.pptx
@@ -5,7 +5,7 @@
     <p:sldMasterId id="2147483648" r:id="rId1"/>
   </p:sldMasterIdLst>
   <p:notesMasterIdLst>
-    <p:notesMasterId r:id="rId14"/>
+    <p:notesMasterId r:id="rId15"/>
   </p:notesMasterIdLst>
   <p:sldIdLst>
     <p:sldId id="256" r:id="rId2"/>
@@ -15,11 +15,12 @@
     <p:sldId id="260" r:id="rId6"/>
     <p:sldId id="261" r:id="rId7"/>
     <p:sldId id="262" r:id="rId8"/>
-    <p:sldId id="263" r:id="rId9"/>
-    <p:sldId id="264" r:id="rId10"/>
-    <p:sldId id="265" r:id="rId11"/>
-    <p:sldId id="267" r:id="rId12"/>
-    <p:sldId id="266" r:id="rId13"/>
+    <p:sldId id="268" r:id="rId9"/>
+    <p:sldId id="263" r:id="rId10"/>
+    <p:sldId id="264" r:id="rId11"/>
+    <p:sldId id="265" r:id="rId12"/>
+    <p:sldId id="267" r:id="rId13"/>
+    <p:sldId id="266" r:id="rId14"/>
   </p:sldIdLst>
   <p:sldSz cx="12179300" cy="6858000"/>
   <p:notesSz cx="6858000" cy="9144000"/>
@@ -637,7 +638,7 @@
           </a:ln>
           <a:extLst>
             <a:ext uri="{C572A759-6A51-4108-AA02-DFA0A04FC94B}">
-              <ma14:wrappingTextBoxFlag xmlns="" xmlns:m="http://schemas.openxmlformats.org/officeDocument/2006/math" xmlns:a14="http://schemas.microsoft.com/office/drawing/2010/main" xmlns:ma14="http://schemas.microsoft.com/office/mac/drawingml/2011/main" val="1"/>
+              <ma14:wrappingTextBoxFlag xmlns:ma14="http://schemas.microsoft.com/office/mac/drawingml/2011/main" xmlns:a14="http://schemas.microsoft.com/office/drawing/2010/main" xmlns:m="http://schemas.openxmlformats.org/officeDocument/2006/math" xmlns="" val="1"/>
             </a:ext>
           </a:extLst>
         </p:spPr>
@@ -674,7 +675,7 @@
           </a:ln>
           <a:extLst>
             <a:ext uri="{C572A759-6A51-4108-AA02-DFA0A04FC94B}">
-              <ma14:wrappingTextBoxFlag xmlns="" xmlns:m="http://schemas.openxmlformats.org/officeDocument/2006/math" xmlns:a14="http://schemas.microsoft.com/office/drawing/2010/main" xmlns:ma14="http://schemas.microsoft.com/office/mac/drawingml/2011/main" val="1"/>
+              <ma14:wrappingTextBoxFlag xmlns:ma14="http://schemas.microsoft.com/office/mac/drawingml/2011/main" xmlns:a14="http://schemas.microsoft.com/office/drawing/2010/main" xmlns:m="http://schemas.openxmlformats.org/officeDocument/2006/math" xmlns="" val="1"/>
             </a:ext>
           </a:extLst>
         </p:spPr>
@@ -1508,7 +1509,7 @@
           </a:ln>
           <a:extLst>
             <a:ext uri="{C572A759-6A51-4108-AA02-DFA0A04FC94B}">
-              <ma14:wrappingTextBoxFlag xmlns="" xmlns:m="http://schemas.openxmlformats.org/officeDocument/2006/math" xmlns:a14="http://schemas.microsoft.com/office/drawing/2010/main" xmlns:ma14="http://schemas.microsoft.com/office/mac/drawingml/2011/main" val="1"/>
+              <ma14:wrappingTextBoxFlag xmlns:ma14="http://schemas.microsoft.com/office/mac/drawingml/2011/main" xmlns:a14="http://schemas.microsoft.com/office/drawing/2010/main" xmlns:m="http://schemas.openxmlformats.org/officeDocument/2006/math" xmlns="" val="1"/>
             </a:ext>
           </a:extLst>
         </p:spPr>
@@ -1547,7 +1548,7 @@
           </a:ln>
           <a:extLst>
             <a:ext uri="{C572A759-6A51-4108-AA02-DFA0A04FC94B}">
-              <ma14:wrappingTextBoxFlag xmlns="" xmlns:m="http://schemas.openxmlformats.org/officeDocument/2006/math" xmlns:a14="http://schemas.microsoft.com/office/drawing/2010/main" xmlns:ma14="http://schemas.microsoft.com/office/mac/drawingml/2011/main" val="1"/>
+              <ma14:wrappingTextBoxFlag xmlns:ma14="http://schemas.microsoft.com/office/mac/drawingml/2011/main" xmlns:a14="http://schemas.microsoft.com/office/drawing/2010/main" xmlns:m="http://schemas.openxmlformats.org/officeDocument/2006/math" xmlns="" val="1"/>
             </a:ext>
           </a:extLst>
         </p:spPr>
@@ -1590,7 +1591,7 @@
           </a:ln>
           <a:extLst>
             <a:ext uri="{C572A759-6A51-4108-AA02-DFA0A04FC94B}">
-              <ma14:wrappingTextBoxFlag xmlns="" xmlns:m="http://schemas.openxmlformats.org/officeDocument/2006/math" xmlns:a14="http://schemas.microsoft.com/office/drawing/2010/main" xmlns:ma14="http://schemas.microsoft.com/office/mac/drawingml/2011/main" val="1"/>
+              <ma14:wrappingTextBoxFlag xmlns:ma14="http://schemas.microsoft.com/office/mac/drawingml/2011/main" xmlns:a14="http://schemas.microsoft.com/office/drawing/2010/main" xmlns:m="http://schemas.openxmlformats.org/officeDocument/2006/math" xmlns="" val="1"/>
             </a:ext>
           </a:extLst>
         </p:spPr>
@@ -1661,7 +1662,7 @@
           </a:ln>
           <a:extLst>
             <a:ext uri="{C572A759-6A51-4108-AA02-DFA0A04FC94B}">
-              <ma14:wrappingTextBoxFlag xmlns="" xmlns:m="http://schemas.openxmlformats.org/officeDocument/2006/math" xmlns:a14="http://schemas.microsoft.com/office/drawing/2010/main" xmlns:ma14="http://schemas.microsoft.com/office/mac/drawingml/2011/main" val="1"/>
+              <ma14:wrappingTextBoxFlag xmlns:ma14="http://schemas.microsoft.com/office/mac/drawingml/2011/main" xmlns:a14="http://schemas.microsoft.com/office/drawing/2010/main" xmlns:m="http://schemas.openxmlformats.org/officeDocument/2006/math" xmlns="" val="1"/>
             </a:ext>
           </a:extLst>
         </p:spPr>
@@ -1704,7 +1705,7 @@
           </a:ln>
           <a:extLst>
             <a:ext uri="{C572A759-6A51-4108-AA02-DFA0A04FC94B}">
-              <ma14:wrappingTextBoxFlag xmlns="" xmlns:m="http://schemas.openxmlformats.org/officeDocument/2006/math" xmlns:a14="http://schemas.microsoft.com/office/drawing/2010/main" xmlns:ma14="http://schemas.microsoft.com/office/mac/drawingml/2011/main" val="1"/>
+              <ma14:wrappingTextBoxFlag xmlns:ma14="http://schemas.microsoft.com/office/mac/drawingml/2011/main" xmlns:a14="http://schemas.microsoft.com/office/drawing/2010/main" xmlns:m="http://schemas.openxmlformats.org/officeDocument/2006/math" xmlns="" val="1"/>
             </a:ext>
           </a:extLst>
         </p:spPr>
@@ -1747,7 +1748,7 @@
           </a:ln>
           <a:extLst>
             <a:ext uri="{C572A759-6A51-4108-AA02-DFA0A04FC94B}">
-              <ma14:wrappingTextBoxFlag xmlns="" xmlns:m="http://schemas.openxmlformats.org/officeDocument/2006/math" xmlns:a14="http://schemas.microsoft.com/office/drawing/2010/main" xmlns:ma14="http://schemas.microsoft.com/office/mac/drawingml/2011/main" val="1"/>
+              <ma14:wrappingTextBoxFlag xmlns:ma14="http://schemas.microsoft.com/office/mac/drawingml/2011/main" xmlns:a14="http://schemas.microsoft.com/office/drawing/2010/main" xmlns:m="http://schemas.openxmlformats.org/officeDocument/2006/math" xmlns="" val="1"/>
             </a:ext>
           </a:extLst>
         </p:spPr>
@@ -1848,7 +1849,7 @@
           </a:ln>
           <a:extLst>
             <a:ext uri="{C572A759-6A51-4108-AA02-DFA0A04FC94B}">
-              <ma14:wrappingTextBoxFlag xmlns="" xmlns:m="http://schemas.openxmlformats.org/officeDocument/2006/math" xmlns:a14="http://schemas.microsoft.com/office/drawing/2010/main" xmlns:ma14="http://schemas.microsoft.com/office/mac/drawingml/2011/main" val="1"/>
+              <ma14:wrappingTextBoxFlag xmlns:ma14="http://schemas.microsoft.com/office/mac/drawingml/2011/main" xmlns:a14="http://schemas.microsoft.com/office/drawing/2010/main" xmlns:m="http://schemas.openxmlformats.org/officeDocument/2006/math" xmlns="" val="1"/>
             </a:ext>
           </a:extLst>
         </p:spPr>
@@ -1891,7 +1892,7 @@
           </a:ln>
           <a:extLst>
             <a:ext uri="{C572A759-6A51-4108-AA02-DFA0A04FC94B}">
-              <ma14:wrappingTextBoxFlag xmlns="" xmlns:m="http://schemas.openxmlformats.org/officeDocument/2006/math" xmlns:a14="http://schemas.microsoft.com/office/drawing/2010/main" xmlns:ma14="http://schemas.microsoft.com/office/mac/drawingml/2011/main" val="1"/>
+              <ma14:wrappingTextBoxFlag xmlns:ma14="http://schemas.microsoft.com/office/mac/drawingml/2011/main" xmlns:a14="http://schemas.microsoft.com/office/drawing/2010/main" xmlns:m="http://schemas.openxmlformats.org/officeDocument/2006/math" xmlns="" val="1"/>
             </a:ext>
           </a:extLst>
         </p:spPr>
@@ -1934,7 +1935,7 @@
           </a:ln>
           <a:extLst>
             <a:ext uri="{C572A759-6A51-4108-AA02-DFA0A04FC94B}">
-              <ma14:wrappingTextBoxFlag xmlns="" xmlns:m="http://schemas.openxmlformats.org/officeDocument/2006/math" xmlns:a14="http://schemas.microsoft.com/office/drawing/2010/main" xmlns:ma14="http://schemas.microsoft.com/office/mac/drawingml/2011/main" val="1"/>
+              <ma14:wrappingTextBoxFlag xmlns:ma14="http://schemas.microsoft.com/office/mac/drawingml/2011/main" xmlns:a14="http://schemas.microsoft.com/office/drawing/2010/main" xmlns:m="http://schemas.openxmlformats.org/officeDocument/2006/math" xmlns="" val="1"/>
             </a:ext>
           </a:extLst>
         </p:spPr>
@@ -2034,7 +2035,7 @@
           </a:ln>
           <a:extLst>
             <a:ext uri="{C572A759-6A51-4108-AA02-DFA0A04FC94B}">
-              <ma14:wrappingTextBoxFlag xmlns="" xmlns:m="http://schemas.openxmlformats.org/officeDocument/2006/math" xmlns:a14="http://schemas.microsoft.com/office/drawing/2010/main" xmlns:ma14="http://schemas.microsoft.com/office/mac/drawingml/2011/main" val="1"/>
+              <ma14:wrappingTextBoxFlag xmlns:ma14="http://schemas.microsoft.com/office/mac/drawingml/2011/main" xmlns:a14="http://schemas.microsoft.com/office/drawing/2010/main" xmlns:m="http://schemas.openxmlformats.org/officeDocument/2006/math" xmlns="" val="1"/>
             </a:ext>
           </a:extLst>
         </p:spPr>
@@ -2077,7 +2078,7 @@
           </a:ln>
           <a:extLst>
             <a:ext uri="{C572A759-6A51-4108-AA02-DFA0A04FC94B}">
-              <ma14:wrappingTextBoxFlag xmlns="" xmlns:m="http://schemas.openxmlformats.org/officeDocument/2006/math" xmlns:a14="http://schemas.microsoft.com/office/drawing/2010/main" xmlns:ma14="http://schemas.microsoft.com/office/mac/drawingml/2011/main" val="1"/>
+              <ma14:wrappingTextBoxFlag xmlns:ma14="http://schemas.microsoft.com/office/mac/drawingml/2011/main" xmlns:a14="http://schemas.microsoft.com/office/drawing/2010/main" xmlns:m="http://schemas.openxmlformats.org/officeDocument/2006/math" xmlns="" val="1"/>
             </a:ext>
           </a:extLst>
         </p:spPr>
@@ -2129,7 +2130,7 @@
       </p:grpSpPr>
       <p:sp>
         <p:nvSpPr>
-          <p:cNvPr id="185" name="Text 0"/>
+          <p:cNvPr id="169" name="Text 0"/>
           <p:cNvSpPr txBox="1"/>
           <p:nvPr/>
         </p:nvSpPr>
@@ -2146,7 +2147,7 @@
           </a:ln>
           <a:extLst>
             <a:ext uri="{C572A759-6A51-4108-AA02-DFA0A04FC94B}">
-              <ma14:wrappingTextBoxFlag xmlns="" xmlns:m="http://schemas.openxmlformats.org/officeDocument/2006/math" xmlns:a14="http://schemas.microsoft.com/office/drawing/2010/main" xmlns:ma14="http://schemas.microsoft.com/office/mac/drawingml/2011/main" val="1"/>
+              <ma14:wrappingTextBoxFlag xmlns:ma14="http://schemas.microsoft.com/office/mac/drawingml/2011/main" xmlns:a14="http://schemas.microsoft.com/office/drawing/2010/main" xmlns:m="http://schemas.openxmlformats.org/officeDocument/2006/math" xmlns="" val="1"/>
             </a:ext>
           </a:extLst>
         </p:spPr>
@@ -2161,14 +2162,14 @@
           </a:lstStyle>
           <a:p>
             <a:r>
-              <a:t>⚠️</a:t>
-            </a:r>
-          </a:p>
-        </p:txBody>
-      </p:sp>
-      <p:sp>
-        <p:nvSpPr>
-          <p:cNvPr id="186" name="Text 1"/>
+              <a:t>🧪</a:t>
+            </a:r>
+          </a:p>
+        </p:txBody>
+      </p:sp>
+      <p:sp>
+        <p:nvSpPr>
+          <p:cNvPr id="170" name="Text 1"/>
           <p:cNvSpPr txBox="1"/>
           <p:nvPr/>
         </p:nvSpPr>
@@ -2185,7 +2186,7 @@
           </a:ln>
           <a:extLst>
             <a:ext uri="{C572A759-6A51-4108-AA02-DFA0A04FC94B}">
-              <ma14:wrappingTextBoxFlag xmlns="" xmlns:m="http://schemas.openxmlformats.org/officeDocument/2006/math" xmlns:a14="http://schemas.microsoft.com/office/drawing/2010/main" xmlns:ma14="http://schemas.microsoft.com/office/mac/drawingml/2011/main" val="1"/>
+              <ma14:wrappingTextBoxFlag xmlns:ma14="http://schemas.microsoft.com/office/mac/drawingml/2011/main" xmlns:a14="http://schemas.microsoft.com/office/drawing/2010/main" xmlns:m="http://schemas.openxmlformats.org/officeDocument/2006/math" xmlns="" val="1"/>
             </a:ext>
           </a:extLst>
         </p:spPr>
@@ -2208,14 +2209,14 @@
           </a:lstStyle>
           <a:p>
             <a:r>
-              <a:t>Known limitations</a:t>
-            </a:r>
-          </a:p>
-        </p:txBody>
-      </p:sp>
-      <p:sp>
-        <p:nvSpPr>
-          <p:cNvPr id="187" name="Text 2"/>
+              <a:t>Acceptance testing</a:t>
+            </a:r>
+          </a:p>
+        </p:txBody>
+      </p:sp>
+      <p:sp>
+        <p:nvSpPr>
+          <p:cNvPr id="171" name="Text 2"/>
           <p:cNvSpPr txBox="1"/>
           <p:nvPr/>
         </p:nvSpPr>
@@ -2232,7 +2233,7 @@
           </a:ln>
           <a:extLst>
             <a:ext uri="{C572A759-6A51-4108-AA02-DFA0A04FC94B}">
-              <ma14:wrappingTextBoxFlag xmlns="" xmlns:m="http://schemas.openxmlformats.org/officeDocument/2006/math" xmlns:a14="http://schemas.microsoft.com/office/drawing/2010/main" xmlns:ma14="http://schemas.microsoft.com/office/mac/drawingml/2011/main" val="1"/>
+              <ma14:wrappingTextBoxFlag xmlns:ma14="http://schemas.microsoft.com/office/mac/drawingml/2011/main" xmlns:a14="http://schemas.microsoft.com/office/drawing/2010/main" xmlns:m="http://schemas.openxmlformats.org/officeDocument/2006/math" xmlns="" val="1"/>
             </a:ext>
           </a:extLst>
         </p:spPr>
@@ -2251,14 +2252,14 @@
           </a:lstStyle>
           <a:p>
             <a:r>
-              <a:t>These are acceptable for the academic prototype</a:t>
-            </a:r>
-          </a:p>
-        </p:txBody>
-      </p:sp>
-      <p:sp>
-        <p:nvSpPr>
-          <p:cNvPr id="188" name="Shape 3"/>
+              <a:t>The main traveler workflow was tested</a:t>
+            </a:r>
+          </a:p>
+        </p:txBody>
+      </p:sp>
+      <p:sp>
+        <p:nvSpPr>
+          <p:cNvPr id="172" name="Shape 3"/>
           <p:cNvSpPr/>
           <p:nvPr/>
         </p:nvSpPr>
@@ -2286,7 +2287,7 @@
       </p:sp>
       <p:sp>
         <p:nvSpPr>
-          <p:cNvPr id="189" name="Text 4"/>
+          <p:cNvPr id="173" name="Text 4"/>
           <p:cNvSpPr txBox="1"/>
           <p:nvPr/>
         </p:nvSpPr>
@@ -2303,7 +2304,7 @@
           </a:ln>
           <a:extLst>
             <a:ext uri="{C572A759-6A51-4108-AA02-DFA0A04FC94B}">
-              <ma14:wrappingTextBoxFlag xmlns="" xmlns:m="http://schemas.openxmlformats.org/officeDocument/2006/math" xmlns:a14="http://schemas.microsoft.com/office/drawing/2010/main" xmlns:ma14="http://schemas.microsoft.com/office/mac/drawingml/2011/main" val="1"/>
+              <ma14:wrappingTextBoxFlag xmlns:ma14="http://schemas.microsoft.com/office/mac/drawingml/2011/main" xmlns:a14="http://schemas.microsoft.com/office/drawing/2010/main" xmlns:m="http://schemas.openxmlformats.org/officeDocument/2006/math" xmlns="" val="1"/>
             </a:ext>
           </a:extLst>
         </p:spPr>
@@ -2329,7 +2330,7 @@
       </p:sp>
       <p:sp>
         <p:nvSpPr>
-          <p:cNvPr id="190" name="Text 5"/>
+          <p:cNvPr id="174" name="Text 5"/>
           <p:cNvSpPr txBox="1"/>
           <p:nvPr/>
         </p:nvSpPr>
@@ -2346,7 +2347,7 @@
           </a:ln>
           <a:extLst>
             <a:ext uri="{C572A759-6A51-4108-AA02-DFA0A04FC94B}">
-              <ma14:wrappingTextBoxFlag xmlns="" xmlns:m="http://schemas.openxmlformats.org/officeDocument/2006/math" xmlns:a14="http://schemas.microsoft.com/office/drawing/2010/main" xmlns:ma14="http://schemas.microsoft.com/office/mac/drawingml/2011/main" val="1"/>
+              <ma14:wrappingTextBoxFlag xmlns:ma14="http://schemas.microsoft.com/office/mac/drawingml/2011/main" xmlns:a14="http://schemas.microsoft.com/office/drawing/2010/main" xmlns:m="http://schemas.openxmlformats.org/officeDocument/2006/math" xmlns="" val="1"/>
             </a:ext>
           </a:extLst>
         </p:spPr>
@@ -2365,6 +2366,50 @@
           </a:lstStyle>
           <a:p>
             <a:r>
+              <a:t>09</a:t>
+            </a:r>
+          </a:p>
+        </p:txBody>
+      </p:sp>
+      <p:sp>
+        <p:nvSpPr>
+          <p:cNvPr id="175" name="Text 6"/>
+          <p:cNvSpPr txBox="1"/>
+          <p:nvPr/>
+        </p:nvSpPr>
+        <p:spPr>
+          <a:xfrm>
+            <a:off x="868680" y="1469389"/>
+            <a:ext cx="2743201" cy="673101"/>
+          </a:xfrm>
+          <a:prstGeom prst="rect">
+            <a:avLst/>
+          </a:prstGeom>
+          <a:ln w="12700">
+            <a:miter lim="400000"/>
+          </a:ln>
+          <a:extLst>
+            <a:ext uri="{C572A759-6A51-4108-AA02-DFA0A04FC94B}">
+              <ma14:wrappingTextBoxFlag xmlns:ma14="http://schemas.microsoft.com/office/mac/drawingml/2011/main" xmlns:a14="http://schemas.microsoft.com/office/drawing/2010/main" xmlns:m="http://schemas.openxmlformats.org/officeDocument/2006/math" xmlns="" val="1"/>
+            </a:ext>
+          </a:extLst>
+        </p:spPr>
+        <p:txBody>
+          <a:bodyPr lIns="0" tIns="0" rIns="0" bIns="0" anchor="ctr">
+            <a:spAutoFit/>
+          </a:bodyPr>
+          <a:lstStyle>
+            <a:lvl1pPr algn="ctr">
+              <a:defRPr sz="4400" b="1">
+                <a:solidFill>
+                  <a:srgbClr val="17324D"/>
+                </a:solidFill>
+              </a:defRPr>
+            </a:lvl1pPr>
+          </a:lstStyle>
+          <a:p>
+            <a:r>
+              <a:rPr dirty="0"/>
               <a:t>10</a:t>
             </a:r>
           </a:p>
@@ -2372,24 +2417,275 @@
       </p:sp>
       <p:sp>
         <p:nvSpPr>
-          <p:cNvPr id="191" name="Text 6"/>
-          <p:cNvSpPr txBox="1"/>
-          <p:nvPr/>
-        </p:nvSpPr>
-        <p:spPr>
-          <a:xfrm>
-            <a:off x="868680" y="1463040"/>
-            <a:ext cx="7909560" cy="3840480"/>
-          </a:xfrm>
-          <a:prstGeom prst="rect">
-            <a:avLst/>
-          </a:prstGeom>
-          <a:ln w="12700">
-            <a:miter lim="400000"/>
-          </a:ln>
-          <a:extLst>
-            <a:ext uri="{C572A759-6A51-4108-AA02-DFA0A04FC94B}">
-              <ma14:wrappingTextBoxFlag xmlns="" xmlns:m="http://schemas.openxmlformats.org/officeDocument/2006/math" xmlns:a14="http://schemas.microsoft.com/office/drawing/2010/main" xmlns:ma14="http://schemas.microsoft.com/office/mac/drawingml/2011/main" val="1"/>
+          <p:cNvPr id="176" name="Text 7"/>
+          <p:cNvSpPr txBox="1"/>
+          <p:nvPr/>
+        </p:nvSpPr>
+        <p:spPr>
+          <a:xfrm>
+            <a:off x="868680" y="2233676"/>
+            <a:ext cx="2743201" cy="177801"/>
+          </a:xfrm>
+          <a:prstGeom prst="rect">
+            <a:avLst/>
+          </a:prstGeom>
+          <a:ln w="12700">
+            <a:miter lim="400000"/>
+          </a:ln>
+          <a:extLst>
+            <a:ext uri="{C572A759-6A51-4108-AA02-DFA0A04FC94B}">
+              <ma14:wrappingTextBoxFlag xmlns:ma14="http://schemas.microsoft.com/office/mac/drawingml/2011/main" xmlns:a14="http://schemas.microsoft.com/office/drawing/2010/main" xmlns:m="http://schemas.openxmlformats.org/officeDocument/2006/math" xmlns="" val="1"/>
+            </a:ext>
+          </a:extLst>
+        </p:spPr>
+        <p:txBody>
+          <a:bodyPr lIns="0" tIns="0" rIns="0" bIns="0" anchor="ctr">
+            <a:spAutoFit/>
+          </a:bodyPr>
+          <a:lstStyle>
+            <a:lvl1pPr algn="ctr">
+              <a:defRPr sz="1200" b="1">
+                <a:solidFill>
+                  <a:srgbClr val="1F2937"/>
+                </a:solidFill>
+              </a:defRPr>
+            </a:lvl1pPr>
+          </a:lstStyle>
+          <a:p>
+            <a:r>
+              <a:t>TESTS EXECUTED</a:t>
+            </a:r>
+          </a:p>
+        </p:txBody>
+      </p:sp>
+      <p:sp>
+        <p:nvSpPr>
+          <p:cNvPr id="177" name="Text 8"/>
+          <p:cNvSpPr txBox="1"/>
+          <p:nvPr/>
+        </p:nvSpPr>
+        <p:spPr>
+          <a:xfrm>
+            <a:off x="868680" y="2513839"/>
+            <a:ext cx="2743201" cy="673101"/>
+          </a:xfrm>
+          <a:prstGeom prst="rect">
+            <a:avLst/>
+          </a:prstGeom>
+          <a:ln w="12700">
+            <a:miter lim="400000"/>
+          </a:ln>
+          <a:extLst>
+            <a:ext uri="{C572A759-6A51-4108-AA02-DFA0A04FC94B}">
+              <ma14:wrappingTextBoxFlag xmlns:ma14="http://schemas.microsoft.com/office/mac/drawingml/2011/main" xmlns:a14="http://schemas.microsoft.com/office/drawing/2010/main" xmlns:m="http://schemas.openxmlformats.org/officeDocument/2006/math" xmlns="" val="1"/>
+            </a:ext>
+          </a:extLst>
+        </p:spPr>
+        <p:txBody>
+          <a:bodyPr lIns="0" tIns="0" rIns="0" bIns="0" anchor="ctr">
+            <a:spAutoFit/>
+          </a:bodyPr>
+          <a:lstStyle>
+            <a:lvl1pPr algn="ctr">
+              <a:defRPr sz="4400" b="1">
+                <a:solidFill>
+                  <a:srgbClr val="2F855A"/>
+                </a:solidFill>
+              </a:defRPr>
+            </a:lvl1pPr>
+          </a:lstStyle>
+          <a:p>
+            <a:r>
+              <a:rPr dirty="0"/>
+              <a:t>10</a:t>
+            </a:r>
+          </a:p>
+        </p:txBody>
+      </p:sp>
+      <p:sp>
+        <p:nvSpPr>
+          <p:cNvPr id="178" name="Text 9"/>
+          <p:cNvSpPr txBox="1"/>
+          <p:nvPr/>
+        </p:nvSpPr>
+        <p:spPr>
+          <a:xfrm>
+            <a:off x="868680" y="3278126"/>
+            <a:ext cx="2743201" cy="177801"/>
+          </a:xfrm>
+          <a:prstGeom prst="rect">
+            <a:avLst/>
+          </a:prstGeom>
+          <a:ln w="12700">
+            <a:miter lim="400000"/>
+          </a:ln>
+          <a:extLst>
+            <a:ext uri="{C572A759-6A51-4108-AA02-DFA0A04FC94B}">
+              <ma14:wrappingTextBoxFlag xmlns:ma14="http://schemas.microsoft.com/office/mac/drawingml/2011/main" xmlns:a14="http://schemas.microsoft.com/office/drawing/2010/main" xmlns:m="http://schemas.openxmlformats.org/officeDocument/2006/math" xmlns="" val="1"/>
+            </a:ext>
+          </a:extLst>
+        </p:spPr>
+        <p:txBody>
+          <a:bodyPr lIns="0" tIns="0" rIns="0" bIns="0" anchor="ctr">
+            <a:spAutoFit/>
+          </a:bodyPr>
+          <a:lstStyle>
+            <a:lvl1pPr algn="ctr">
+              <a:defRPr sz="1200" b="1">
+                <a:solidFill>
+                  <a:srgbClr val="1F2937"/>
+                </a:solidFill>
+              </a:defRPr>
+            </a:lvl1pPr>
+          </a:lstStyle>
+          <a:p>
+            <a:r>
+              <a:rPr dirty="0"/>
+              <a:t>PASSED</a:t>
+            </a:r>
+          </a:p>
+        </p:txBody>
+      </p:sp>
+      <p:sp>
+        <p:nvSpPr>
+          <p:cNvPr id="179" name="Text 10"/>
+          <p:cNvSpPr txBox="1"/>
+          <p:nvPr/>
+        </p:nvSpPr>
+        <p:spPr>
+          <a:xfrm>
+            <a:off x="868680" y="3554223"/>
+            <a:ext cx="2743201" cy="673101"/>
+          </a:xfrm>
+          <a:prstGeom prst="rect">
+            <a:avLst/>
+          </a:prstGeom>
+          <a:ln w="12700">
+            <a:miter lim="400000"/>
+          </a:ln>
+          <a:extLst>
+            <a:ext uri="{C572A759-6A51-4108-AA02-DFA0A04FC94B}">
+              <ma14:wrappingTextBoxFlag xmlns:ma14="http://schemas.microsoft.com/office/mac/drawingml/2011/main" xmlns:a14="http://schemas.microsoft.com/office/drawing/2010/main" xmlns:m="http://schemas.openxmlformats.org/officeDocument/2006/math" xmlns="" val="1"/>
+            </a:ext>
+          </a:extLst>
+        </p:spPr>
+        <p:txBody>
+          <a:bodyPr lIns="0" tIns="0" rIns="0" bIns="0" anchor="ctr">
+            <a:spAutoFit/>
+          </a:bodyPr>
+          <a:lstStyle>
+            <a:lvl1pPr algn="ctr">
+              <a:defRPr sz="4400" b="1">
+                <a:solidFill>
+                  <a:srgbClr val="C53030"/>
+                </a:solidFill>
+              </a:defRPr>
+            </a:lvl1pPr>
+          </a:lstStyle>
+          <a:p>
+            <a:r>
+              <a:rPr dirty="0"/>
+              <a:t>0</a:t>
+            </a:r>
+          </a:p>
+        </p:txBody>
+      </p:sp>
+      <p:sp>
+        <p:nvSpPr>
+          <p:cNvPr id="180" name="Text 11"/>
+          <p:cNvSpPr txBox="1"/>
+          <p:nvPr/>
+        </p:nvSpPr>
+        <p:spPr>
+          <a:xfrm>
+            <a:off x="868680" y="4318510"/>
+            <a:ext cx="2743201" cy="177801"/>
+          </a:xfrm>
+          <a:prstGeom prst="rect">
+            <a:avLst/>
+          </a:prstGeom>
+          <a:ln w="12700">
+            <a:miter lim="400000"/>
+          </a:ln>
+          <a:extLst>
+            <a:ext uri="{C572A759-6A51-4108-AA02-DFA0A04FC94B}">
+              <ma14:wrappingTextBoxFlag xmlns:ma14="http://schemas.microsoft.com/office/mac/drawingml/2011/main" xmlns:a14="http://schemas.microsoft.com/office/drawing/2010/main" xmlns:m="http://schemas.openxmlformats.org/officeDocument/2006/math" xmlns="" val="1"/>
+            </a:ext>
+          </a:extLst>
+        </p:spPr>
+        <p:txBody>
+          <a:bodyPr lIns="0" tIns="0" rIns="0" bIns="0" anchor="ctr">
+            <a:spAutoFit/>
+          </a:bodyPr>
+          <a:lstStyle>
+            <a:lvl1pPr algn="ctr">
+              <a:defRPr sz="1200" b="1">
+                <a:solidFill>
+                  <a:srgbClr val="1F2937"/>
+                </a:solidFill>
+              </a:defRPr>
+            </a:lvl1pPr>
+          </a:lstStyle>
+          <a:p>
+            <a:r>
+              <a:t>FAILED</a:t>
+            </a:r>
+          </a:p>
+        </p:txBody>
+      </p:sp>
+      <p:sp>
+        <p:nvSpPr>
+          <p:cNvPr id="181" name="Shape 12"/>
+          <p:cNvSpPr/>
+          <p:nvPr/>
+        </p:nvSpPr>
+        <p:spPr>
+          <a:xfrm>
+            <a:off x="868681" y="4845813"/>
+            <a:ext cx="2816352" cy="1463040"/>
+          </a:xfrm>
+          <a:prstGeom prst="roundRect">
+            <a:avLst>
+              <a:gd name="adj" fmla="val 7500"/>
+            </a:avLst>
+          </a:prstGeom>
+          <a:solidFill>
+            <a:srgbClr val="F5F7FA"/>
+          </a:solidFill>
+          <a:ln w="12700">
+            <a:solidFill>
+              <a:srgbClr val="D5DEE8"/>
+            </a:solidFill>
+          </a:ln>
+        </p:spPr>
+        <p:txBody>
+          <a:bodyPr lIns="45719" rIns="45719"/>
+          <a:lstStyle/>
+          <a:p>
+            <a:endParaRPr/>
+          </a:p>
+        </p:txBody>
+      </p:sp>
+      <p:sp>
+        <p:nvSpPr>
+          <p:cNvPr id="182" name="Text 13"/>
+          <p:cNvSpPr txBox="1"/>
+          <p:nvPr/>
+        </p:nvSpPr>
+        <p:spPr>
+          <a:xfrm>
+            <a:off x="1188719" y="5165853"/>
+            <a:ext cx="9555482" cy="822961"/>
+          </a:xfrm>
+          <a:prstGeom prst="rect">
+            <a:avLst/>
+          </a:prstGeom>
+          <a:ln w="12700">
+            <a:miter lim="400000"/>
+          </a:ln>
+          <a:extLst>
+            <a:ext uri="{C572A759-6A51-4108-AA02-DFA0A04FC94B}">
+              <ma14:wrappingTextBoxFlag xmlns:ma14="http://schemas.microsoft.com/office/mac/drawingml/2011/main" xmlns:a14="http://schemas.microsoft.com/office/drawing/2010/main" xmlns:m="http://schemas.openxmlformats.org/officeDocument/2006/math" xmlns="" val="1"/>
             </a:ext>
           </a:extLst>
         </p:spPr>
@@ -2399,81 +2695,782 @@
           </a:bodyPr>
           <a:lstStyle/>
           <a:p>
+            <a:pPr defTabSz="512063">
+              <a:defRPr sz="839">
+                <a:solidFill>
+                  <a:srgbClr val="1F2937"/>
+                </a:solidFill>
+              </a:defRPr>
+            </a:pPr>
+            <a:r>
+              <a:rPr dirty="0"/>
+              <a:t>• Login and account access</a:t>
+            </a:r>
+          </a:p>
+          <a:p>
+            <a:pPr defTabSz="512063">
+              <a:defRPr sz="839">
+                <a:solidFill>
+                  <a:srgbClr val="1F2937"/>
+                </a:solidFill>
+              </a:defRPr>
+            </a:pPr>
+            <a:r>
+              <a:rPr dirty="0"/>
+              <a:t>• Create, calculate, save, reopen, and delete a trip</a:t>
+            </a:r>
+          </a:p>
+          <a:p>
+            <a:pPr defTabSz="512063">
+              <a:defRPr sz="839">
+                <a:solidFill>
+                  <a:srgbClr val="1F2937"/>
+                </a:solidFill>
+              </a:defRPr>
+            </a:pPr>
+            <a:r>
+              <a:rPr dirty="0"/>
+              <a:t>• Invalid mileage and invalid budget validation</a:t>
+            </a:r>
+          </a:p>
+          <a:p>
+            <a:pPr defTabSz="512063">
+              <a:defRPr sz="839">
+                <a:solidFill>
+                  <a:srgbClr val="1F2937"/>
+                </a:solidFill>
+              </a:defRPr>
+            </a:pPr>
+            <a:r>
+              <a:rPr dirty="0"/>
+              <a:t>• Logged-out save restriction</a:t>
+            </a:r>
+          </a:p>
+          <a:p>
+            <a:pPr defTabSz="512063">
+              <a:defRPr sz="839">
+                <a:solidFill>
+                  <a:srgbClr val="1F2937"/>
+                </a:solidFill>
+              </a:defRPr>
+            </a:pPr>
+            <a:r>
+              <a:rPr dirty="0"/>
+              <a:t>• Email-based trip filtering</a:t>
+            </a:r>
+          </a:p>
+        </p:txBody>
+      </p:sp>
+      <p:sp>
+        <p:nvSpPr>
+          <p:cNvPr id="183" name="Text 14"/>
+          <p:cNvSpPr txBox="1"/>
+          <p:nvPr/>
+        </p:nvSpPr>
+        <p:spPr>
+          <a:xfrm>
+            <a:off x="1188719" y="5280660"/>
+            <a:ext cx="9601201" cy="457201"/>
+          </a:xfrm>
+          <a:prstGeom prst="rect">
+            <a:avLst/>
+          </a:prstGeom>
+          <a:ln w="12700">
+            <a:miter lim="400000"/>
+          </a:ln>
+          <a:extLst>
+            <a:ext uri="{C572A759-6A51-4108-AA02-DFA0A04FC94B}">
+              <ma14:wrappingTextBoxFlag xmlns:ma14="http://schemas.microsoft.com/office/mac/drawingml/2011/main" xmlns:a14="http://schemas.microsoft.com/office/drawing/2010/main" xmlns:m="http://schemas.openxmlformats.org/officeDocument/2006/math" xmlns="" val="1"/>
+            </a:ext>
+          </a:extLst>
+        </p:spPr>
+        <p:txBody>
+          <a:bodyPr lIns="0" tIns="0" rIns="0" bIns="0" anchor="ctr">
+            <a:spAutoFit/>
+          </a:bodyPr>
+          <a:lstStyle/>
+          <a:p>
             <a:pPr>
-              <a:defRPr>
+              <a:defRPr sz="1500">
+                <a:solidFill>
+                  <a:srgbClr val="5F6B7A"/>
+                </a:solidFill>
+              </a:defRPr>
+            </a:pPr>
+            <a:endParaRPr/>
+          </a:p>
+        </p:txBody>
+      </p:sp>
+      <p:sp>
+        <p:nvSpPr>
+          <p:cNvPr id="2" name="TextBox 1">
+            <a:extLst>
+              <a:ext uri="{FF2B5EF4-FFF2-40B4-BE49-F238E27FC236}">
+                <a16:creationId xmlns:a16="http://schemas.microsoft.com/office/drawing/2014/main" id="{F7C3EED9-532D-CFA9-9896-38ED64C27EB4}"/>
+              </a:ext>
+            </a:extLst>
+          </p:cNvPr>
+          <p:cNvSpPr txBox="1"/>
+          <p:nvPr/>
+        </p:nvSpPr>
+        <p:spPr>
+          <a:xfrm>
+            <a:off x="868680" y="1119887"/>
+            <a:ext cx="2916937" cy="369330"/>
+          </a:xfrm>
+          <a:prstGeom prst="rect">
+            <a:avLst/>
+          </a:prstGeom>
+          <a:noFill/>
+          <a:ln w="12700" cap="flat">
+            <a:noFill/>
+            <a:miter lim="400000"/>
+          </a:ln>
+          <a:effectLst/>
+          <a:sp3d/>
+        </p:spPr>
+        <p:style>
+          <a:lnRef idx="0">
+            <a:scrgbClr r="0" g="0" b="0"/>
+          </a:lnRef>
+          <a:fillRef idx="0">
+            <a:scrgbClr r="0" g="0" b="0"/>
+          </a:fillRef>
+          <a:effectRef idx="0">
+            <a:scrgbClr r="0" g="0" b="0"/>
+          </a:effectRef>
+          <a:fontRef idx="none"/>
+        </p:style>
+        <p:txBody>
+          <a:bodyPr rot="0" spcFirstLastPara="1" vertOverflow="overflow" horzOverflow="overflow" vert="horz" wrap="square" lIns="45719" tIns="45719" rIns="45719" bIns="45719" numCol="1" spcCol="38100" rtlCol="0" anchor="t">
+            <a:spAutoFit/>
+          </a:bodyPr>
+          <a:lstStyle/>
+          <a:p>
+            <a:pPr marL="0" marR="0" indent="0" algn="l" defTabSz="914400" rtl="0" fontAlgn="auto" latinLnBrk="0" hangingPunct="0">
+              <a:lnSpc>
+                <a:spcPct val="100000"/>
+              </a:lnSpc>
+              <a:spcBef>
+                <a:spcPts val="0"/>
+              </a:spcBef>
+              <a:spcAft>
+                <a:spcPts val="0"/>
+              </a:spcAft>
+              <a:buClrTx/>
+              <a:buSzTx/>
+              <a:buFontTx/>
+              <a:buNone/>
+              <a:tabLst/>
+            </a:pPr>
+            <a:r>
+              <a:rPr kumimoji="0" lang="en-US" sz="1800" b="0" i="0" u="sng" strike="noStrike" cap="none" spc="0" normalizeH="0" baseline="0" dirty="0">
+                <a:ln>
+                  <a:noFill/>
+                </a:ln>
+                <a:solidFill>
+                  <a:srgbClr val="000000"/>
+                </a:solidFill>
+                <a:effectLst/>
+                <a:uFillTx/>
+                <a:latin typeface="+mj-lt"/>
+                <a:ea typeface="+mj-ea"/>
+                <a:cs typeface="+mj-cs"/>
+                <a:sym typeface="Aptos"/>
+              </a:rPr>
+              <a:t>Manual Acceptance Testing</a:t>
+            </a:r>
+          </a:p>
+        </p:txBody>
+      </p:sp>
+      <p:sp>
+        <p:nvSpPr>
+          <p:cNvPr id="4" name="Text 6">
+            <a:extLst>
+              <a:ext uri="{FF2B5EF4-FFF2-40B4-BE49-F238E27FC236}">
+                <a16:creationId xmlns:a16="http://schemas.microsoft.com/office/drawing/2014/main" id="{9174F026-5DF0-0D0F-E3B1-9F22D082FF0D}"/>
+              </a:ext>
+            </a:extLst>
+          </p:cNvPr>
+          <p:cNvSpPr txBox="1"/>
+          <p:nvPr/>
+        </p:nvSpPr>
+        <p:spPr>
+          <a:xfrm>
+            <a:off x="7568184" y="1489455"/>
+            <a:ext cx="2743201" cy="673101"/>
+          </a:xfrm>
+          <a:prstGeom prst="rect">
+            <a:avLst/>
+          </a:prstGeom>
+          <a:ln w="12700">
+            <a:miter lim="400000"/>
+          </a:ln>
+          <a:extLst>
+            <a:ext uri="{C572A759-6A51-4108-AA02-DFA0A04FC94B}">
+              <ma14:wrappingTextBoxFlag xmlns="" xmlns:m="http://schemas.openxmlformats.org/officeDocument/2006/math" xmlns:a14="http://schemas.microsoft.com/office/drawing/2010/main" xmlns:ma14="http://schemas.microsoft.com/office/mac/drawingml/2011/main" val="1"/>
+            </a:ext>
+          </a:extLst>
+        </p:spPr>
+        <p:txBody>
+          <a:bodyPr lIns="0" tIns="0" rIns="0" bIns="0" anchor="ctr">
+            <a:spAutoFit/>
+          </a:bodyPr>
+          <a:lstStyle>
+            <a:lvl1pPr algn="ctr">
+              <a:defRPr sz="4400" b="1">
+                <a:solidFill>
+                  <a:srgbClr val="17324D"/>
+                </a:solidFill>
+              </a:defRPr>
+            </a:lvl1pPr>
+          </a:lstStyle>
+          <a:p>
+            <a:r>
+              <a:rPr lang="en-US" dirty="0"/>
+              <a:t>29</a:t>
+            </a:r>
+            <a:endParaRPr dirty="0"/>
+          </a:p>
+        </p:txBody>
+      </p:sp>
+      <p:sp>
+        <p:nvSpPr>
+          <p:cNvPr id="6" name="Text 7">
+            <a:extLst>
+              <a:ext uri="{FF2B5EF4-FFF2-40B4-BE49-F238E27FC236}">
+                <a16:creationId xmlns:a16="http://schemas.microsoft.com/office/drawing/2014/main" id="{2EA4DDBB-E74F-3561-29B9-A135D8207962}"/>
+              </a:ext>
+            </a:extLst>
+          </p:cNvPr>
+          <p:cNvSpPr txBox="1"/>
+          <p:nvPr/>
+        </p:nvSpPr>
+        <p:spPr>
+          <a:xfrm>
+            <a:off x="7568184" y="2253742"/>
+            <a:ext cx="2743201" cy="177801"/>
+          </a:xfrm>
+          <a:prstGeom prst="rect">
+            <a:avLst/>
+          </a:prstGeom>
+          <a:ln w="12700">
+            <a:miter lim="400000"/>
+          </a:ln>
+          <a:extLst>
+            <a:ext uri="{C572A759-6A51-4108-AA02-DFA0A04FC94B}">
+              <ma14:wrappingTextBoxFlag xmlns="" xmlns:m="http://schemas.openxmlformats.org/officeDocument/2006/math" xmlns:a14="http://schemas.microsoft.com/office/drawing/2010/main" xmlns:ma14="http://schemas.microsoft.com/office/mac/drawingml/2011/main" val="1"/>
+            </a:ext>
+          </a:extLst>
+        </p:spPr>
+        <p:txBody>
+          <a:bodyPr lIns="0" tIns="0" rIns="0" bIns="0" anchor="ctr">
+            <a:spAutoFit/>
+          </a:bodyPr>
+          <a:lstStyle>
+            <a:lvl1pPr algn="ctr">
+              <a:defRPr sz="1200" b="1">
                 <a:solidFill>
                   <a:srgbClr val="1F2937"/>
                 </a:solidFill>
               </a:defRPr>
+            </a:lvl1pPr>
+          </a:lstStyle>
+          <a:p>
+            <a:r>
+              <a:t>TESTS EXECUTED</a:t>
+            </a:r>
+          </a:p>
+        </p:txBody>
+      </p:sp>
+      <p:sp>
+        <p:nvSpPr>
+          <p:cNvPr id="8" name="Text 8">
+            <a:extLst>
+              <a:ext uri="{FF2B5EF4-FFF2-40B4-BE49-F238E27FC236}">
+                <a16:creationId xmlns:a16="http://schemas.microsoft.com/office/drawing/2014/main" id="{234BC743-83B3-102C-69FF-D98CCF1CD1F7}"/>
+              </a:ext>
+            </a:extLst>
+          </p:cNvPr>
+          <p:cNvSpPr txBox="1"/>
+          <p:nvPr/>
+        </p:nvSpPr>
+        <p:spPr>
+          <a:xfrm>
+            <a:off x="7568184" y="2533905"/>
+            <a:ext cx="2743201" cy="673101"/>
+          </a:xfrm>
+          <a:prstGeom prst="rect">
+            <a:avLst/>
+          </a:prstGeom>
+          <a:ln w="12700">
+            <a:miter lim="400000"/>
+          </a:ln>
+          <a:extLst>
+            <a:ext uri="{C572A759-6A51-4108-AA02-DFA0A04FC94B}">
+              <ma14:wrappingTextBoxFlag xmlns="" xmlns:m="http://schemas.openxmlformats.org/officeDocument/2006/math" xmlns:a14="http://schemas.microsoft.com/office/drawing/2010/main" xmlns:ma14="http://schemas.microsoft.com/office/mac/drawingml/2011/main" val="1"/>
+            </a:ext>
+          </a:extLst>
+        </p:spPr>
+        <p:txBody>
+          <a:bodyPr lIns="0" tIns="0" rIns="0" bIns="0" anchor="ctr">
+            <a:spAutoFit/>
+          </a:bodyPr>
+          <a:lstStyle>
+            <a:lvl1pPr algn="ctr">
+              <a:defRPr sz="4400" b="1">
+                <a:solidFill>
+                  <a:srgbClr val="2F855A"/>
+                </a:solidFill>
+              </a:defRPr>
+            </a:lvl1pPr>
+          </a:lstStyle>
+          <a:p>
+            <a:r>
+              <a:rPr lang="en-US" dirty="0"/>
+              <a:t>29</a:t>
+            </a:r>
+            <a:endParaRPr dirty="0"/>
+          </a:p>
+        </p:txBody>
+      </p:sp>
+      <p:sp>
+        <p:nvSpPr>
+          <p:cNvPr id="10" name="Text 9">
+            <a:extLst>
+              <a:ext uri="{FF2B5EF4-FFF2-40B4-BE49-F238E27FC236}">
+                <a16:creationId xmlns:a16="http://schemas.microsoft.com/office/drawing/2014/main" id="{854C2577-CC82-D5B0-05B6-5F97E05D8A05}"/>
+              </a:ext>
+            </a:extLst>
+          </p:cNvPr>
+          <p:cNvSpPr txBox="1"/>
+          <p:nvPr/>
+        </p:nvSpPr>
+        <p:spPr>
+          <a:xfrm>
+            <a:off x="7568184" y="3298192"/>
+            <a:ext cx="2743201" cy="177801"/>
+          </a:xfrm>
+          <a:prstGeom prst="rect">
+            <a:avLst/>
+          </a:prstGeom>
+          <a:ln w="12700">
+            <a:miter lim="400000"/>
+          </a:ln>
+          <a:extLst>
+            <a:ext uri="{C572A759-6A51-4108-AA02-DFA0A04FC94B}">
+              <ma14:wrappingTextBoxFlag xmlns="" xmlns:m="http://schemas.openxmlformats.org/officeDocument/2006/math" xmlns:a14="http://schemas.microsoft.com/office/drawing/2010/main" xmlns:ma14="http://schemas.microsoft.com/office/mac/drawingml/2011/main" val="1"/>
+            </a:ext>
+          </a:extLst>
+        </p:spPr>
+        <p:txBody>
+          <a:bodyPr lIns="0" tIns="0" rIns="0" bIns="0" anchor="ctr">
+            <a:spAutoFit/>
+          </a:bodyPr>
+          <a:lstStyle>
+            <a:lvl1pPr algn="ctr">
+              <a:defRPr sz="1200" b="1">
+                <a:solidFill>
+                  <a:srgbClr val="1F2937"/>
+                </a:solidFill>
+              </a:defRPr>
+            </a:lvl1pPr>
+          </a:lstStyle>
+          <a:p>
+            <a:r>
+              <a:rPr dirty="0"/>
+              <a:t>PASSED</a:t>
+            </a:r>
+          </a:p>
+        </p:txBody>
+      </p:sp>
+      <p:sp>
+        <p:nvSpPr>
+          <p:cNvPr id="12" name="Text 10">
+            <a:extLst>
+              <a:ext uri="{FF2B5EF4-FFF2-40B4-BE49-F238E27FC236}">
+                <a16:creationId xmlns:a16="http://schemas.microsoft.com/office/drawing/2014/main" id="{84EF8046-C457-4F85-6F8E-0B6239273614}"/>
+              </a:ext>
+            </a:extLst>
+          </p:cNvPr>
+          <p:cNvSpPr txBox="1"/>
+          <p:nvPr/>
+        </p:nvSpPr>
+        <p:spPr>
+          <a:xfrm>
+            <a:off x="7568184" y="3574289"/>
+            <a:ext cx="2743201" cy="673101"/>
+          </a:xfrm>
+          <a:prstGeom prst="rect">
+            <a:avLst/>
+          </a:prstGeom>
+          <a:ln w="12700">
+            <a:miter lim="400000"/>
+          </a:ln>
+          <a:extLst>
+            <a:ext uri="{C572A759-6A51-4108-AA02-DFA0A04FC94B}">
+              <ma14:wrappingTextBoxFlag xmlns="" xmlns:m="http://schemas.openxmlformats.org/officeDocument/2006/math" xmlns:a14="http://schemas.microsoft.com/office/drawing/2010/main" xmlns:ma14="http://schemas.microsoft.com/office/mac/drawingml/2011/main" val="1"/>
+            </a:ext>
+          </a:extLst>
+        </p:spPr>
+        <p:txBody>
+          <a:bodyPr lIns="0" tIns="0" rIns="0" bIns="0" anchor="ctr">
+            <a:spAutoFit/>
+          </a:bodyPr>
+          <a:lstStyle>
+            <a:lvl1pPr algn="ctr">
+              <a:defRPr sz="4400" b="1">
+                <a:solidFill>
+                  <a:srgbClr val="C53030"/>
+                </a:solidFill>
+              </a:defRPr>
+            </a:lvl1pPr>
+          </a:lstStyle>
+          <a:p>
+            <a:r>
+              <a:rPr dirty="0"/>
+              <a:t>0</a:t>
+            </a:r>
+          </a:p>
+        </p:txBody>
+      </p:sp>
+      <p:sp>
+        <p:nvSpPr>
+          <p:cNvPr id="14" name="Text 11">
+            <a:extLst>
+              <a:ext uri="{FF2B5EF4-FFF2-40B4-BE49-F238E27FC236}">
+                <a16:creationId xmlns:a16="http://schemas.microsoft.com/office/drawing/2014/main" id="{BBF37B52-C78C-27D1-67DE-0FB46CD59CF1}"/>
+              </a:ext>
+            </a:extLst>
+          </p:cNvPr>
+          <p:cNvSpPr txBox="1"/>
+          <p:nvPr/>
+        </p:nvSpPr>
+        <p:spPr>
+          <a:xfrm>
+            <a:off x="7568184" y="4335144"/>
+            <a:ext cx="2743201" cy="184666"/>
+          </a:xfrm>
+          <a:prstGeom prst="rect">
+            <a:avLst/>
+          </a:prstGeom>
+          <a:ln w="12700">
+            <a:miter lim="400000"/>
+          </a:ln>
+          <a:extLst>
+            <a:ext uri="{C572A759-6A51-4108-AA02-DFA0A04FC94B}">
+              <ma14:wrappingTextBoxFlag xmlns="" xmlns:m="http://schemas.openxmlformats.org/officeDocument/2006/math" xmlns:a14="http://schemas.microsoft.com/office/drawing/2010/main" xmlns:ma14="http://schemas.microsoft.com/office/mac/drawingml/2011/main" val="1"/>
+            </a:ext>
+          </a:extLst>
+        </p:spPr>
+        <p:txBody>
+          <a:bodyPr lIns="0" tIns="0" rIns="0" bIns="0" anchor="ctr">
+            <a:spAutoFit/>
+          </a:bodyPr>
+          <a:lstStyle>
+            <a:lvl1pPr algn="ctr">
+              <a:defRPr sz="1200" b="1">
+                <a:solidFill>
+                  <a:srgbClr val="1F2937"/>
+                </a:solidFill>
+              </a:defRPr>
+            </a:lvl1pPr>
+          </a:lstStyle>
+          <a:p>
+            <a:r>
+              <a:rPr dirty="0"/>
+              <a:t>FAIL</a:t>
+            </a:r>
+            <a:r>
+              <a:rPr lang="en-US" dirty="0"/>
+              <a:t>URES</a:t>
+            </a:r>
+            <a:endParaRPr dirty="0"/>
+          </a:p>
+        </p:txBody>
+      </p:sp>
+      <p:sp>
+        <p:nvSpPr>
+          <p:cNvPr id="16" name="TextBox 15">
+            <a:extLst>
+              <a:ext uri="{FF2B5EF4-FFF2-40B4-BE49-F238E27FC236}">
+                <a16:creationId xmlns:a16="http://schemas.microsoft.com/office/drawing/2014/main" id="{54D99836-A5AE-68D8-1AB7-8C53511A4882}"/>
+              </a:ext>
+            </a:extLst>
+          </p:cNvPr>
+          <p:cNvSpPr txBox="1"/>
+          <p:nvPr/>
+        </p:nvSpPr>
+        <p:spPr>
+          <a:xfrm>
+            <a:off x="7367016" y="1117092"/>
+            <a:ext cx="3313177" cy="369330"/>
+          </a:xfrm>
+          <a:prstGeom prst="rect">
+            <a:avLst/>
+          </a:prstGeom>
+          <a:noFill/>
+          <a:ln w="12700" cap="flat">
+            <a:noFill/>
+            <a:miter lim="400000"/>
+          </a:ln>
+          <a:effectLst/>
+          <a:sp3d/>
+        </p:spPr>
+        <p:style>
+          <a:lnRef idx="0">
+            <a:scrgbClr r="0" g="0" b="0"/>
+          </a:lnRef>
+          <a:fillRef idx="0">
+            <a:scrgbClr r="0" g="0" b="0"/>
+          </a:fillRef>
+          <a:effectRef idx="0">
+            <a:scrgbClr r="0" g="0" b="0"/>
+          </a:effectRef>
+          <a:fontRef idx="none"/>
+        </p:style>
+        <p:txBody>
+          <a:bodyPr rot="0" spcFirstLastPara="1" vertOverflow="overflow" horzOverflow="overflow" vert="horz" wrap="square" lIns="45719" tIns="45719" rIns="45719" bIns="45719" numCol="1" spcCol="38100" rtlCol="0" anchor="t">
+            <a:spAutoFit/>
+          </a:bodyPr>
+          <a:lstStyle/>
+          <a:p>
+            <a:pPr marL="0" marR="0" indent="0" algn="l" defTabSz="914400" rtl="0" fontAlgn="auto" latinLnBrk="0" hangingPunct="0">
+              <a:lnSpc>
+                <a:spcPct val="100000"/>
+              </a:lnSpc>
+              <a:spcBef>
+                <a:spcPts val="0"/>
+              </a:spcBef>
+              <a:spcAft>
+                <a:spcPts val="0"/>
+              </a:spcAft>
+              <a:buClrTx/>
+              <a:buSzTx/>
+              <a:buFontTx/>
+              <a:buNone/>
+              <a:tabLst/>
             </a:pPr>
             <a:r>
+              <a:rPr lang="en-US" u="sng" dirty="0"/>
+              <a:t>Automated</a:t>
+            </a:r>
+            <a:r>
+              <a:rPr kumimoji="0" lang="en-US" sz="1800" b="0" i="0" u="sng" strike="noStrike" cap="none" spc="0" normalizeH="0" baseline="0" dirty="0">
+                <a:ln>
+                  <a:noFill/>
+                </a:ln>
+                <a:solidFill>
+                  <a:srgbClr val="000000"/>
+                </a:solidFill>
+                <a:effectLst/>
+                <a:uFillTx/>
+                <a:latin typeface="+mj-lt"/>
+                <a:ea typeface="+mj-ea"/>
+                <a:cs typeface="+mj-cs"/>
+                <a:sym typeface="Aptos"/>
+              </a:rPr>
+              <a:t> Acceptance Testing</a:t>
+            </a:r>
+          </a:p>
+        </p:txBody>
+      </p:sp>
+      <p:sp>
+        <p:nvSpPr>
+          <p:cNvPr id="18" name="Text 10">
+            <a:extLst>
+              <a:ext uri="{FF2B5EF4-FFF2-40B4-BE49-F238E27FC236}">
+                <a16:creationId xmlns:a16="http://schemas.microsoft.com/office/drawing/2014/main" id="{C4E0FB12-3D40-F929-F0A4-EB1E4A0485DA}"/>
+              </a:ext>
+            </a:extLst>
+          </p:cNvPr>
+          <p:cNvSpPr txBox="1"/>
+          <p:nvPr/>
+        </p:nvSpPr>
+        <p:spPr>
+          <a:xfrm>
+            <a:off x="7568184" y="4477956"/>
+            <a:ext cx="2743201" cy="673101"/>
+          </a:xfrm>
+          <a:prstGeom prst="rect">
+            <a:avLst/>
+          </a:prstGeom>
+          <a:ln w="12700">
+            <a:miter lim="400000"/>
+          </a:ln>
+          <a:extLst>
+            <a:ext uri="{C572A759-6A51-4108-AA02-DFA0A04FC94B}">
+              <ma14:wrappingTextBoxFlag xmlns:ma14="http://schemas.microsoft.com/office/mac/drawingml/2011/main" xmlns:a14="http://schemas.microsoft.com/office/drawing/2010/main" xmlns:m="http://schemas.openxmlformats.org/officeDocument/2006/math" xmlns="" val="1"/>
+            </a:ext>
+          </a:extLst>
+        </p:spPr>
+        <p:txBody>
+          <a:bodyPr lIns="0" tIns="0" rIns="0" bIns="0" anchor="ctr">
+            <a:spAutoFit/>
+          </a:bodyPr>
+          <a:lstStyle>
+            <a:lvl1pPr algn="ctr">
+              <a:defRPr sz="4400" b="1">
+                <a:solidFill>
+                  <a:srgbClr val="C53030"/>
+                </a:solidFill>
+              </a:defRPr>
+            </a:lvl1pPr>
+          </a:lstStyle>
+          <a:p>
+            <a:r>
+              <a:rPr dirty="0"/>
+              <a:t>0</a:t>
+            </a:r>
+          </a:p>
+        </p:txBody>
+      </p:sp>
+      <p:sp>
+        <p:nvSpPr>
+          <p:cNvPr id="20" name="Text 11">
+            <a:extLst>
+              <a:ext uri="{FF2B5EF4-FFF2-40B4-BE49-F238E27FC236}">
+                <a16:creationId xmlns:a16="http://schemas.microsoft.com/office/drawing/2014/main" id="{3E2FF421-11F4-A539-2979-211A7201AFB7}"/>
+              </a:ext>
+            </a:extLst>
+          </p:cNvPr>
+          <p:cNvSpPr txBox="1"/>
+          <p:nvPr/>
+        </p:nvSpPr>
+        <p:spPr>
+          <a:xfrm>
+            <a:off x="7568184" y="5238811"/>
+            <a:ext cx="2743201" cy="184666"/>
+          </a:xfrm>
+          <a:prstGeom prst="rect">
+            <a:avLst/>
+          </a:prstGeom>
+          <a:ln w="12700">
+            <a:miter lim="400000"/>
+          </a:ln>
+          <a:extLst>
+            <a:ext uri="{C572A759-6A51-4108-AA02-DFA0A04FC94B}">
+              <ma14:wrappingTextBoxFlag xmlns:ma14="http://schemas.microsoft.com/office/mac/drawingml/2011/main" xmlns:a14="http://schemas.microsoft.com/office/drawing/2010/main" xmlns:m="http://schemas.openxmlformats.org/officeDocument/2006/math" xmlns="" val="1"/>
+            </a:ext>
+          </a:extLst>
+        </p:spPr>
+        <p:txBody>
+          <a:bodyPr lIns="0" tIns="0" rIns="0" bIns="0" anchor="ctr">
+            <a:spAutoFit/>
+          </a:bodyPr>
+          <a:lstStyle>
+            <a:lvl1pPr algn="ctr">
+              <a:defRPr sz="1200" b="1">
+                <a:solidFill>
+                  <a:srgbClr val="1F2937"/>
+                </a:solidFill>
+              </a:defRPr>
+            </a:lvl1pPr>
+          </a:lstStyle>
+          <a:p>
+            <a:r>
               <a:rPr lang="en-US" dirty="0"/>
-              <a:t>• Route mileage is entered manually</a:t>
-            </a:r>
-          </a:p>
-          <a:p>
-            <a:pPr>
-              <a:defRPr>
+              <a:t>ERRORS</a:t>
+            </a:r>
+          </a:p>
+        </p:txBody>
+      </p:sp>
+      <p:sp>
+        <p:nvSpPr>
+          <p:cNvPr id="22" name="Text 10">
+            <a:extLst>
+              <a:ext uri="{FF2B5EF4-FFF2-40B4-BE49-F238E27FC236}">
+                <a16:creationId xmlns:a16="http://schemas.microsoft.com/office/drawing/2014/main" id="{019179B0-E5A2-0617-C373-C8310918B785}"/>
+              </a:ext>
+            </a:extLst>
+          </p:cNvPr>
+          <p:cNvSpPr txBox="1"/>
+          <p:nvPr/>
+        </p:nvSpPr>
+        <p:spPr>
+          <a:xfrm>
+            <a:off x="7568184" y="5363332"/>
+            <a:ext cx="2743201" cy="673101"/>
+          </a:xfrm>
+          <a:prstGeom prst="rect">
+            <a:avLst/>
+          </a:prstGeom>
+          <a:ln w="12700">
+            <a:miter lim="400000"/>
+          </a:ln>
+          <a:extLst>
+            <a:ext uri="{C572A759-6A51-4108-AA02-DFA0A04FC94B}">
+              <ma14:wrappingTextBoxFlag xmlns:ma14="http://schemas.microsoft.com/office/mac/drawingml/2011/main" xmlns:a14="http://schemas.microsoft.com/office/drawing/2010/main" xmlns:m="http://schemas.openxmlformats.org/officeDocument/2006/math" xmlns="" val="1"/>
+            </a:ext>
+          </a:extLst>
+        </p:spPr>
+        <p:txBody>
+          <a:bodyPr lIns="0" tIns="0" rIns="0" bIns="0" anchor="ctr">
+            <a:spAutoFit/>
+          </a:bodyPr>
+          <a:lstStyle>
+            <a:lvl1pPr algn="ctr">
+              <a:defRPr sz="4400" b="1">
+                <a:solidFill>
+                  <a:srgbClr val="C53030"/>
+                </a:solidFill>
+              </a:defRPr>
+            </a:lvl1pPr>
+          </a:lstStyle>
+          <a:p>
+            <a:r>
+              <a:rPr dirty="0"/>
+              <a:t>0</a:t>
+            </a:r>
+          </a:p>
+        </p:txBody>
+      </p:sp>
+      <p:sp>
+        <p:nvSpPr>
+          <p:cNvPr id="24" name="Text 11">
+            <a:extLst>
+              <a:ext uri="{FF2B5EF4-FFF2-40B4-BE49-F238E27FC236}">
+                <a16:creationId xmlns:a16="http://schemas.microsoft.com/office/drawing/2014/main" id="{03FB4C5D-43D7-CE02-4B67-094CBC53C91B}"/>
+              </a:ext>
+            </a:extLst>
+          </p:cNvPr>
+          <p:cNvSpPr txBox="1"/>
+          <p:nvPr/>
+        </p:nvSpPr>
+        <p:spPr>
+          <a:xfrm>
+            <a:off x="7568184" y="6124187"/>
+            <a:ext cx="2743201" cy="184666"/>
+          </a:xfrm>
+          <a:prstGeom prst="rect">
+            <a:avLst/>
+          </a:prstGeom>
+          <a:ln w="12700">
+            <a:miter lim="400000"/>
+          </a:ln>
+          <a:extLst>
+            <a:ext uri="{C572A759-6A51-4108-AA02-DFA0A04FC94B}">
+              <ma14:wrappingTextBoxFlag xmlns:ma14="http://schemas.microsoft.com/office/mac/drawingml/2011/main" xmlns:a14="http://schemas.microsoft.com/office/drawing/2010/main" xmlns:m="http://schemas.openxmlformats.org/officeDocument/2006/math" xmlns="" val="1"/>
+            </a:ext>
+          </a:extLst>
+        </p:spPr>
+        <p:txBody>
+          <a:bodyPr lIns="0" tIns="0" rIns="0" bIns="0" anchor="ctr">
+            <a:spAutoFit/>
+          </a:bodyPr>
+          <a:lstStyle>
+            <a:lvl1pPr algn="ctr">
+              <a:defRPr sz="1200" b="1">
                 <a:solidFill>
                   <a:srgbClr val="1F2937"/>
                 </a:solidFill>
               </a:defRPr>
-            </a:pPr>
+            </a:lvl1pPr>
+          </a:lstStyle>
+          <a:p>
             <a:r>
               <a:rPr lang="en-US" dirty="0"/>
-              <a:t>• Drive time uses an average-speed estimate</a:t>
-            </a:r>
-          </a:p>
-          <a:p>
-            <a:pPr>
-              <a:defRPr>
-                <a:solidFill>
-                  <a:srgbClr val="1F2937"/>
-                </a:solidFill>
-              </a:defRPr>
-            </a:pPr>
-            <a:r>
-              <a:rPr lang="en-US" dirty="0"/>
-              <a:t>• Hotel, attraction, and gas-station data is simulated</a:t>
-            </a:r>
-          </a:p>
-          <a:p>
-            <a:pPr>
-              <a:defRPr>
-                <a:solidFill>
-                  <a:srgbClr val="1F2937"/>
-                </a:solidFill>
-              </a:defRPr>
-            </a:pPr>
-            <a:r>
-              <a:rPr lang="en-US" dirty="0"/>
-              <a:t>• Reservations and payments are simulated</a:t>
-            </a:r>
-          </a:p>
-          <a:p>
-            <a:pPr>
-              <a:defRPr>
-                <a:solidFill>
-                  <a:srgbClr val="1F2937"/>
-                </a:solidFill>
-              </a:defRPr>
-            </a:pPr>
-            <a:r>
-              <a:rPr lang="en-US" dirty="0"/>
-              <a:t>• Login and email filtering are demonstration-level, not secure authorization</a:t>
-            </a:r>
-          </a:p>
-          <a:p>
-            <a:pPr>
-              <a:defRPr>
-                <a:solidFill>
-                  <a:srgbClr val="1F2937"/>
-                </a:solidFill>
-              </a:defRPr>
-            </a:pPr>
-            <a:r>
-              <a:rPr lang="en-US" dirty="0"/>
-              <a:t>• The H2 database is local to each computer</a:t>
+              <a:t>SKIPPED</a:t>
             </a:r>
             <a:endParaRPr dirty="0"/>
           </a:p>
@@ -2507,408 +3504,357 @@
       </p:grpSpPr>
       <p:sp>
         <p:nvSpPr>
-          <p:cNvPr id="2" name="TextBox 1">
-            <a:extLst>
-              <a:ext uri="{FF2B5EF4-FFF2-40B4-BE49-F238E27FC236}">
-                <a16:creationId xmlns:a16="http://schemas.microsoft.com/office/drawing/2014/main" id="{6B076912-BE3E-9C7B-FCFD-A533045C68B6}"/>
-              </a:ext>
-            </a:extLst>
-          </p:cNvPr>
-          <p:cNvSpPr txBox="1"/>
-          <p:nvPr/>
-        </p:nvSpPr>
-        <p:spPr>
-          <a:xfrm>
-            <a:off x="612648" y="393192"/>
-            <a:ext cx="4526280" cy="369330"/>
-          </a:xfrm>
-          <a:prstGeom prst="rect">
-            <a:avLst/>
-          </a:prstGeom>
-          <a:noFill/>
-          <a:ln w="12700" cap="flat">
-            <a:noFill/>
-            <a:miter lim="400000"/>
-          </a:ln>
-          <a:effectLst/>
-          <a:sp3d/>
-        </p:spPr>
-        <p:style>
-          <a:lnRef idx="0">
-            <a:scrgbClr r="0" g="0" b="0"/>
-          </a:lnRef>
-          <a:fillRef idx="0">
-            <a:scrgbClr r="0" g="0" b="0"/>
-          </a:fillRef>
-          <a:effectRef idx="0">
-            <a:scrgbClr r="0" g="0" b="0"/>
-          </a:effectRef>
-          <a:fontRef idx="none"/>
-        </p:style>
-        <p:txBody>
-          <a:bodyPr rot="0" spcFirstLastPara="1" vertOverflow="overflow" horzOverflow="overflow" vert="horz" wrap="square" lIns="45719" tIns="45719" rIns="45719" bIns="45719" numCol="1" spcCol="38100" rtlCol="0" anchor="t">
-            <a:spAutoFit/>
-          </a:bodyPr>
+          <p:cNvPr id="185" name="Text 0"/>
+          <p:cNvSpPr txBox="1"/>
+          <p:nvPr/>
+        </p:nvSpPr>
+        <p:spPr>
+          <a:xfrm>
+            <a:off x="502919" y="335280"/>
+            <a:ext cx="411481" cy="381001"/>
+          </a:xfrm>
+          <a:prstGeom prst="rect">
+            <a:avLst/>
+          </a:prstGeom>
+          <a:ln w="12700">
+            <a:miter lim="400000"/>
+          </a:ln>
+          <a:extLst>
+            <a:ext uri="{C572A759-6A51-4108-AA02-DFA0A04FC94B}">
+              <ma14:wrappingTextBoxFlag xmlns:ma14="http://schemas.microsoft.com/office/mac/drawingml/2011/main" xmlns:a14="http://schemas.microsoft.com/office/drawing/2010/main" xmlns:m="http://schemas.openxmlformats.org/officeDocument/2006/math" xmlns="" val="1"/>
+            </a:ext>
+          </a:extLst>
+        </p:spPr>
+        <p:txBody>
+          <a:bodyPr lIns="0" tIns="0" rIns="0" bIns="0" anchor="ctr">
+            <a:spAutoFit/>
+          </a:bodyPr>
+          <a:lstStyle>
+            <a:lvl1pPr algn="ctr">
+              <a:defRPr sz="2200"/>
+            </a:lvl1pPr>
+          </a:lstStyle>
+          <a:p>
+            <a:r>
+              <a:t>⚠️</a:t>
+            </a:r>
+          </a:p>
+        </p:txBody>
+      </p:sp>
+      <p:sp>
+        <p:nvSpPr>
+          <p:cNvPr id="186" name="Text 1"/>
+          <p:cNvSpPr txBox="1"/>
+          <p:nvPr/>
+        </p:nvSpPr>
+        <p:spPr>
+          <a:xfrm>
+            <a:off x="1005839" y="298703"/>
+            <a:ext cx="9875522" cy="381001"/>
+          </a:xfrm>
+          <a:prstGeom prst="rect">
+            <a:avLst/>
+          </a:prstGeom>
+          <a:ln w="12700">
+            <a:miter lim="400000"/>
+          </a:ln>
+          <a:extLst>
+            <a:ext uri="{C572A759-6A51-4108-AA02-DFA0A04FC94B}">
+              <ma14:wrappingTextBoxFlag xmlns:ma14="http://schemas.microsoft.com/office/mac/drawingml/2011/main" xmlns:a14="http://schemas.microsoft.com/office/drawing/2010/main" xmlns:m="http://schemas.openxmlformats.org/officeDocument/2006/math" xmlns="" val="1"/>
+            </a:ext>
+          </a:extLst>
+        </p:spPr>
+        <p:txBody>
+          <a:bodyPr lIns="0" tIns="0" rIns="0" bIns="0" anchor="ctr">
+            <a:spAutoFit/>
+          </a:bodyPr>
+          <a:lstStyle>
+            <a:lvl1pPr>
+              <a:defRPr sz="2500" b="1">
+                <a:solidFill>
+                  <a:srgbClr val="17324D"/>
+                </a:solidFill>
+                <a:latin typeface="Aptos Display"/>
+                <a:ea typeface="Aptos Display"/>
+                <a:cs typeface="Aptos Display"/>
+                <a:sym typeface="Aptos Display"/>
+              </a:defRPr>
+            </a:lvl1pPr>
+          </a:lstStyle>
+          <a:p>
+            <a:r>
+              <a:t>Known limitations</a:t>
+            </a:r>
+          </a:p>
+        </p:txBody>
+      </p:sp>
+      <p:sp>
+        <p:nvSpPr>
+          <p:cNvPr id="187" name="Text 2"/>
+          <p:cNvSpPr txBox="1"/>
+          <p:nvPr/>
+        </p:nvSpPr>
+        <p:spPr>
+          <a:xfrm>
+            <a:off x="1024127" y="820928"/>
+            <a:ext cx="9875522" cy="177801"/>
+          </a:xfrm>
+          <a:prstGeom prst="rect">
+            <a:avLst/>
+          </a:prstGeom>
+          <a:ln w="12700">
+            <a:miter lim="400000"/>
+          </a:ln>
+          <a:extLst>
+            <a:ext uri="{C572A759-6A51-4108-AA02-DFA0A04FC94B}">
+              <ma14:wrappingTextBoxFlag xmlns:ma14="http://schemas.microsoft.com/office/mac/drawingml/2011/main" xmlns:a14="http://schemas.microsoft.com/office/drawing/2010/main" xmlns:m="http://schemas.openxmlformats.org/officeDocument/2006/math" xmlns="" val="1"/>
+            </a:ext>
+          </a:extLst>
+        </p:spPr>
+        <p:txBody>
+          <a:bodyPr lIns="0" tIns="0" rIns="0" bIns="0" anchor="ctr">
+            <a:spAutoFit/>
+          </a:bodyPr>
+          <a:lstStyle>
+            <a:lvl1pPr>
+              <a:defRPr sz="1200">
+                <a:solidFill>
+                  <a:srgbClr val="5F6B7A"/>
+                </a:solidFill>
+              </a:defRPr>
+            </a:lvl1pPr>
+          </a:lstStyle>
+          <a:p>
+            <a:r>
+              <a:t>These are acceptable for the academic prototype</a:t>
+            </a:r>
+          </a:p>
+        </p:txBody>
+      </p:sp>
+      <p:sp>
+        <p:nvSpPr>
+          <p:cNvPr id="188" name="Shape 3"/>
+          <p:cNvSpPr/>
+          <p:nvPr/>
+        </p:nvSpPr>
+        <p:spPr>
+          <a:xfrm>
+            <a:off x="411479" y="6419088"/>
+            <a:ext cx="11384282" cy="1"/>
+          </a:xfrm>
+          <a:prstGeom prst="line">
+            <a:avLst/>
+          </a:prstGeom>
+          <a:ln w="12700">
+            <a:solidFill>
+              <a:srgbClr val="D5DEE8"/>
+            </a:solidFill>
+          </a:ln>
+        </p:spPr>
+        <p:txBody>
+          <a:bodyPr lIns="45719" rIns="45719"/>
           <a:lstStyle/>
           <a:p>
-            <a:pPr marL="0" marR="0" indent="0" algn="l" defTabSz="914400" rtl="0" fontAlgn="auto" latinLnBrk="0" hangingPunct="0">
-              <a:lnSpc>
-                <a:spcPct val="100000"/>
-              </a:lnSpc>
-              <a:spcBef>
-                <a:spcPts val="0"/>
-              </a:spcBef>
-              <a:spcAft>
-                <a:spcPts val="0"/>
-              </a:spcAft>
-              <a:buClrTx/>
-              <a:buSzTx/>
-              <a:buFontTx/>
-              <a:buNone/>
-              <a:tabLst/>
+            <a:endParaRPr/>
+          </a:p>
+        </p:txBody>
+      </p:sp>
+      <p:sp>
+        <p:nvSpPr>
+          <p:cNvPr id="189" name="Text 4"/>
+          <p:cNvSpPr txBox="1"/>
+          <p:nvPr/>
+        </p:nvSpPr>
+        <p:spPr>
+          <a:xfrm>
+            <a:off x="502919" y="6543040"/>
+            <a:ext cx="7772401" cy="127001"/>
+          </a:xfrm>
+          <a:prstGeom prst="rect">
+            <a:avLst/>
+          </a:prstGeom>
+          <a:ln w="12700">
+            <a:miter lim="400000"/>
+          </a:ln>
+          <a:extLst>
+            <a:ext uri="{C572A759-6A51-4108-AA02-DFA0A04FC94B}">
+              <ma14:wrappingTextBoxFlag xmlns:ma14="http://schemas.microsoft.com/office/mac/drawingml/2011/main" xmlns:a14="http://schemas.microsoft.com/office/drawing/2010/main" xmlns:m="http://schemas.openxmlformats.org/officeDocument/2006/math" xmlns="" val="1"/>
+            </a:ext>
+          </a:extLst>
+        </p:spPr>
+        <p:txBody>
+          <a:bodyPr lIns="0" tIns="0" rIns="0" bIns="0" anchor="ctr">
+            <a:spAutoFit/>
+          </a:bodyPr>
+          <a:lstStyle>
+            <a:lvl1pPr>
+              <a:defRPr sz="800">
+                <a:solidFill>
+                  <a:srgbClr val="5F6B7A"/>
+                </a:solidFill>
+              </a:defRPr>
+            </a:lvl1pPr>
+          </a:lstStyle>
+          <a:p>
+            <a:r>
+              <a:t>MyTrip · CS 4398 · Texas State University · Summer 2026</a:t>
+            </a:r>
+          </a:p>
+        </p:txBody>
+      </p:sp>
+      <p:sp>
+        <p:nvSpPr>
+          <p:cNvPr id="190" name="Text 5"/>
+          <p:cNvSpPr txBox="1"/>
+          <p:nvPr/>
+        </p:nvSpPr>
+        <p:spPr>
+          <a:xfrm>
+            <a:off x="11384280" y="6529324"/>
+            <a:ext cx="320041" cy="127001"/>
+          </a:xfrm>
+          <a:prstGeom prst="rect">
+            <a:avLst/>
+          </a:prstGeom>
+          <a:ln w="12700">
+            <a:miter lim="400000"/>
+          </a:ln>
+          <a:extLst>
+            <a:ext uri="{C572A759-6A51-4108-AA02-DFA0A04FC94B}">
+              <ma14:wrappingTextBoxFlag xmlns:ma14="http://schemas.microsoft.com/office/mac/drawingml/2011/main" xmlns:a14="http://schemas.microsoft.com/office/drawing/2010/main" xmlns:m="http://schemas.openxmlformats.org/officeDocument/2006/math" xmlns="" val="1"/>
+            </a:ext>
+          </a:extLst>
+        </p:spPr>
+        <p:txBody>
+          <a:bodyPr lIns="0" tIns="0" rIns="0" bIns="0" anchor="ctr">
+            <a:spAutoFit/>
+          </a:bodyPr>
+          <a:lstStyle>
+            <a:lvl1pPr algn="r">
+              <a:defRPr sz="800">
+                <a:solidFill>
+                  <a:srgbClr val="5F6B7A"/>
+                </a:solidFill>
+              </a:defRPr>
+            </a:lvl1pPr>
+          </a:lstStyle>
+          <a:p>
+            <a:r>
+              <a:t>10</a:t>
+            </a:r>
+          </a:p>
+        </p:txBody>
+      </p:sp>
+      <p:sp>
+        <p:nvSpPr>
+          <p:cNvPr id="191" name="Text 6"/>
+          <p:cNvSpPr txBox="1"/>
+          <p:nvPr/>
+        </p:nvSpPr>
+        <p:spPr>
+          <a:xfrm>
+            <a:off x="868680" y="1463040"/>
+            <a:ext cx="7909560" cy="3840480"/>
+          </a:xfrm>
+          <a:prstGeom prst="rect">
+            <a:avLst/>
+          </a:prstGeom>
+          <a:ln w="12700">
+            <a:miter lim="400000"/>
+          </a:ln>
+          <a:extLst>
+            <a:ext uri="{C572A759-6A51-4108-AA02-DFA0A04FC94B}">
+              <ma14:wrappingTextBoxFlag xmlns:ma14="http://schemas.microsoft.com/office/mac/drawingml/2011/main" xmlns:a14="http://schemas.microsoft.com/office/drawing/2010/main" xmlns:m="http://schemas.openxmlformats.org/officeDocument/2006/math" xmlns="" val="1"/>
+            </a:ext>
+          </a:extLst>
+        </p:spPr>
+        <p:txBody>
+          <a:bodyPr lIns="380" tIns="380" rIns="380" bIns="380">
+            <a:normAutofit/>
+          </a:bodyPr>
+          <a:lstStyle/>
+          <a:p>
+            <a:pPr>
+              <a:defRPr>
+                <a:solidFill>
+                  <a:srgbClr val="1F2937"/>
+                </a:solidFill>
+              </a:defRPr>
             </a:pPr>
             <a:r>
-              <a:rPr kumimoji="0" lang="en-US" sz="1800" b="0" i="0" u="sng" strike="noStrike" cap="none" spc="0" normalizeH="0" baseline="0" dirty="0">
-                <a:ln>
-                  <a:noFill/>
-                </a:ln>
-                <a:solidFill>
-                  <a:srgbClr val="000000"/>
-                </a:solidFill>
-                <a:effectLst/>
-                <a:uFillTx/>
-                <a:latin typeface="+mj-lt"/>
-                <a:ea typeface="+mj-ea"/>
-                <a:cs typeface="+mj-cs"/>
-                <a:sym typeface="Aptos"/>
-              </a:rPr>
-              <a:t>IDE-Integrated AI Workflow</a:t>
-            </a:r>
-          </a:p>
-        </p:txBody>
-      </p:sp>
-      <p:sp>
-        <p:nvSpPr>
-          <p:cNvPr id="3" name="TextBox 2">
-            <a:extLst>
-              <a:ext uri="{FF2B5EF4-FFF2-40B4-BE49-F238E27FC236}">
-                <a16:creationId xmlns:a16="http://schemas.microsoft.com/office/drawing/2014/main" id="{E83041C3-A698-4E1F-F0A7-B15FA43358B9}"/>
-              </a:ext>
-            </a:extLst>
-          </p:cNvPr>
-          <p:cNvSpPr txBox="1"/>
-          <p:nvPr/>
-        </p:nvSpPr>
-        <p:spPr>
-          <a:xfrm>
-            <a:off x="173736" y="1752491"/>
-            <a:ext cx="5915914" cy="2893098"/>
-          </a:xfrm>
-          <a:prstGeom prst="rect">
-            <a:avLst/>
-          </a:prstGeom>
-          <a:ln/>
-        </p:spPr>
-        <p:style>
-          <a:lnRef idx="2">
-            <a:schemeClr val="dk1"/>
-          </a:lnRef>
-          <a:fillRef idx="1">
-            <a:schemeClr val="lt1"/>
-          </a:fillRef>
-          <a:effectRef idx="0">
-            <a:schemeClr val="dk1"/>
-          </a:effectRef>
-          <a:fontRef idx="minor">
-            <a:schemeClr val="dk1"/>
-          </a:fontRef>
-        </p:style>
-        <p:txBody>
-          <a:bodyPr rot="0" spcFirstLastPara="1" vertOverflow="overflow" horzOverflow="overflow" vert="horz" wrap="square" lIns="45719" tIns="45719" rIns="45719" bIns="45719" numCol="1" spcCol="38100" rtlCol="0" anchor="t">
-            <a:spAutoFit/>
-          </a:bodyPr>
-          <a:lstStyle/>
-          <a:p>
-            <a:r>
-              <a:rPr lang="en-US" sz="1400" dirty="0">
-                <a:solidFill>
-                  <a:srgbClr val="000000"/>
-                </a:solidFill>
-                <a:latin typeface="+mj-lt"/>
-                <a:ea typeface="+mj-ea"/>
-                <a:cs typeface="+mj-cs"/>
-              </a:rPr>
-              <a:t>GitHub Copilot Agent was used directly inside Visual Studio Code during the</a:t>
-            </a:r>
-          </a:p>
-          <a:p>
-            <a:r>
-              <a:rPr lang="en-US" sz="1400" dirty="0">
-                <a:solidFill>
-                  <a:srgbClr val="000000"/>
-                </a:solidFill>
-                <a:latin typeface="+mj-lt"/>
-                <a:ea typeface="+mj-ea"/>
-                <a:cs typeface="+mj-cs"/>
-              </a:rPr>
-              <a:t>final development and verification phase.</a:t>
-            </a:r>
-          </a:p>
-          <a:p>
-            <a:endParaRPr lang="en-US" sz="1400" dirty="0">
-              <a:solidFill>
-                <a:srgbClr val="000000"/>
-              </a:solidFill>
-              <a:latin typeface="+mj-lt"/>
-              <a:ea typeface="+mj-ea"/>
-              <a:cs typeface="+mj-cs"/>
-            </a:endParaRPr>
-          </a:p>
-          <a:p>
-            <a:r>
-              <a:rPr lang="en-US" sz="1400" dirty="0">
-                <a:solidFill>
-                  <a:srgbClr val="000000"/>
-                </a:solidFill>
-                <a:latin typeface="+mj-lt"/>
-                <a:ea typeface="+mj-ea"/>
-                <a:cs typeface="+mj-cs"/>
-              </a:rPr>
-              <a:t>• Repository instructions: .</a:t>
-            </a:r>
-            <a:r>
-              <a:rPr lang="en-US" sz="1400" dirty="0" err="1">
-                <a:solidFill>
-                  <a:srgbClr val="000000"/>
-                </a:solidFill>
-                <a:latin typeface="+mj-lt"/>
-                <a:ea typeface="+mj-ea"/>
-                <a:cs typeface="+mj-cs"/>
-              </a:rPr>
-              <a:t>github</a:t>
-            </a:r>
-            <a:r>
-              <a:rPr lang="en-US" sz="1400" dirty="0">
-                <a:solidFill>
-                  <a:srgbClr val="000000"/>
-                </a:solidFill>
-                <a:latin typeface="+mj-lt"/>
-                <a:ea typeface="+mj-ea"/>
-                <a:cs typeface="+mj-cs"/>
-              </a:rPr>
-              <a:t>/copilot-instructions.md</a:t>
-            </a:r>
-          </a:p>
-          <a:p>
-            <a:r>
-              <a:rPr lang="en-US" sz="1400" dirty="0">
-                <a:solidFill>
-                  <a:srgbClr val="000000"/>
-                </a:solidFill>
-                <a:latin typeface="+mj-lt"/>
-                <a:ea typeface="+mj-ea"/>
-                <a:cs typeface="+mj-cs"/>
-              </a:rPr>
-              <a:t>• Four reusable prompts: .</a:t>
-            </a:r>
-            <a:r>
-              <a:rPr lang="en-US" sz="1400" dirty="0" err="1">
-                <a:solidFill>
-                  <a:srgbClr val="000000"/>
-                </a:solidFill>
-                <a:latin typeface="+mj-lt"/>
-                <a:ea typeface="+mj-ea"/>
-                <a:cs typeface="+mj-cs"/>
-              </a:rPr>
-              <a:t>github</a:t>
-            </a:r>
-            <a:r>
-              <a:rPr lang="en-US" sz="1400" dirty="0">
-                <a:solidFill>
-                  <a:srgbClr val="000000"/>
-                </a:solidFill>
-                <a:latin typeface="+mj-lt"/>
-                <a:ea typeface="+mj-ea"/>
-                <a:cs typeface="+mj-cs"/>
-              </a:rPr>
-              <a:t>/prompts/</a:t>
-            </a:r>
-          </a:p>
-          <a:p>
-            <a:r>
-              <a:rPr lang="en-US" sz="1400" dirty="0">
-                <a:solidFill>
-                  <a:srgbClr val="000000"/>
-                </a:solidFill>
-                <a:latin typeface="+mj-lt"/>
-                <a:ea typeface="+mj-ea"/>
-                <a:cs typeface="+mj-cs"/>
-              </a:rPr>
-              <a:t>• Four project context files: ai-context/</a:t>
-            </a:r>
-          </a:p>
-          <a:p>
-            <a:r>
-              <a:rPr lang="en-US" sz="1400" dirty="0">
-                <a:solidFill>
-                  <a:srgbClr val="000000"/>
-                </a:solidFill>
-                <a:latin typeface="+mj-lt"/>
-                <a:ea typeface="+mj-ea"/>
-                <a:cs typeface="+mj-cs"/>
-              </a:rPr>
-              <a:t>• Corrected zero-distance and zero-budget validation</a:t>
-            </a:r>
-          </a:p>
-          <a:p>
-            <a:r>
-              <a:rPr lang="en-US" sz="1400" dirty="0">
-                <a:solidFill>
-                  <a:srgbClr val="000000"/>
-                </a:solidFill>
-                <a:latin typeface="+mj-lt"/>
-                <a:ea typeface="+mj-ea"/>
-                <a:cs typeface="+mj-cs"/>
-              </a:rPr>
-              <a:t>• Added regression tests for verified defects</a:t>
-            </a:r>
-          </a:p>
-          <a:p>
-            <a:r>
-              <a:rPr lang="en-US" sz="1400" dirty="0">
-                <a:solidFill>
-                  <a:srgbClr val="000000"/>
-                </a:solidFill>
-                <a:latin typeface="+mj-lt"/>
-                <a:ea typeface="+mj-ea"/>
-                <a:cs typeface="+mj-cs"/>
-              </a:rPr>
-              <a:t>• Corrected Spring parameter binding through the Java -parameters option</a:t>
-            </a:r>
-          </a:p>
-          <a:p>
-            <a:r>
-              <a:rPr lang="en-US" sz="1400" dirty="0">
-                <a:solidFill>
-                  <a:srgbClr val="000000"/>
-                </a:solidFill>
-                <a:latin typeface="+mj-lt"/>
-                <a:ea typeface="+mj-ea"/>
-                <a:cs typeface="+mj-cs"/>
-              </a:rPr>
-              <a:t>• Generated the Trip lifecycle </a:t>
-            </a:r>
-            <a:r>
-              <a:rPr lang="en-US" sz="1400" dirty="0" err="1">
-                <a:solidFill>
-                  <a:srgbClr val="000000"/>
-                </a:solidFill>
-                <a:latin typeface="+mj-lt"/>
-                <a:ea typeface="+mj-ea"/>
-                <a:cs typeface="+mj-cs"/>
-              </a:rPr>
-              <a:t>statechart</a:t>
-            </a:r>
-            <a:endParaRPr lang="en-US" sz="1400" dirty="0">
-              <a:solidFill>
-                <a:srgbClr val="000000"/>
-              </a:solidFill>
-              <a:latin typeface="+mj-lt"/>
-              <a:ea typeface="+mj-ea"/>
-              <a:cs typeface="+mj-cs"/>
-            </a:endParaRPr>
-          </a:p>
-          <a:p>
-            <a:r>
-              <a:rPr lang="en-US" sz="1400" dirty="0">
-                <a:solidFill>
-                  <a:srgbClr val="000000"/>
-                </a:solidFill>
-                <a:latin typeface="+mj-lt"/>
-                <a:ea typeface="+mj-ea"/>
-                <a:cs typeface="+mj-cs"/>
-              </a:rPr>
-              <a:t>• Generated the corrected as-built UML class diagram</a:t>
-            </a:r>
-          </a:p>
-          <a:p>
-            <a:r>
-              <a:rPr lang="en-US" sz="1400" dirty="0">
-                <a:solidFill>
-                  <a:srgbClr val="000000"/>
-                </a:solidFill>
-                <a:latin typeface="+mj-lt"/>
-                <a:ea typeface="+mj-ea"/>
-                <a:cs typeface="+mj-cs"/>
-              </a:rPr>
-              <a:t>• Verified 29 automated tests with 0 failures</a:t>
-            </a:r>
-          </a:p>
-          <a:p>
-            <a:r>
-              <a:rPr lang="en-US" sz="1400" dirty="0">
-                <a:solidFill>
-                  <a:srgbClr val="000000"/>
-                </a:solidFill>
-                <a:latin typeface="+mj-lt"/>
-                <a:ea typeface="+mj-ea"/>
-                <a:cs typeface="+mj-cs"/>
-              </a:rPr>
-              <a:t>• Exported IDE chats and screenshots are preserved in ai-evidence/</a:t>
-            </a:r>
-            <a:endParaRPr kumimoji="0" lang="en-US" sz="1400" b="0" i="0" u="none" strike="noStrike" cap="none" spc="0" normalizeH="0" baseline="0" dirty="0">
-              <a:ln>
-                <a:noFill/>
-              </a:ln>
-              <a:solidFill>
-                <a:srgbClr val="000000"/>
-              </a:solidFill>
-              <a:effectLst/>
-              <a:uFillTx/>
-              <a:latin typeface="+mj-lt"/>
-              <a:ea typeface="+mj-ea"/>
-              <a:cs typeface="+mj-cs"/>
-              <a:sym typeface="Aptos"/>
-            </a:endParaRPr>
-          </a:p>
-        </p:txBody>
-      </p:sp>
-      <p:pic>
-        <p:nvPicPr>
-          <p:cNvPr id="5" name="Picture 4">
-            <a:extLst>
-              <a:ext uri="{FF2B5EF4-FFF2-40B4-BE49-F238E27FC236}">
-                <a16:creationId xmlns:a16="http://schemas.microsoft.com/office/drawing/2014/main" id="{60F31A92-2469-81F6-286F-7C93E4B2F153}"/>
-              </a:ext>
-            </a:extLst>
-          </p:cNvPr>
-          <p:cNvPicPr>
-            <a:picLocks noChangeAspect="1"/>
-          </p:cNvPicPr>
-          <p:nvPr/>
-        </p:nvPicPr>
-        <p:blipFill>
-          <a:blip r:embed="rId2"/>
-          <a:stretch>
-            <a:fillRect/>
-          </a:stretch>
-        </p:blipFill>
-        <p:spPr>
-          <a:xfrm>
-            <a:off x="6356183" y="1638299"/>
-            <a:ext cx="5823117" cy="3121483"/>
-          </a:xfrm>
-          <a:prstGeom prst="rect">
-            <a:avLst/>
-          </a:prstGeom>
-        </p:spPr>
-      </p:pic>
+              <a:rPr lang="en-US" dirty="0"/>
+              <a:t>• Route mileage is entered manually</a:t>
+            </a:r>
+          </a:p>
+          <a:p>
+            <a:pPr>
+              <a:defRPr>
+                <a:solidFill>
+                  <a:srgbClr val="1F2937"/>
+                </a:solidFill>
+              </a:defRPr>
+            </a:pPr>
+            <a:r>
+              <a:rPr lang="en-US" dirty="0"/>
+              <a:t>• Drive time uses an average-speed estimate</a:t>
+            </a:r>
+          </a:p>
+          <a:p>
+            <a:pPr>
+              <a:defRPr>
+                <a:solidFill>
+                  <a:srgbClr val="1F2937"/>
+                </a:solidFill>
+              </a:defRPr>
+            </a:pPr>
+            <a:r>
+              <a:rPr lang="en-US" dirty="0"/>
+              <a:t>• Hotel, attraction, and gas-station data is simulated</a:t>
+            </a:r>
+          </a:p>
+          <a:p>
+            <a:pPr>
+              <a:defRPr>
+                <a:solidFill>
+                  <a:srgbClr val="1F2937"/>
+                </a:solidFill>
+              </a:defRPr>
+            </a:pPr>
+            <a:r>
+              <a:rPr lang="en-US" dirty="0"/>
+              <a:t>• Reservations and payments are simulated</a:t>
+            </a:r>
+          </a:p>
+          <a:p>
+            <a:pPr>
+              <a:defRPr>
+                <a:solidFill>
+                  <a:srgbClr val="1F2937"/>
+                </a:solidFill>
+              </a:defRPr>
+            </a:pPr>
+            <a:r>
+              <a:rPr lang="en-US" dirty="0"/>
+              <a:t>• Login and email filtering are demonstration-level, not secure authorization</a:t>
+            </a:r>
+          </a:p>
+          <a:p>
+            <a:pPr>
+              <a:defRPr>
+                <a:solidFill>
+                  <a:srgbClr val="1F2937"/>
+                </a:solidFill>
+              </a:defRPr>
+            </a:pPr>
+            <a:r>
+              <a:rPr lang="en-US" dirty="0"/>
+              <a:t>• The H2 database is local to each computer</a:t>
+            </a:r>
+            <a:endParaRPr dirty="0"/>
+          </a:p>
+        </p:txBody>
+      </p:sp>
     </p:spTree>
-    <p:extLst>
-      <p:ext uri="{BB962C8B-B14F-4D97-AF65-F5344CB8AC3E}">
-        <p14:creationId xmlns:p14="http://schemas.microsoft.com/office/powerpoint/2010/main" val="2573093635"/>
-      </p:ext>
-    </p:extLst>
   </p:cSld>
   <p:clrMapOvr>
     <a:masterClrMapping/>
@@ -2936,6 +3882,435 @@
       </p:grpSpPr>
       <p:sp>
         <p:nvSpPr>
+          <p:cNvPr id="2" name="TextBox 1">
+            <a:extLst>
+              <a:ext uri="{FF2B5EF4-FFF2-40B4-BE49-F238E27FC236}">
+                <a16:creationId xmlns:a16="http://schemas.microsoft.com/office/drawing/2014/main" id="{6B076912-BE3E-9C7B-FCFD-A533045C68B6}"/>
+              </a:ext>
+            </a:extLst>
+          </p:cNvPr>
+          <p:cNvSpPr txBox="1"/>
+          <p:nvPr/>
+        </p:nvSpPr>
+        <p:spPr>
+          <a:xfrm>
+            <a:off x="612648" y="393192"/>
+            <a:ext cx="4526280" cy="369330"/>
+          </a:xfrm>
+          <a:prstGeom prst="rect">
+            <a:avLst/>
+          </a:prstGeom>
+          <a:noFill/>
+          <a:ln w="12700" cap="flat">
+            <a:noFill/>
+            <a:miter lim="400000"/>
+          </a:ln>
+          <a:effectLst/>
+          <a:sp3d/>
+        </p:spPr>
+        <p:style>
+          <a:lnRef idx="0">
+            <a:scrgbClr r="0" g="0" b="0"/>
+          </a:lnRef>
+          <a:fillRef idx="0">
+            <a:scrgbClr r="0" g="0" b="0"/>
+          </a:fillRef>
+          <a:effectRef idx="0">
+            <a:scrgbClr r="0" g="0" b="0"/>
+          </a:effectRef>
+          <a:fontRef idx="none"/>
+        </p:style>
+        <p:txBody>
+          <a:bodyPr rot="0" spcFirstLastPara="1" vertOverflow="overflow" horzOverflow="overflow" vert="horz" wrap="square" lIns="45719" tIns="45719" rIns="45719" bIns="45719" numCol="1" spcCol="38100" rtlCol="0" anchor="t">
+            <a:spAutoFit/>
+          </a:bodyPr>
+          <a:lstStyle/>
+          <a:p>
+            <a:pPr marL="0" marR="0" indent="0" algn="l" defTabSz="914400" rtl="0" fontAlgn="auto" latinLnBrk="0" hangingPunct="0">
+              <a:lnSpc>
+                <a:spcPct val="100000"/>
+              </a:lnSpc>
+              <a:spcBef>
+                <a:spcPts val="0"/>
+              </a:spcBef>
+              <a:spcAft>
+                <a:spcPts val="0"/>
+              </a:spcAft>
+              <a:buClrTx/>
+              <a:buSzTx/>
+              <a:buFontTx/>
+              <a:buNone/>
+              <a:tabLst/>
+            </a:pPr>
+            <a:r>
+              <a:rPr kumimoji="0" lang="en-US" sz="1800" b="0" i="0" u="sng" strike="noStrike" cap="none" spc="0" normalizeH="0" baseline="0" dirty="0">
+                <a:ln>
+                  <a:noFill/>
+                </a:ln>
+                <a:solidFill>
+                  <a:srgbClr val="000000"/>
+                </a:solidFill>
+                <a:effectLst/>
+                <a:uFillTx/>
+                <a:latin typeface="+mj-lt"/>
+                <a:ea typeface="+mj-ea"/>
+                <a:cs typeface="+mj-cs"/>
+                <a:sym typeface="Aptos"/>
+              </a:rPr>
+              <a:t>IDE-Integrated AI Workflow</a:t>
+            </a:r>
+          </a:p>
+        </p:txBody>
+      </p:sp>
+      <p:sp>
+        <p:nvSpPr>
+          <p:cNvPr id="3" name="TextBox 2">
+            <a:extLst>
+              <a:ext uri="{FF2B5EF4-FFF2-40B4-BE49-F238E27FC236}">
+                <a16:creationId xmlns:a16="http://schemas.microsoft.com/office/drawing/2014/main" id="{E83041C3-A698-4E1F-F0A7-B15FA43358B9}"/>
+              </a:ext>
+            </a:extLst>
+          </p:cNvPr>
+          <p:cNvSpPr txBox="1"/>
+          <p:nvPr/>
+        </p:nvSpPr>
+        <p:spPr>
+          <a:xfrm>
+            <a:off x="173736" y="1752491"/>
+            <a:ext cx="5915914" cy="2893098"/>
+          </a:xfrm>
+          <a:prstGeom prst="rect">
+            <a:avLst/>
+          </a:prstGeom>
+          <a:ln/>
+        </p:spPr>
+        <p:style>
+          <a:lnRef idx="2">
+            <a:schemeClr val="dk1"/>
+          </a:lnRef>
+          <a:fillRef idx="1">
+            <a:schemeClr val="lt1"/>
+          </a:fillRef>
+          <a:effectRef idx="0">
+            <a:schemeClr val="dk1"/>
+          </a:effectRef>
+          <a:fontRef idx="minor">
+            <a:schemeClr val="dk1"/>
+          </a:fontRef>
+        </p:style>
+        <p:txBody>
+          <a:bodyPr rot="0" spcFirstLastPara="1" vertOverflow="overflow" horzOverflow="overflow" vert="horz" wrap="square" lIns="45719" tIns="45719" rIns="45719" bIns="45719" numCol="1" spcCol="38100" rtlCol="0" anchor="t">
+            <a:spAutoFit/>
+          </a:bodyPr>
+          <a:lstStyle/>
+          <a:p>
+            <a:r>
+              <a:rPr lang="en-US" sz="1400" dirty="0">
+                <a:solidFill>
+                  <a:srgbClr val="000000"/>
+                </a:solidFill>
+                <a:latin typeface="+mj-lt"/>
+                <a:ea typeface="+mj-ea"/>
+                <a:cs typeface="+mj-cs"/>
+              </a:rPr>
+              <a:t>GitHub Copilot Agent was used directly inside Visual Studio Code during the</a:t>
+            </a:r>
+          </a:p>
+          <a:p>
+            <a:r>
+              <a:rPr lang="en-US" sz="1400" dirty="0">
+                <a:solidFill>
+                  <a:srgbClr val="000000"/>
+                </a:solidFill>
+                <a:latin typeface="+mj-lt"/>
+                <a:ea typeface="+mj-ea"/>
+                <a:cs typeface="+mj-cs"/>
+              </a:rPr>
+              <a:t>final development and verification phase.</a:t>
+            </a:r>
+          </a:p>
+          <a:p>
+            <a:endParaRPr lang="en-US" sz="1400" dirty="0">
+              <a:solidFill>
+                <a:srgbClr val="000000"/>
+              </a:solidFill>
+              <a:latin typeface="+mj-lt"/>
+              <a:ea typeface="+mj-ea"/>
+              <a:cs typeface="+mj-cs"/>
+            </a:endParaRPr>
+          </a:p>
+          <a:p>
+            <a:r>
+              <a:rPr lang="en-US" sz="1400" dirty="0">
+                <a:solidFill>
+                  <a:srgbClr val="000000"/>
+                </a:solidFill>
+                <a:latin typeface="+mj-lt"/>
+                <a:ea typeface="+mj-ea"/>
+                <a:cs typeface="+mj-cs"/>
+              </a:rPr>
+              <a:t>• Repository instructions: .</a:t>
+            </a:r>
+            <a:r>
+              <a:rPr lang="en-US" sz="1400" dirty="0" err="1">
+                <a:solidFill>
+                  <a:srgbClr val="000000"/>
+                </a:solidFill>
+                <a:latin typeface="+mj-lt"/>
+                <a:ea typeface="+mj-ea"/>
+                <a:cs typeface="+mj-cs"/>
+              </a:rPr>
+              <a:t>github</a:t>
+            </a:r>
+            <a:r>
+              <a:rPr lang="en-US" sz="1400" dirty="0">
+                <a:solidFill>
+                  <a:srgbClr val="000000"/>
+                </a:solidFill>
+                <a:latin typeface="+mj-lt"/>
+                <a:ea typeface="+mj-ea"/>
+                <a:cs typeface="+mj-cs"/>
+              </a:rPr>
+              <a:t>/copilot-instructions.md</a:t>
+            </a:r>
+          </a:p>
+          <a:p>
+            <a:r>
+              <a:rPr lang="en-US" sz="1400" dirty="0">
+                <a:solidFill>
+                  <a:srgbClr val="000000"/>
+                </a:solidFill>
+                <a:latin typeface="+mj-lt"/>
+                <a:ea typeface="+mj-ea"/>
+                <a:cs typeface="+mj-cs"/>
+              </a:rPr>
+              <a:t>• Four reusable prompts: .</a:t>
+            </a:r>
+            <a:r>
+              <a:rPr lang="en-US" sz="1400" dirty="0" err="1">
+                <a:solidFill>
+                  <a:srgbClr val="000000"/>
+                </a:solidFill>
+                <a:latin typeface="+mj-lt"/>
+                <a:ea typeface="+mj-ea"/>
+                <a:cs typeface="+mj-cs"/>
+              </a:rPr>
+              <a:t>github</a:t>
+            </a:r>
+            <a:r>
+              <a:rPr lang="en-US" sz="1400" dirty="0">
+                <a:solidFill>
+                  <a:srgbClr val="000000"/>
+                </a:solidFill>
+                <a:latin typeface="+mj-lt"/>
+                <a:ea typeface="+mj-ea"/>
+                <a:cs typeface="+mj-cs"/>
+              </a:rPr>
+              <a:t>/prompts/</a:t>
+            </a:r>
+          </a:p>
+          <a:p>
+            <a:r>
+              <a:rPr lang="en-US" sz="1400" dirty="0">
+                <a:solidFill>
+                  <a:srgbClr val="000000"/>
+                </a:solidFill>
+                <a:latin typeface="+mj-lt"/>
+                <a:ea typeface="+mj-ea"/>
+                <a:cs typeface="+mj-cs"/>
+              </a:rPr>
+              <a:t>• Four project context files: ai-context/</a:t>
+            </a:r>
+          </a:p>
+          <a:p>
+            <a:r>
+              <a:rPr lang="en-US" sz="1400" dirty="0">
+                <a:solidFill>
+                  <a:srgbClr val="000000"/>
+                </a:solidFill>
+                <a:latin typeface="+mj-lt"/>
+                <a:ea typeface="+mj-ea"/>
+                <a:cs typeface="+mj-cs"/>
+              </a:rPr>
+              <a:t>• Corrected zero-distance and zero-budget validation</a:t>
+            </a:r>
+          </a:p>
+          <a:p>
+            <a:r>
+              <a:rPr lang="en-US" sz="1400" dirty="0">
+                <a:solidFill>
+                  <a:srgbClr val="000000"/>
+                </a:solidFill>
+                <a:latin typeface="+mj-lt"/>
+                <a:ea typeface="+mj-ea"/>
+                <a:cs typeface="+mj-cs"/>
+              </a:rPr>
+              <a:t>• Added regression tests for verified defects</a:t>
+            </a:r>
+          </a:p>
+          <a:p>
+            <a:r>
+              <a:rPr lang="en-US" sz="1400" dirty="0">
+                <a:solidFill>
+                  <a:srgbClr val="000000"/>
+                </a:solidFill>
+                <a:latin typeface="+mj-lt"/>
+                <a:ea typeface="+mj-ea"/>
+                <a:cs typeface="+mj-cs"/>
+              </a:rPr>
+              <a:t>• Corrected Spring parameter binding through the Java -parameters option</a:t>
+            </a:r>
+          </a:p>
+          <a:p>
+            <a:r>
+              <a:rPr lang="en-US" sz="1400" dirty="0">
+                <a:solidFill>
+                  <a:srgbClr val="000000"/>
+                </a:solidFill>
+                <a:latin typeface="+mj-lt"/>
+                <a:ea typeface="+mj-ea"/>
+                <a:cs typeface="+mj-cs"/>
+              </a:rPr>
+              <a:t>• Generated the Trip lifecycle </a:t>
+            </a:r>
+            <a:r>
+              <a:rPr lang="en-US" sz="1400" dirty="0" err="1">
+                <a:solidFill>
+                  <a:srgbClr val="000000"/>
+                </a:solidFill>
+                <a:latin typeface="+mj-lt"/>
+                <a:ea typeface="+mj-ea"/>
+                <a:cs typeface="+mj-cs"/>
+              </a:rPr>
+              <a:t>statechart</a:t>
+            </a:r>
+            <a:endParaRPr lang="en-US" sz="1400" dirty="0">
+              <a:solidFill>
+                <a:srgbClr val="000000"/>
+              </a:solidFill>
+              <a:latin typeface="+mj-lt"/>
+              <a:ea typeface="+mj-ea"/>
+              <a:cs typeface="+mj-cs"/>
+            </a:endParaRPr>
+          </a:p>
+          <a:p>
+            <a:r>
+              <a:rPr lang="en-US" sz="1400" dirty="0">
+                <a:solidFill>
+                  <a:srgbClr val="000000"/>
+                </a:solidFill>
+                <a:latin typeface="+mj-lt"/>
+                <a:ea typeface="+mj-ea"/>
+                <a:cs typeface="+mj-cs"/>
+              </a:rPr>
+              <a:t>• Generated the corrected as-built UML class diagram</a:t>
+            </a:r>
+          </a:p>
+          <a:p>
+            <a:r>
+              <a:rPr lang="en-US" sz="1400" dirty="0">
+                <a:solidFill>
+                  <a:srgbClr val="000000"/>
+                </a:solidFill>
+                <a:latin typeface="+mj-lt"/>
+                <a:ea typeface="+mj-ea"/>
+                <a:cs typeface="+mj-cs"/>
+              </a:rPr>
+              <a:t>• Verified 29 automated tests with 0 failures</a:t>
+            </a:r>
+          </a:p>
+          <a:p>
+            <a:r>
+              <a:rPr lang="en-US" sz="1400" dirty="0">
+                <a:solidFill>
+                  <a:srgbClr val="000000"/>
+                </a:solidFill>
+                <a:latin typeface="+mj-lt"/>
+                <a:ea typeface="+mj-ea"/>
+                <a:cs typeface="+mj-cs"/>
+              </a:rPr>
+              <a:t>• Exported IDE chats and screenshots are preserved in ai-evidence/</a:t>
+            </a:r>
+            <a:endParaRPr kumimoji="0" lang="en-US" sz="1400" b="0" i="0" u="none" strike="noStrike" cap="none" spc="0" normalizeH="0" baseline="0" dirty="0">
+              <a:ln>
+                <a:noFill/>
+              </a:ln>
+              <a:solidFill>
+                <a:srgbClr val="000000"/>
+              </a:solidFill>
+              <a:effectLst/>
+              <a:uFillTx/>
+              <a:latin typeface="+mj-lt"/>
+              <a:ea typeface="+mj-ea"/>
+              <a:cs typeface="+mj-cs"/>
+              <a:sym typeface="Aptos"/>
+            </a:endParaRPr>
+          </a:p>
+        </p:txBody>
+      </p:sp>
+      <p:pic>
+        <p:nvPicPr>
+          <p:cNvPr id="5" name="Picture 4">
+            <a:extLst>
+              <a:ext uri="{FF2B5EF4-FFF2-40B4-BE49-F238E27FC236}">
+                <a16:creationId xmlns:a16="http://schemas.microsoft.com/office/drawing/2014/main" id="{60F31A92-2469-81F6-286F-7C93E4B2F153}"/>
+              </a:ext>
+            </a:extLst>
+          </p:cNvPr>
+          <p:cNvPicPr>
+            <a:picLocks noChangeAspect="1"/>
+          </p:cNvPicPr>
+          <p:nvPr/>
+        </p:nvPicPr>
+        <p:blipFill>
+          <a:blip r:embed="rId2"/>
+          <a:stretch>
+            <a:fillRect/>
+          </a:stretch>
+        </p:blipFill>
+        <p:spPr>
+          <a:xfrm>
+            <a:off x="6356183" y="1638299"/>
+            <a:ext cx="5823117" cy="3121483"/>
+          </a:xfrm>
+          <a:prstGeom prst="rect">
+            <a:avLst/>
+          </a:prstGeom>
+        </p:spPr>
+      </p:pic>
+    </p:spTree>
+    <p:extLst>
+      <p:ext uri="{BB962C8B-B14F-4D97-AF65-F5344CB8AC3E}">
+        <p14:creationId xmlns:p14="http://schemas.microsoft.com/office/powerpoint/2010/main" val="2573093635"/>
+      </p:ext>
+    </p:extLst>
+  </p:cSld>
+  <p:clrMapOvr>
+    <a:masterClrMapping/>
+  </p:clrMapOvr>
+  <p:transition spd="med"/>
+</p:sld>
+</file>
+
+<file path=ppt/slides/slide13.xml><?xml version="1.0" encoding="utf-8"?>
+<p:sld xmlns:a="http://schemas.openxmlformats.org/drawingml/2006/main" xmlns:r="http://schemas.openxmlformats.org/officeDocument/2006/relationships" xmlns:p="http://schemas.openxmlformats.org/presentationml/2006/main">
+  <p:cSld>
+    <p:spTree>
+      <p:nvGrpSpPr>
+        <p:cNvPr id="1" name=""/>
+        <p:cNvGrpSpPr/>
+        <p:nvPr/>
+      </p:nvGrpSpPr>
+      <p:grpSpPr>
+        <a:xfrm>
+          <a:off x="0" y="0"/>
+          <a:ext cx="0" cy="0"/>
+          <a:chOff x="0" y="0"/>
+          <a:chExt cx="0" cy="0"/>
+        </a:xfrm>
+      </p:grpSpPr>
+      <p:sp>
+        <p:nvSpPr>
           <p:cNvPr id="193" name="Text 0"/>
           <p:cNvSpPr txBox="1"/>
           <p:nvPr/>
@@ -2953,7 +4328,7 @@
           </a:ln>
           <a:extLst>
             <a:ext uri="{C572A759-6A51-4108-AA02-DFA0A04FC94B}">
-              <ma14:wrappingTextBoxFlag xmlns="" xmlns:m="http://schemas.openxmlformats.org/officeDocument/2006/math" xmlns:a14="http://schemas.microsoft.com/office/drawing/2010/main" xmlns:ma14="http://schemas.microsoft.com/office/mac/drawingml/2011/main" val="1"/>
+              <ma14:wrappingTextBoxFlag xmlns:ma14="http://schemas.microsoft.com/office/mac/drawingml/2011/main" xmlns:a14="http://schemas.microsoft.com/office/drawing/2010/main" xmlns:m="http://schemas.openxmlformats.org/officeDocument/2006/math" xmlns="" val="1"/>
             </a:ext>
           </a:extLst>
         </p:spPr>
@@ -2992,7 +4367,7 @@
           </a:ln>
           <a:extLst>
             <a:ext uri="{C572A759-6A51-4108-AA02-DFA0A04FC94B}">
-              <ma14:wrappingTextBoxFlag xmlns="" xmlns:m="http://schemas.openxmlformats.org/officeDocument/2006/math" xmlns:a14="http://schemas.microsoft.com/office/drawing/2010/main" xmlns:ma14="http://schemas.microsoft.com/office/mac/drawingml/2011/main" val="1"/>
+              <ma14:wrappingTextBoxFlag xmlns:ma14="http://schemas.microsoft.com/office/mac/drawingml/2011/main" xmlns:a14="http://schemas.microsoft.com/office/drawing/2010/main" xmlns:m="http://schemas.openxmlformats.org/officeDocument/2006/math" xmlns="" val="1"/>
             </a:ext>
           </a:extLst>
         </p:spPr>
@@ -3035,7 +4410,7 @@
           </a:ln>
           <a:extLst>
             <a:ext uri="{C572A759-6A51-4108-AA02-DFA0A04FC94B}">
-              <ma14:wrappingTextBoxFlag xmlns="" xmlns:m="http://schemas.openxmlformats.org/officeDocument/2006/math" xmlns:a14="http://schemas.microsoft.com/office/drawing/2010/main" xmlns:ma14="http://schemas.microsoft.com/office/mac/drawingml/2011/main" val="1"/>
+              <ma14:wrappingTextBoxFlag xmlns:ma14="http://schemas.microsoft.com/office/mac/drawingml/2011/main" xmlns:a14="http://schemas.microsoft.com/office/drawing/2010/main" xmlns:m="http://schemas.openxmlformats.org/officeDocument/2006/math" xmlns="" val="1"/>
             </a:ext>
           </a:extLst>
         </p:spPr>
@@ -3078,7 +4453,7 @@
           </a:ln>
           <a:extLst>
             <a:ext uri="{C572A759-6A51-4108-AA02-DFA0A04FC94B}">
-              <ma14:wrappingTextBoxFlag xmlns="" xmlns:m="http://schemas.openxmlformats.org/officeDocument/2006/math" xmlns:a14="http://schemas.microsoft.com/office/drawing/2010/main" xmlns:ma14="http://schemas.microsoft.com/office/mac/drawingml/2011/main" val="1"/>
+              <ma14:wrappingTextBoxFlag xmlns:ma14="http://schemas.microsoft.com/office/mac/drawingml/2011/main" xmlns:a14="http://schemas.microsoft.com/office/drawing/2010/main" xmlns:m="http://schemas.openxmlformats.org/officeDocument/2006/math" xmlns="" val="1"/>
             </a:ext>
           </a:extLst>
         </p:spPr>
@@ -3121,7 +4496,7 @@
           </a:ln>
           <a:extLst>
             <a:ext uri="{C572A759-6A51-4108-AA02-DFA0A04FC94B}">
-              <ma14:wrappingTextBoxFlag xmlns="" xmlns:m="http://schemas.openxmlformats.org/officeDocument/2006/math" xmlns:a14="http://schemas.microsoft.com/office/drawing/2010/main" xmlns:ma14="http://schemas.microsoft.com/office/mac/drawingml/2011/main" val="1"/>
+              <ma14:wrappingTextBoxFlag xmlns:ma14="http://schemas.microsoft.com/office/mac/drawingml/2011/main" xmlns:a14="http://schemas.microsoft.com/office/drawing/2010/main" xmlns:m="http://schemas.openxmlformats.org/officeDocument/2006/math" xmlns="" val="1"/>
             </a:ext>
           </a:extLst>
         </p:spPr>
@@ -3192,7 +4567,7 @@
           </a:ln>
           <a:extLst>
             <a:ext uri="{C572A759-6A51-4108-AA02-DFA0A04FC94B}">
-              <ma14:wrappingTextBoxFlag xmlns="" xmlns:m="http://schemas.openxmlformats.org/officeDocument/2006/math" xmlns:a14="http://schemas.microsoft.com/office/drawing/2010/main" xmlns:ma14="http://schemas.microsoft.com/office/mac/drawingml/2011/main" val="1"/>
+              <ma14:wrappingTextBoxFlag xmlns:ma14="http://schemas.microsoft.com/office/mac/drawingml/2011/main" xmlns:a14="http://schemas.microsoft.com/office/drawing/2010/main" xmlns:m="http://schemas.openxmlformats.org/officeDocument/2006/math" xmlns="" val="1"/>
             </a:ext>
           </a:extLst>
         </p:spPr>
@@ -3263,7 +4638,7 @@
           </a:ln>
           <a:extLst>
             <a:ext uri="{C572A759-6A51-4108-AA02-DFA0A04FC94B}">
-              <ma14:wrappingTextBoxFlag xmlns="" xmlns:m="http://schemas.openxmlformats.org/officeDocument/2006/math" xmlns:a14="http://schemas.microsoft.com/office/drawing/2010/main" xmlns:ma14="http://schemas.microsoft.com/office/mac/drawingml/2011/main" val="1"/>
+              <ma14:wrappingTextBoxFlag xmlns:ma14="http://schemas.microsoft.com/office/mac/drawingml/2011/main" xmlns:a14="http://schemas.microsoft.com/office/drawing/2010/main" xmlns:m="http://schemas.openxmlformats.org/officeDocument/2006/math" xmlns="" val="1"/>
             </a:ext>
           </a:extLst>
         </p:spPr>
@@ -3306,7 +4681,7 @@
           </a:ln>
           <a:extLst>
             <a:ext uri="{C572A759-6A51-4108-AA02-DFA0A04FC94B}">
-              <ma14:wrappingTextBoxFlag xmlns="" xmlns:m="http://schemas.openxmlformats.org/officeDocument/2006/math" xmlns:a14="http://schemas.microsoft.com/office/drawing/2010/main" xmlns:ma14="http://schemas.microsoft.com/office/mac/drawingml/2011/main" val="1"/>
+              <ma14:wrappingTextBoxFlag xmlns:ma14="http://schemas.microsoft.com/office/mac/drawingml/2011/main" xmlns:a14="http://schemas.microsoft.com/office/drawing/2010/main" xmlns:m="http://schemas.openxmlformats.org/officeDocument/2006/math" xmlns="" val="1"/>
             </a:ext>
           </a:extLst>
         </p:spPr>
@@ -3375,7 +4750,7 @@
           </a:ln>
           <a:extLst>
             <a:ext uri="{C572A759-6A51-4108-AA02-DFA0A04FC94B}">
-              <ma14:wrappingTextBoxFlag xmlns="" xmlns:m="http://schemas.openxmlformats.org/officeDocument/2006/math" xmlns:a14="http://schemas.microsoft.com/office/drawing/2010/main" xmlns:ma14="http://schemas.microsoft.com/office/mac/drawingml/2011/main" val="1"/>
+              <ma14:wrappingTextBoxFlag xmlns:ma14="http://schemas.microsoft.com/office/mac/drawingml/2011/main" xmlns:a14="http://schemas.microsoft.com/office/drawing/2010/main" xmlns:m="http://schemas.openxmlformats.org/officeDocument/2006/math" xmlns="" val="1"/>
             </a:ext>
           </a:extLst>
         </p:spPr>
@@ -3414,7 +4789,7 @@
           </a:ln>
           <a:extLst>
             <a:ext uri="{C572A759-6A51-4108-AA02-DFA0A04FC94B}">
-              <ma14:wrappingTextBoxFlag xmlns="" xmlns:m="http://schemas.openxmlformats.org/officeDocument/2006/math" xmlns:a14="http://schemas.microsoft.com/office/drawing/2010/main" xmlns:ma14="http://schemas.microsoft.com/office/mac/drawingml/2011/main" val="1"/>
+              <ma14:wrappingTextBoxFlag xmlns:ma14="http://schemas.microsoft.com/office/mac/drawingml/2011/main" xmlns:a14="http://schemas.microsoft.com/office/drawing/2010/main" xmlns:m="http://schemas.openxmlformats.org/officeDocument/2006/math" xmlns="" val="1"/>
             </a:ext>
           </a:extLst>
         </p:spPr>
@@ -3461,7 +4836,7 @@
           </a:ln>
           <a:extLst>
             <a:ext uri="{C572A759-6A51-4108-AA02-DFA0A04FC94B}">
-              <ma14:wrappingTextBoxFlag xmlns="" xmlns:m="http://schemas.openxmlformats.org/officeDocument/2006/math" xmlns:a14="http://schemas.microsoft.com/office/drawing/2010/main" xmlns:ma14="http://schemas.microsoft.com/office/mac/drawingml/2011/main" val="1"/>
+              <ma14:wrappingTextBoxFlag xmlns:ma14="http://schemas.microsoft.com/office/mac/drawingml/2011/main" xmlns:a14="http://schemas.microsoft.com/office/drawing/2010/main" xmlns:m="http://schemas.openxmlformats.org/officeDocument/2006/math" xmlns="" val="1"/>
             </a:ext>
           </a:extLst>
         </p:spPr>
@@ -3532,7 +4907,7 @@
           </a:ln>
           <a:extLst>
             <a:ext uri="{C572A759-6A51-4108-AA02-DFA0A04FC94B}">
-              <ma14:wrappingTextBoxFlag xmlns="" xmlns:m="http://schemas.openxmlformats.org/officeDocument/2006/math" xmlns:a14="http://schemas.microsoft.com/office/drawing/2010/main" xmlns:ma14="http://schemas.microsoft.com/office/mac/drawingml/2011/main" val="1"/>
+              <ma14:wrappingTextBoxFlag xmlns:ma14="http://schemas.microsoft.com/office/mac/drawingml/2011/main" xmlns:a14="http://schemas.microsoft.com/office/drawing/2010/main" xmlns:m="http://schemas.openxmlformats.org/officeDocument/2006/math" xmlns="" val="1"/>
             </a:ext>
           </a:extLst>
         </p:spPr>
@@ -3575,7 +4950,7 @@
           </a:ln>
           <a:extLst>
             <a:ext uri="{C572A759-6A51-4108-AA02-DFA0A04FC94B}">
-              <ma14:wrappingTextBoxFlag xmlns="" xmlns:m="http://schemas.openxmlformats.org/officeDocument/2006/math" xmlns:a14="http://schemas.microsoft.com/office/drawing/2010/main" xmlns:ma14="http://schemas.microsoft.com/office/mac/drawingml/2011/main" val="1"/>
+              <ma14:wrappingTextBoxFlag xmlns:ma14="http://schemas.microsoft.com/office/mac/drawingml/2011/main" xmlns:a14="http://schemas.microsoft.com/office/drawing/2010/main" xmlns:m="http://schemas.openxmlformats.org/officeDocument/2006/math" xmlns="" val="1"/>
             </a:ext>
           </a:extLst>
         </p:spPr>
@@ -3651,7 +5026,7 @@
           </a:ln>
           <a:extLst>
             <a:ext uri="{C572A759-6A51-4108-AA02-DFA0A04FC94B}">
-              <ma14:wrappingTextBoxFlag xmlns="" xmlns:m="http://schemas.openxmlformats.org/officeDocument/2006/math" xmlns:a14="http://schemas.microsoft.com/office/drawing/2010/main" xmlns:ma14="http://schemas.microsoft.com/office/mac/drawingml/2011/main" val="1"/>
+              <ma14:wrappingTextBoxFlag xmlns:ma14="http://schemas.microsoft.com/office/mac/drawingml/2011/main" xmlns:a14="http://schemas.microsoft.com/office/drawing/2010/main" xmlns:m="http://schemas.openxmlformats.org/officeDocument/2006/math" xmlns="" val="1"/>
             </a:ext>
           </a:extLst>
         </p:spPr>
@@ -3690,7 +5065,7 @@
           </a:ln>
           <a:extLst>
             <a:ext uri="{C572A759-6A51-4108-AA02-DFA0A04FC94B}">
-              <ma14:wrappingTextBoxFlag xmlns="" xmlns:m="http://schemas.openxmlformats.org/officeDocument/2006/math" xmlns:a14="http://schemas.microsoft.com/office/drawing/2010/main" xmlns:ma14="http://schemas.microsoft.com/office/mac/drawingml/2011/main" val="1"/>
+              <ma14:wrappingTextBoxFlag xmlns:ma14="http://schemas.microsoft.com/office/mac/drawingml/2011/main" xmlns:a14="http://schemas.microsoft.com/office/drawing/2010/main" xmlns:m="http://schemas.openxmlformats.org/officeDocument/2006/math" xmlns="" val="1"/>
             </a:ext>
           </a:extLst>
         </p:spPr>
@@ -3733,7 +5108,7 @@
           </a:ln>
           <a:extLst>
             <a:ext uri="{C572A759-6A51-4108-AA02-DFA0A04FC94B}">
-              <ma14:wrappingTextBoxFlag xmlns="" xmlns:m="http://schemas.openxmlformats.org/officeDocument/2006/math" xmlns:a14="http://schemas.microsoft.com/office/drawing/2010/main" xmlns:ma14="http://schemas.microsoft.com/office/mac/drawingml/2011/main" val="1"/>
+              <ma14:wrappingTextBoxFlag xmlns:ma14="http://schemas.microsoft.com/office/mac/drawingml/2011/main" xmlns:a14="http://schemas.microsoft.com/office/drawing/2010/main" xmlns:m="http://schemas.openxmlformats.org/officeDocument/2006/math" xmlns="" val="1"/>
             </a:ext>
           </a:extLst>
         </p:spPr>
@@ -3809,7 +5184,7 @@
           </a:ln>
           <a:extLst>
             <a:ext uri="{C572A759-6A51-4108-AA02-DFA0A04FC94B}">
-              <ma14:wrappingTextBoxFlag xmlns="" xmlns:m="http://schemas.openxmlformats.org/officeDocument/2006/math" xmlns:a14="http://schemas.microsoft.com/office/drawing/2010/main" xmlns:ma14="http://schemas.microsoft.com/office/mac/drawingml/2011/main" val="1"/>
+              <ma14:wrappingTextBoxFlag xmlns:ma14="http://schemas.microsoft.com/office/mac/drawingml/2011/main" xmlns:a14="http://schemas.microsoft.com/office/drawing/2010/main" xmlns:m="http://schemas.openxmlformats.org/officeDocument/2006/math" xmlns="" val="1"/>
             </a:ext>
           </a:extLst>
         </p:spPr>
@@ -3848,7 +5223,7 @@
           </a:ln>
           <a:extLst>
             <a:ext uri="{C572A759-6A51-4108-AA02-DFA0A04FC94B}">
-              <ma14:wrappingTextBoxFlag xmlns="" xmlns:m="http://schemas.openxmlformats.org/officeDocument/2006/math" xmlns:a14="http://schemas.microsoft.com/office/drawing/2010/main" xmlns:ma14="http://schemas.microsoft.com/office/mac/drawingml/2011/main" val="1"/>
+              <ma14:wrappingTextBoxFlag xmlns:ma14="http://schemas.microsoft.com/office/mac/drawingml/2011/main" xmlns:a14="http://schemas.microsoft.com/office/drawing/2010/main" xmlns:m="http://schemas.openxmlformats.org/officeDocument/2006/math" xmlns="" val="1"/>
             </a:ext>
           </a:extLst>
         </p:spPr>
@@ -3891,7 +5266,7 @@
           </a:ln>
           <a:extLst>
             <a:ext uri="{C572A759-6A51-4108-AA02-DFA0A04FC94B}">
-              <ma14:wrappingTextBoxFlag xmlns="" xmlns:m="http://schemas.openxmlformats.org/officeDocument/2006/math" xmlns:a14="http://schemas.microsoft.com/office/drawing/2010/main" xmlns:ma14="http://schemas.microsoft.com/office/mac/drawingml/2011/main" val="1"/>
+              <ma14:wrappingTextBoxFlag xmlns:ma14="http://schemas.microsoft.com/office/mac/drawingml/2011/main" xmlns:a14="http://schemas.microsoft.com/office/drawing/2010/main" xmlns:m="http://schemas.openxmlformats.org/officeDocument/2006/math" xmlns="" val="1"/>
             </a:ext>
           </a:extLst>
         </p:spPr>
@@ -3967,7 +5342,7 @@
           </a:ln>
           <a:extLst>
             <a:ext uri="{C572A759-6A51-4108-AA02-DFA0A04FC94B}">
-              <ma14:wrappingTextBoxFlag xmlns="" xmlns:m="http://schemas.openxmlformats.org/officeDocument/2006/math" xmlns:a14="http://schemas.microsoft.com/office/drawing/2010/main" xmlns:ma14="http://schemas.microsoft.com/office/mac/drawingml/2011/main" val="1"/>
+              <ma14:wrappingTextBoxFlag xmlns:ma14="http://schemas.microsoft.com/office/mac/drawingml/2011/main" xmlns:a14="http://schemas.microsoft.com/office/drawing/2010/main" xmlns:m="http://schemas.openxmlformats.org/officeDocument/2006/math" xmlns="" val="1"/>
             </a:ext>
           </a:extLst>
         </p:spPr>
@@ -4006,7 +5381,7 @@
           </a:ln>
           <a:extLst>
             <a:ext uri="{C572A759-6A51-4108-AA02-DFA0A04FC94B}">
-              <ma14:wrappingTextBoxFlag xmlns="" xmlns:m="http://schemas.openxmlformats.org/officeDocument/2006/math" xmlns:a14="http://schemas.microsoft.com/office/drawing/2010/main" xmlns:ma14="http://schemas.microsoft.com/office/mac/drawingml/2011/main" val="1"/>
+              <ma14:wrappingTextBoxFlag xmlns:ma14="http://schemas.microsoft.com/office/mac/drawingml/2011/main" xmlns:a14="http://schemas.microsoft.com/office/drawing/2010/main" xmlns:m="http://schemas.openxmlformats.org/officeDocument/2006/math" xmlns="" val="1"/>
             </a:ext>
           </a:extLst>
         </p:spPr>
@@ -4049,7 +5424,7 @@
           </a:ln>
           <a:extLst>
             <a:ext uri="{C572A759-6A51-4108-AA02-DFA0A04FC94B}">
-              <ma14:wrappingTextBoxFlag xmlns="" xmlns:m="http://schemas.openxmlformats.org/officeDocument/2006/math" xmlns:a14="http://schemas.microsoft.com/office/drawing/2010/main" xmlns:ma14="http://schemas.microsoft.com/office/mac/drawingml/2011/main" val="1"/>
+              <ma14:wrappingTextBoxFlag xmlns:ma14="http://schemas.microsoft.com/office/mac/drawingml/2011/main" xmlns:a14="http://schemas.microsoft.com/office/drawing/2010/main" xmlns:m="http://schemas.openxmlformats.org/officeDocument/2006/math" xmlns="" val="1"/>
             </a:ext>
           </a:extLst>
         </p:spPr>
@@ -4153,7 +5528,7 @@
           </a:ln>
           <a:extLst>
             <a:ext uri="{C572A759-6A51-4108-AA02-DFA0A04FC94B}">
-              <ma14:wrappingTextBoxFlag xmlns="" xmlns:m="http://schemas.openxmlformats.org/officeDocument/2006/math" xmlns:a14="http://schemas.microsoft.com/office/drawing/2010/main" xmlns:ma14="http://schemas.microsoft.com/office/mac/drawingml/2011/main" val="1"/>
+              <ma14:wrappingTextBoxFlag xmlns:ma14="http://schemas.microsoft.com/office/mac/drawingml/2011/main" xmlns:a14="http://schemas.microsoft.com/office/drawing/2010/main" xmlns:m="http://schemas.openxmlformats.org/officeDocument/2006/math" xmlns="" val="1"/>
             </a:ext>
           </a:extLst>
         </p:spPr>
@@ -4196,7 +5571,7 @@
           </a:ln>
           <a:extLst>
             <a:ext uri="{C572A759-6A51-4108-AA02-DFA0A04FC94B}">
-              <ma14:wrappingTextBoxFlag xmlns="" xmlns:m="http://schemas.openxmlformats.org/officeDocument/2006/math" xmlns:a14="http://schemas.microsoft.com/office/drawing/2010/main" xmlns:ma14="http://schemas.microsoft.com/office/mac/drawingml/2011/main" val="1"/>
+              <ma14:wrappingTextBoxFlag xmlns:ma14="http://schemas.microsoft.com/office/mac/drawingml/2011/main" xmlns:a14="http://schemas.microsoft.com/office/drawing/2010/main" xmlns:m="http://schemas.openxmlformats.org/officeDocument/2006/math" xmlns="" val="1"/>
             </a:ext>
           </a:extLst>
         </p:spPr>
@@ -4288,7 +5663,7 @@
           </a:ln>
           <a:extLst>
             <a:ext uri="{C572A759-6A51-4108-AA02-DFA0A04FC94B}">
-              <ma14:wrappingTextBoxFlag xmlns="" xmlns:m="http://schemas.openxmlformats.org/officeDocument/2006/math" xmlns:a14="http://schemas.microsoft.com/office/drawing/2010/main" xmlns:ma14="http://schemas.microsoft.com/office/mac/drawingml/2011/main" val="1"/>
+              <ma14:wrappingTextBoxFlag xmlns:ma14="http://schemas.microsoft.com/office/mac/drawingml/2011/main" xmlns:a14="http://schemas.microsoft.com/office/drawing/2010/main" xmlns:m="http://schemas.openxmlformats.org/officeDocument/2006/math" xmlns="" val="1"/>
             </a:ext>
           </a:extLst>
         </p:spPr>
@@ -4327,7 +5702,7 @@
           </a:ln>
           <a:extLst>
             <a:ext uri="{C572A759-6A51-4108-AA02-DFA0A04FC94B}">
-              <ma14:wrappingTextBoxFlag xmlns="" xmlns:m="http://schemas.openxmlformats.org/officeDocument/2006/math" xmlns:a14="http://schemas.microsoft.com/office/drawing/2010/main" xmlns:ma14="http://schemas.microsoft.com/office/mac/drawingml/2011/main" val="1"/>
+              <ma14:wrappingTextBoxFlag xmlns:ma14="http://schemas.microsoft.com/office/mac/drawingml/2011/main" xmlns:a14="http://schemas.microsoft.com/office/drawing/2010/main" xmlns:m="http://schemas.openxmlformats.org/officeDocument/2006/math" xmlns="" val="1"/>
             </a:ext>
           </a:extLst>
         </p:spPr>
@@ -4374,7 +5749,7 @@
           </a:ln>
           <a:extLst>
             <a:ext uri="{C572A759-6A51-4108-AA02-DFA0A04FC94B}">
-              <ma14:wrappingTextBoxFlag xmlns="" xmlns:m="http://schemas.openxmlformats.org/officeDocument/2006/math" xmlns:a14="http://schemas.microsoft.com/office/drawing/2010/main" xmlns:ma14="http://schemas.microsoft.com/office/mac/drawingml/2011/main" val="1"/>
+              <ma14:wrappingTextBoxFlag xmlns:ma14="http://schemas.microsoft.com/office/mac/drawingml/2011/main" xmlns:a14="http://schemas.microsoft.com/office/drawing/2010/main" xmlns:m="http://schemas.openxmlformats.org/officeDocument/2006/math" xmlns="" val="1"/>
             </a:ext>
           </a:extLst>
         </p:spPr>
@@ -4445,7 +5820,7 @@
           </a:ln>
           <a:extLst>
             <a:ext uri="{C572A759-6A51-4108-AA02-DFA0A04FC94B}">
-              <ma14:wrappingTextBoxFlag xmlns="" xmlns:m="http://schemas.openxmlformats.org/officeDocument/2006/math" xmlns:a14="http://schemas.microsoft.com/office/drawing/2010/main" xmlns:ma14="http://schemas.microsoft.com/office/mac/drawingml/2011/main" val="1"/>
+              <ma14:wrappingTextBoxFlag xmlns:ma14="http://schemas.microsoft.com/office/mac/drawingml/2011/main" xmlns:a14="http://schemas.microsoft.com/office/drawing/2010/main" xmlns:m="http://schemas.openxmlformats.org/officeDocument/2006/math" xmlns="" val="1"/>
             </a:ext>
           </a:extLst>
         </p:spPr>
@@ -4488,7 +5863,7 @@
           </a:ln>
           <a:extLst>
             <a:ext uri="{C572A759-6A51-4108-AA02-DFA0A04FC94B}">
-              <ma14:wrappingTextBoxFlag xmlns="" xmlns:m="http://schemas.openxmlformats.org/officeDocument/2006/math" xmlns:a14="http://schemas.microsoft.com/office/drawing/2010/main" xmlns:ma14="http://schemas.microsoft.com/office/mac/drawingml/2011/main" val="1"/>
+              <ma14:wrappingTextBoxFlag xmlns:ma14="http://schemas.microsoft.com/office/mac/drawingml/2011/main" xmlns:a14="http://schemas.microsoft.com/office/drawing/2010/main" xmlns:m="http://schemas.openxmlformats.org/officeDocument/2006/math" xmlns="" val="1"/>
             </a:ext>
           </a:extLst>
         </p:spPr>
@@ -4531,7 +5906,7 @@
           </a:ln>
           <a:extLst>
             <a:ext uri="{C572A759-6A51-4108-AA02-DFA0A04FC94B}">
-              <ma14:wrappingTextBoxFlag xmlns="" xmlns:m="http://schemas.openxmlformats.org/officeDocument/2006/math" xmlns:a14="http://schemas.microsoft.com/office/drawing/2010/main" xmlns:ma14="http://schemas.microsoft.com/office/mac/drawingml/2011/main" val="1"/>
+              <ma14:wrappingTextBoxFlag xmlns:ma14="http://schemas.microsoft.com/office/mac/drawingml/2011/main" xmlns:a14="http://schemas.microsoft.com/office/drawing/2010/main" xmlns:m="http://schemas.openxmlformats.org/officeDocument/2006/math" xmlns="" val="1"/>
             </a:ext>
           </a:extLst>
         </p:spPr>
@@ -4574,7 +5949,7 @@
           </a:ln>
           <a:extLst>
             <a:ext uri="{C572A759-6A51-4108-AA02-DFA0A04FC94B}">
-              <ma14:wrappingTextBoxFlag xmlns="" xmlns:m="http://schemas.openxmlformats.org/officeDocument/2006/math" xmlns:a14="http://schemas.microsoft.com/office/drawing/2010/main" xmlns:ma14="http://schemas.microsoft.com/office/mac/drawingml/2011/main" val="1"/>
+              <ma14:wrappingTextBoxFlag xmlns:ma14="http://schemas.microsoft.com/office/mac/drawingml/2011/main" xmlns:a14="http://schemas.microsoft.com/office/drawing/2010/main" xmlns:m="http://schemas.openxmlformats.org/officeDocument/2006/math" xmlns="" val="1"/>
             </a:ext>
           </a:extLst>
         </p:spPr>
@@ -4681,7 +6056,7 @@
           </a:ln>
           <a:extLst>
             <a:ext uri="{C572A759-6A51-4108-AA02-DFA0A04FC94B}">
-              <ma14:wrappingTextBoxFlag xmlns="" xmlns:m="http://schemas.openxmlformats.org/officeDocument/2006/math" xmlns:a14="http://schemas.microsoft.com/office/drawing/2010/main" xmlns:ma14="http://schemas.microsoft.com/office/mac/drawingml/2011/main" val="1"/>
+              <ma14:wrappingTextBoxFlag xmlns:ma14="http://schemas.microsoft.com/office/mac/drawingml/2011/main" xmlns:a14="http://schemas.microsoft.com/office/drawing/2010/main" xmlns:m="http://schemas.openxmlformats.org/officeDocument/2006/math" xmlns="" val="1"/>
             </a:ext>
           </a:extLst>
         </p:spPr>
@@ -4724,7 +6099,7 @@
           </a:ln>
           <a:extLst>
             <a:ext uri="{C572A759-6A51-4108-AA02-DFA0A04FC94B}">
-              <ma14:wrappingTextBoxFlag xmlns="" xmlns:m="http://schemas.openxmlformats.org/officeDocument/2006/math" xmlns:a14="http://schemas.microsoft.com/office/drawing/2010/main" xmlns:ma14="http://schemas.microsoft.com/office/mac/drawingml/2011/main" val="1"/>
+              <ma14:wrappingTextBoxFlag xmlns:ma14="http://schemas.microsoft.com/office/mac/drawingml/2011/main" xmlns:a14="http://schemas.microsoft.com/office/drawing/2010/main" xmlns:m="http://schemas.openxmlformats.org/officeDocument/2006/math" xmlns="" val="1"/>
             </a:ext>
           </a:extLst>
         </p:spPr>
@@ -4835,7 +6210,7 @@
           </a:ln>
           <a:extLst>
             <a:ext uri="{C572A759-6A51-4108-AA02-DFA0A04FC94B}">
-              <ma14:wrappingTextBoxFlag xmlns="" xmlns:m="http://schemas.openxmlformats.org/officeDocument/2006/math" xmlns:a14="http://schemas.microsoft.com/office/drawing/2010/main" xmlns:ma14="http://schemas.microsoft.com/office/mac/drawingml/2011/main" val="1"/>
+              <ma14:wrappingTextBoxFlag xmlns:ma14="http://schemas.microsoft.com/office/mac/drawingml/2011/main" xmlns:a14="http://schemas.microsoft.com/office/drawing/2010/main" xmlns:m="http://schemas.openxmlformats.org/officeDocument/2006/math" xmlns="" val="1"/>
             </a:ext>
           </a:extLst>
         </p:spPr>
@@ -4904,7 +6279,7 @@
           </a:ln>
           <a:extLst>
             <a:ext uri="{C572A759-6A51-4108-AA02-DFA0A04FC94B}">
-              <ma14:wrappingTextBoxFlag xmlns="" xmlns:m="http://schemas.openxmlformats.org/officeDocument/2006/math" xmlns:a14="http://schemas.microsoft.com/office/drawing/2010/main" xmlns:ma14="http://schemas.microsoft.com/office/mac/drawingml/2011/main" val="1"/>
+              <ma14:wrappingTextBoxFlag xmlns:ma14="http://schemas.microsoft.com/office/mac/drawingml/2011/main" xmlns:a14="http://schemas.microsoft.com/office/drawing/2010/main" xmlns:m="http://schemas.openxmlformats.org/officeDocument/2006/math" xmlns="" val="1"/>
             </a:ext>
           </a:extLst>
         </p:spPr>
@@ -4943,7 +6318,7 @@
           </a:ln>
           <a:extLst>
             <a:ext uri="{C572A759-6A51-4108-AA02-DFA0A04FC94B}">
-              <ma14:wrappingTextBoxFlag xmlns="" xmlns:m="http://schemas.openxmlformats.org/officeDocument/2006/math" xmlns:a14="http://schemas.microsoft.com/office/drawing/2010/main" xmlns:ma14="http://schemas.microsoft.com/office/mac/drawingml/2011/main" val="1"/>
+              <ma14:wrappingTextBoxFlag xmlns:ma14="http://schemas.microsoft.com/office/mac/drawingml/2011/main" xmlns:a14="http://schemas.microsoft.com/office/drawing/2010/main" xmlns:m="http://schemas.openxmlformats.org/officeDocument/2006/math" xmlns="" val="1"/>
             </a:ext>
           </a:extLst>
         </p:spPr>
@@ -4990,7 +6365,7 @@
           </a:ln>
           <a:extLst>
             <a:ext uri="{C572A759-6A51-4108-AA02-DFA0A04FC94B}">
-              <ma14:wrappingTextBoxFlag xmlns="" xmlns:m="http://schemas.openxmlformats.org/officeDocument/2006/math" xmlns:a14="http://schemas.microsoft.com/office/drawing/2010/main" xmlns:ma14="http://schemas.microsoft.com/office/mac/drawingml/2011/main" val="1"/>
+              <ma14:wrappingTextBoxFlag xmlns:ma14="http://schemas.microsoft.com/office/mac/drawingml/2011/main" xmlns:a14="http://schemas.microsoft.com/office/drawing/2010/main" xmlns:m="http://schemas.openxmlformats.org/officeDocument/2006/math" xmlns="" val="1"/>
             </a:ext>
           </a:extLst>
         </p:spPr>
@@ -5061,7 +6436,7 @@
           </a:ln>
           <a:extLst>
             <a:ext uri="{C572A759-6A51-4108-AA02-DFA0A04FC94B}">
-              <ma14:wrappingTextBoxFlag xmlns="" xmlns:m="http://schemas.openxmlformats.org/officeDocument/2006/math" xmlns:a14="http://schemas.microsoft.com/office/drawing/2010/main" xmlns:ma14="http://schemas.microsoft.com/office/mac/drawingml/2011/main" val="1"/>
+              <ma14:wrappingTextBoxFlag xmlns:ma14="http://schemas.microsoft.com/office/mac/drawingml/2011/main" xmlns:a14="http://schemas.microsoft.com/office/drawing/2010/main" xmlns:m="http://schemas.openxmlformats.org/officeDocument/2006/math" xmlns="" val="1"/>
             </a:ext>
           </a:extLst>
         </p:spPr>
@@ -5104,7 +6479,7 @@
           </a:ln>
           <a:extLst>
             <a:ext uri="{C572A759-6A51-4108-AA02-DFA0A04FC94B}">
-              <ma14:wrappingTextBoxFlag xmlns="" xmlns:m="http://schemas.openxmlformats.org/officeDocument/2006/math" xmlns:a14="http://schemas.microsoft.com/office/drawing/2010/main" xmlns:ma14="http://schemas.microsoft.com/office/mac/drawingml/2011/main" val="1"/>
+              <ma14:wrappingTextBoxFlag xmlns:ma14="http://schemas.microsoft.com/office/mac/drawingml/2011/main" xmlns:a14="http://schemas.microsoft.com/office/drawing/2010/main" xmlns:m="http://schemas.openxmlformats.org/officeDocument/2006/math" xmlns="" val="1"/>
             </a:ext>
           </a:extLst>
         </p:spPr>
@@ -5180,7 +6555,7 @@
           </a:ln>
           <a:extLst>
             <a:ext uri="{C572A759-6A51-4108-AA02-DFA0A04FC94B}">
-              <ma14:wrappingTextBoxFlag xmlns="" xmlns:m="http://schemas.openxmlformats.org/officeDocument/2006/math" xmlns:a14="http://schemas.microsoft.com/office/drawing/2010/main" xmlns:ma14="http://schemas.microsoft.com/office/mac/drawingml/2011/main" val="1"/>
+              <ma14:wrappingTextBoxFlag xmlns:ma14="http://schemas.microsoft.com/office/mac/drawingml/2011/main" xmlns:a14="http://schemas.microsoft.com/office/drawing/2010/main" xmlns:m="http://schemas.openxmlformats.org/officeDocument/2006/math" xmlns="" val="1"/>
             </a:ext>
           </a:extLst>
         </p:spPr>
@@ -5219,7 +6594,7 @@
           </a:ln>
           <a:extLst>
             <a:ext uri="{C572A759-6A51-4108-AA02-DFA0A04FC94B}">
-              <ma14:wrappingTextBoxFlag xmlns="" xmlns:m="http://schemas.openxmlformats.org/officeDocument/2006/math" xmlns:a14="http://schemas.microsoft.com/office/drawing/2010/main" xmlns:ma14="http://schemas.microsoft.com/office/mac/drawingml/2011/main" val="1"/>
+              <ma14:wrappingTextBoxFlag xmlns:ma14="http://schemas.microsoft.com/office/mac/drawingml/2011/main" xmlns:a14="http://schemas.microsoft.com/office/drawing/2010/main" xmlns:m="http://schemas.openxmlformats.org/officeDocument/2006/math" xmlns="" val="1"/>
             </a:ext>
           </a:extLst>
         </p:spPr>
@@ -5262,7 +6637,7 @@
           </a:ln>
           <a:extLst>
             <a:ext uri="{C572A759-6A51-4108-AA02-DFA0A04FC94B}">
-              <ma14:wrappingTextBoxFlag xmlns="" xmlns:m="http://schemas.openxmlformats.org/officeDocument/2006/math" xmlns:a14="http://schemas.microsoft.com/office/drawing/2010/main" xmlns:ma14="http://schemas.microsoft.com/office/mac/drawingml/2011/main" val="1"/>
+              <ma14:wrappingTextBoxFlag xmlns:ma14="http://schemas.microsoft.com/office/mac/drawingml/2011/main" xmlns:a14="http://schemas.microsoft.com/office/drawing/2010/main" xmlns:m="http://schemas.openxmlformats.org/officeDocument/2006/math" xmlns="" val="1"/>
             </a:ext>
           </a:extLst>
         </p:spPr>
@@ -5338,7 +6713,7 @@
           </a:ln>
           <a:extLst>
             <a:ext uri="{C572A759-6A51-4108-AA02-DFA0A04FC94B}">
-              <ma14:wrappingTextBoxFlag xmlns="" xmlns:m="http://schemas.openxmlformats.org/officeDocument/2006/math" xmlns:a14="http://schemas.microsoft.com/office/drawing/2010/main" xmlns:ma14="http://schemas.microsoft.com/office/mac/drawingml/2011/main" val="1"/>
+              <ma14:wrappingTextBoxFlag xmlns:ma14="http://schemas.microsoft.com/office/mac/drawingml/2011/main" xmlns:a14="http://schemas.microsoft.com/office/drawing/2010/main" xmlns:m="http://schemas.openxmlformats.org/officeDocument/2006/math" xmlns="" val="1"/>
             </a:ext>
           </a:extLst>
         </p:spPr>
@@ -5377,7 +6752,7 @@
           </a:ln>
           <a:extLst>
             <a:ext uri="{C572A759-6A51-4108-AA02-DFA0A04FC94B}">
-              <ma14:wrappingTextBoxFlag xmlns="" xmlns:m="http://schemas.openxmlformats.org/officeDocument/2006/math" xmlns:a14="http://schemas.microsoft.com/office/drawing/2010/main" xmlns:ma14="http://schemas.microsoft.com/office/mac/drawingml/2011/main" val="1"/>
+              <ma14:wrappingTextBoxFlag xmlns:ma14="http://schemas.microsoft.com/office/mac/drawingml/2011/main" xmlns:a14="http://schemas.microsoft.com/office/drawing/2010/main" xmlns:m="http://schemas.openxmlformats.org/officeDocument/2006/math" xmlns="" val="1"/>
             </a:ext>
           </a:extLst>
         </p:spPr>
@@ -5420,7 +6795,7 @@
           </a:ln>
           <a:extLst>
             <a:ext uri="{C572A759-6A51-4108-AA02-DFA0A04FC94B}">
-              <ma14:wrappingTextBoxFlag xmlns="" xmlns:m="http://schemas.openxmlformats.org/officeDocument/2006/math" xmlns:a14="http://schemas.microsoft.com/office/drawing/2010/main" xmlns:ma14="http://schemas.microsoft.com/office/mac/drawingml/2011/main" val="1"/>
+              <ma14:wrappingTextBoxFlag xmlns:ma14="http://schemas.microsoft.com/office/mac/drawingml/2011/main" xmlns:a14="http://schemas.microsoft.com/office/drawing/2010/main" xmlns:m="http://schemas.openxmlformats.org/officeDocument/2006/math" xmlns="" val="1"/>
             </a:ext>
           </a:extLst>
         </p:spPr>
@@ -5496,7 +6871,7 @@
           </a:ln>
           <a:extLst>
             <a:ext uri="{C572A759-6A51-4108-AA02-DFA0A04FC94B}">
-              <ma14:wrappingTextBoxFlag xmlns="" xmlns:m="http://schemas.openxmlformats.org/officeDocument/2006/math" xmlns:a14="http://schemas.microsoft.com/office/drawing/2010/main" xmlns:ma14="http://schemas.microsoft.com/office/mac/drawingml/2011/main" val="1"/>
+              <ma14:wrappingTextBoxFlag xmlns:ma14="http://schemas.microsoft.com/office/mac/drawingml/2011/main" xmlns:a14="http://schemas.microsoft.com/office/drawing/2010/main" xmlns:m="http://schemas.openxmlformats.org/officeDocument/2006/math" xmlns="" val="1"/>
             </a:ext>
           </a:extLst>
         </p:spPr>
@@ -5535,7 +6910,7 @@
           </a:ln>
           <a:extLst>
             <a:ext uri="{C572A759-6A51-4108-AA02-DFA0A04FC94B}">
-              <ma14:wrappingTextBoxFlag xmlns="" xmlns:m="http://schemas.openxmlformats.org/officeDocument/2006/math" xmlns:a14="http://schemas.microsoft.com/office/drawing/2010/main" xmlns:ma14="http://schemas.microsoft.com/office/mac/drawingml/2011/main" val="1"/>
+              <ma14:wrappingTextBoxFlag xmlns:ma14="http://schemas.microsoft.com/office/mac/drawingml/2011/main" xmlns:a14="http://schemas.microsoft.com/office/drawing/2010/main" xmlns:m="http://schemas.openxmlformats.org/officeDocument/2006/math" xmlns="" val="1"/>
             </a:ext>
           </a:extLst>
         </p:spPr>
@@ -5578,7 +6953,7 @@
           </a:ln>
           <a:extLst>
             <a:ext uri="{C572A759-6A51-4108-AA02-DFA0A04FC94B}">
-              <ma14:wrappingTextBoxFlag xmlns="" xmlns:m="http://schemas.openxmlformats.org/officeDocument/2006/math" xmlns:a14="http://schemas.microsoft.com/office/drawing/2010/main" xmlns:ma14="http://schemas.microsoft.com/office/mac/drawingml/2011/main" val="1"/>
+              <ma14:wrappingTextBoxFlag xmlns:ma14="http://schemas.microsoft.com/office/mac/drawingml/2011/main" xmlns:a14="http://schemas.microsoft.com/office/drawing/2010/main" xmlns:m="http://schemas.openxmlformats.org/officeDocument/2006/math" xmlns="" val="1"/>
             </a:ext>
           </a:extLst>
         </p:spPr>
@@ -5654,7 +7029,7 @@
           </a:ln>
           <a:extLst>
             <a:ext uri="{C572A759-6A51-4108-AA02-DFA0A04FC94B}">
-              <ma14:wrappingTextBoxFlag xmlns="" xmlns:m="http://schemas.openxmlformats.org/officeDocument/2006/math" xmlns:a14="http://schemas.microsoft.com/office/drawing/2010/main" xmlns:ma14="http://schemas.microsoft.com/office/mac/drawingml/2011/main" val="1"/>
+              <ma14:wrappingTextBoxFlag xmlns:ma14="http://schemas.microsoft.com/office/mac/drawingml/2011/main" xmlns:a14="http://schemas.microsoft.com/office/drawing/2010/main" xmlns:m="http://schemas.openxmlformats.org/officeDocument/2006/math" xmlns="" val="1"/>
             </a:ext>
           </a:extLst>
         </p:spPr>
@@ -5693,7 +7068,7 @@
           </a:ln>
           <a:extLst>
             <a:ext uri="{C572A759-6A51-4108-AA02-DFA0A04FC94B}">
-              <ma14:wrappingTextBoxFlag xmlns="" xmlns:m="http://schemas.openxmlformats.org/officeDocument/2006/math" xmlns:a14="http://schemas.microsoft.com/office/drawing/2010/main" xmlns:ma14="http://schemas.microsoft.com/office/mac/drawingml/2011/main" val="1"/>
+              <ma14:wrappingTextBoxFlag xmlns:ma14="http://schemas.microsoft.com/office/mac/drawingml/2011/main" xmlns:a14="http://schemas.microsoft.com/office/drawing/2010/main" xmlns:m="http://schemas.openxmlformats.org/officeDocument/2006/math" xmlns="" val="1"/>
             </a:ext>
           </a:extLst>
         </p:spPr>
@@ -5736,7 +7111,7 @@
           </a:ln>
           <a:extLst>
             <a:ext uri="{C572A759-6A51-4108-AA02-DFA0A04FC94B}">
-              <ma14:wrappingTextBoxFlag xmlns="" xmlns:m="http://schemas.openxmlformats.org/officeDocument/2006/math" xmlns:a14="http://schemas.microsoft.com/office/drawing/2010/main" xmlns:ma14="http://schemas.microsoft.com/office/mac/drawingml/2011/main" val="1"/>
+              <ma14:wrappingTextBoxFlag xmlns:ma14="http://schemas.microsoft.com/office/mac/drawingml/2011/main" xmlns:a14="http://schemas.microsoft.com/office/drawing/2010/main" xmlns:m="http://schemas.openxmlformats.org/officeDocument/2006/math" xmlns="" val="1"/>
             </a:ext>
           </a:extLst>
         </p:spPr>
@@ -5812,7 +7187,7 @@
           </a:ln>
           <a:extLst>
             <a:ext uri="{C572A759-6A51-4108-AA02-DFA0A04FC94B}">
-              <ma14:wrappingTextBoxFlag xmlns="" xmlns:m="http://schemas.openxmlformats.org/officeDocument/2006/math" xmlns:a14="http://schemas.microsoft.com/office/drawing/2010/main" xmlns:ma14="http://schemas.microsoft.com/office/mac/drawingml/2011/main" val="1"/>
+              <ma14:wrappingTextBoxFlag xmlns:ma14="http://schemas.microsoft.com/office/mac/drawingml/2011/main" xmlns:a14="http://schemas.microsoft.com/office/drawing/2010/main" xmlns:m="http://schemas.openxmlformats.org/officeDocument/2006/math" xmlns="" val="1"/>
             </a:ext>
           </a:extLst>
         </p:spPr>
@@ -5851,7 +7226,7 @@
           </a:ln>
           <a:extLst>
             <a:ext uri="{C572A759-6A51-4108-AA02-DFA0A04FC94B}">
-              <ma14:wrappingTextBoxFlag xmlns="" xmlns:m="http://schemas.openxmlformats.org/officeDocument/2006/math" xmlns:a14="http://schemas.microsoft.com/office/drawing/2010/main" xmlns:ma14="http://schemas.microsoft.com/office/mac/drawingml/2011/main" val="1"/>
+              <ma14:wrappingTextBoxFlag xmlns:ma14="http://schemas.microsoft.com/office/mac/drawingml/2011/main" xmlns:a14="http://schemas.microsoft.com/office/drawing/2010/main" xmlns:m="http://schemas.openxmlformats.org/officeDocument/2006/math" xmlns="" val="1"/>
             </a:ext>
           </a:extLst>
         </p:spPr>
@@ -5894,7 +7269,7 @@
           </a:ln>
           <a:extLst>
             <a:ext uri="{C572A759-6A51-4108-AA02-DFA0A04FC94B}">
-              <ma14:wrappingTextBoxFlag xmlns="" xmlns:m="http://schemas.openxmlformats.org/officeDocument/2006/math" xmlns:a14="http://schemas.microsoft.com/office/drawing/2010/main" xmlns:ma14="http://schemas.microsoft.com/office/mac/drawingml/2011/main" val="1"/>
+              <ma14:wrappingTextBoxFlag xmlns:ma14="http://schemas.microsoft.com/office/mac/drawingml/2011/main" xmlns:a14="http://schemas.microsoft.com/office/drawing/2010/main" xmlns:m="http://schemas.openxmlformats.org/officeDocument/2006/math" xmlns="" val="1"/>
             </a:ext>
           </a:extLst>
         </p:spPr>
@@ -5979,7 +7354,7 @@
           </a:ln>
           <a:extLst>
             <a:ext uri="{C572A759-6A51-4108-AA02-DFA0A04FC94B}">
-              <ma14:wrappingTextBoxFlag xmlns="" xmlns:m="http://schemas.openxmlformats.org/officeDocument/2006/math" xmlns:a14="http://schemas.microsoft.com/office/drawing/2010/main" xmlns:ma14="http://schemas.microsoft.com/office/mac/drawingml/2011/main" val="1"/>
+              <ma14:wrappingTextBoxFlag xmlns:ma14="http://schemas.microsoft.com/office/mac/drawingml/2011/main" xmlns:a14="http://schemas.microsoft.com/office/drawing/2010/main" xmlns:m="http://schemas.openxmlformats.org/officeDocument/2006/math" xmlns="" val="1"/>
             </a:ext>
           </a:extLst>
         </p:spPr>
@@ -6018,7 +7393,7 @@
           </a:ln>
           <a:extLst>
             <a:ext uri="{C572A759-6A51-4108-AA02-DFA0A04FC94B}">
-              <ma14:wrappingTextBoxFlag xmlns="" xmlns:m="http://schemas.openxmlformats.org/officeDocument/2006/math" xmlns:a14="http://schemas.microsoft.com/office/drawing/2010/main" xmlns:ma14="http://schemas.microsoft.com/office/mac/drawingml/2011/main" val="1"/>
+              <ma14:wrappingTextBoxFlag xmlns:ma14="http://schemas.microsoft.com/office/mac/drawingml/2011/main" xmlns:a14="http://schemas.microsoft.com/office/drawing/2010/main" xmlns:m="http://schemas.openxmlformats.org/officeDocument/2006/math" xmlns="" val="1"/>
             </a:ext>
           </a:extLst>
         </p:spPr>
@@ -6061,7 +7436,7 @@
           </a:ln>
           <a:extLst>
             <a:ext uri="{C572A759-6A51-4108-AA02-DFA0A04FC94B}">
-              <ma14:wrappingTextBoxFlag xmlns="" xmlns:m="http://schemas.openxmlformats.org/officeDocument/2006/math" xmlns:a14="http://schemas.microsoft.com/office/drawing/2010/main" xmlns:ma14="http://schemas.microsoft.com/office/mac/drawingml/2011/main" val="1"/>
+              <ma14:wrappingTextBoxFlag xmlns:ma14="http://schemas.microsoft.com/office/mac/drawingml/2011/main" xmlns:a14="http://schemas.microsoft.com/office/drawing/2010/main" xmlns:m="http://schemas.openxmlformats.org/officeDocument/2006/math" xmlns="" val="1"/>
             </a:ext>
           </a:extLst>
         </p:spPr>
@@ -6130,7 +7505,7 @@
           </a:ln>
           <a:extLst>
             <a:ext uri="{C572A759-6A51-4108-AA02-DFA0A04FC94B}">
-              <ma14:wrappingTextBoxFlag xmlns="" xmlns:m="http://schemas.openxmlformats.org/officeDocument/2006/math" xmlns:a14="http://schemas.microsoft.com/office/drawing/2010/main" xmlns:ma14="http://schemas.microsoft.com/office/mac/drawingml/2011/main" val="1"/>
+              <ma14:wrappingTextBoxFlag xmlns:ma14="http://schemas.microsoft.com/office/mac/drawingml/2011/main" xmlns:a14="http://schemas.microsoft.com/office/drawing/2010/main" xmlns:m="http://schemas.openxmlformats.org/officeDocument/2006/math" xmlns="" val="1"/>
             </a:ext>
           </a:extLst>
         </p:spPr>
@@ -6169,7 +7544,7 @@
           </a:ln>
           <a:extLst>
             <a:ext uri="{C572A759-6A51-4108-AA02-DFA0A04FC94B}">
-              <ma14:wrappingTextBoxFlag xmlns="" xmlns:m="http://schemas.openxmlformats.org/officeDocument/2006/math" xmlns:a14="http://schemas.microsoft.com/office/drawing/2010/main" xmlns:ma14="http://schemas.microsoft.com/office/mac/drawingml/2011/main" val="1"/>
+              <ma14:wrappingTextBoxFlag xmlns:ma14="http://schemas.microsoft.com/office/mac/drawingml/2011/main" xmlns:a14="http://schemas.microsoft.com/office/drawing/2010/main" xmlns:m="http://schemas.openxmlformats.org/officeDocument/2006/math" xmlns="" val="1"/>
             </a:ext>
           </a:extLst>
         </p:spPr>
@@ -6216,7 +7591,7 @@
           </a:ln>
           <a:extLst>
             <a:ext uri="{C572A759-6A51-4108-AA02-DFA0A04FC94B}">
-              <ma14:wrappingTextBoxFlag xmlns="" xmlns:m="http://schemas.openxmlformats.org/officeDocument/2006/math" xmlns:a14="http://schemas.microsoft.com/office/drawing/2010/main" xmlns:ma14="http://schemas.microsoft.com/office/mac/drawingml/2011/main" val="1"/>
+              <ma14:wrappingTextBoxFlag xmlns:ma14="http://schemas.microsoft.com/office/mac/drawingml/2011/main" xmlns:a14="http://schemas.microsoft.com/office/drawing/2010/main" xmlns:m="http://schemas.openxmlformats.org/officeDocument/2006/math" xmlns="" val="1"/>
             </a:ext>
           </a:extLst>
         </p:spPr>
@@ -6287,7 +7662,7 @@
           </a:ln>
           <a:extLst>
             <a:ext uri="{C572A759-6A51-4108-AA02-DFA0A04FC94B}">
-              <ma14:wrappingTextBoxFlag xmlns="" xmlns:m="http://schemas.openxmlformats.org/officeDocument/2006/math" xmlns:a14="http://schemas.microsoft.com/office/drawing/2010/main" xmlns:ma14="http://schemas.microsoft.com/office/mac/drawingml/2011/main" val="1"/>
+              <ma14:wrappingTextBoxFlag xmlns:ma14="http://schemas.microsoft.com/office/mac/drawingml/2011/main" xmlns:a14="http://schemas.microsoft.com/office/drawing/2010/main" xmlns:m="http://schemas.openxmlformats.org/officeDocument/2006/math" xmlns="" val="1"/>
             </a:ext>
           </a:extLst>
         </p:spPr>
@@ -6330,7 +7705,7 @@
           </a:ln>
           <a:extLst>
             <a:ext uri="{C572A759-6A51-4108-AA02-DFA0A04FC94B}">
-              <ma14:wrappingTextBoxFlag xmlns="" xmlns:m="http://schemas.openxmlformats.org/officeDocument/2006/math" xmlns:a14="http://schemas.microsoft.com/office/drawing/2010/main" xmlns:ma14="http://schemas.microsoft.com/office/mac/drawingml/2011/main" val="1"/>
+              <ma14:wrappingTextBoxFlag xmlns:ma14="http://schemas.microsoft.com/office/mac/drawingml/2011/main" xmlns:a14="http://schemas.microsoft.com/office/drawing/2010/main" xmlns:m="http://schemas.openxmlformats.org/officeDocument/2006/math" xmlns="" val="1"/>
             </a:ext>
           </a:extLst>
         </p:spPr>
@@ -6467,7 +7842,7 @@
           </a:ln>
           <a:extLst>
             <a:ext uri="{C572A759-6A51-4108-AA02-DFA0A04FC94B}">
-              <ma14:wrappingTextBoxFlag xmlns="" xmlns:m="http://schemas.openxmlformats.org/officeDocument/2006/math" xmlns:a14="http://schemas.microsoft.com/office/drawing/2010/main" xmlns:ma14="http://schemas.microsoft.com/office/mac/drawingml/2011/main" val="1"/>
+              <ma14:wrappingTextBoxFlag xmlns:ma14="http://schemas.microsoft.com/office/mac/drawingml/2011/main" xmlns:a14="http://schemas.microsoft.com/office/drawing/2010/main" xmlns:m="http://schemas.openxmlformats.org/officeDocument/2006/math" xmlns="" val="1"/>
             </a:ext>
           </a:extLst>
         </p:spPr>
@@ -6604,7 +7979,7 @@
           </a:ln>
           <a:extLst>
             <a:ext uri="{C572A759-6A51-4108-AA02-DFA0A04FC94B}">
-              <ma14:wrappingTextBoxFlag xmlns="" xmlns:m="http://schemas.openxmlformats.org/officeDocument/2006/math" xmlns:a14="http://schemas.microsoft.com/office/drawing/2010/main" xmlns:ma14="http://schemas.microsoft.com/office/mac/drawingml/2011/main" val="1"/>
+              <ma14:wrappingTextBoxFlag xmlns:ma14="http://schemas.microsoft.com/office/mac/drawingml/2011/main" xmlns:a14="http://schemas.microsoft.com/office/drawing/2010/main" xmlns:m="http://schemas.openxmlformats.org/officeDocument/2006/math" xmlns="" val="1"/>
             </a:ext>
           </a:extLst>
         </p:spPr>
@@ -6741,7 +8116,7 @@
           </a:ln>
           <a:extLst>
             <a:ext uri="{C572A759-6A51-4108-AA02-DFA0A04FC94B}">
-              <ma14:wrappingTextBoxFlag xmlns="" xmlns:m="http://schemas.openxmlformats.org/officeDocument/2006/math" xmlns:a14="http://schemas.microsoft.com/office/drawing/2010/main" xmlns:ma14="http://schemas.microsoft.com/office/mac/drawingml/2011/main" val="1"/>
+              <ma14:wrappingTextBoxFlag xmlns:ma14="http://schemas.microsoft.com/office/mac/drawingml/2011/main" xmlns:a14="http://schemas.microsoft.com/office/drawing/2010/main" xmlns:m="http://schemas.openxmlformats.org/officeDocument/2006/math" xmlns="" val="1"/>
             </a:ext>
           </a:extLst>
         </p:spPr>
@@ -6878,7 +8253,7 @@
           </a:ln>
           <a:extLst>
             <a:ext uri="{C572A759-6A51-4108-AA02-DFA0A04FC94B}">
-              <ma14:wrappingTextBoxFlag xmlns="" xmlns:m="http://schemas.openxmlformats.org/officeDocument/2006/math" xmlns:a14="http://schemas.microsoft.com/office/drawing/2010/main" xmlns:ma14="http://schemas.microsoft.com/office/mac/drawingml/2011/main" val="1"/>
+              <ma14:wrappingTextBoxFlag xmlns:ma14="http://schemas.microsoft.com/office/mac/drawingml/2011/main" xmlns:a14="http://schemas.microsoft.com/office/drawing/2010/main" xmlns:m="http://schemas.openxmlformats.org/officeDocument/2006/math" xmlns="" val="1"/>
             </a:ext>
           </a:extLst>
         </p:spPr>
@@ -6947,7 +8322,7 @@
           </a:ln>
           <a:extLst>
             <a:ext uri="{C572A759-6A51-4108-AA02-DFA0A04FC94B}">
-              <ma14:wrappingTextBoxFlag xmlns="" xmlns:m="http://schemas.openxmlformats.org/officeDocument/2006/math" xmlns:a14="http://schemas.microsoft.com/office/drawing/2010/main" xmlns:ma14="http://schemas.microsoft.com/office/mac/drawingml/2011/main" val="1"/>
+              <ma14:wrappingTextBoxFlag xmlns:ma14="http://schemas.microsoft.com/office/mac/drawingml/2011/main" xmlns:a14="http://schemas.microsoft.com/office/drawing/2010/main" xmlns:m="http://schemas.openxmlformats.org/officeDocument/2006/math" xmlns="" val="1"/>
             </a:ext>
           </a:extLst>
         </p:spPr>
@@ -6986,7 +8361,7 @@
           </a:ln>
           <a:extLst>
             <a:ext uri="{C572A759-6A51-4108-AA02-DFA0A04FC94B}">
-              <ma14:wrappingTextBoxFlag xmlns="" xmlns:m="http://schemas.openxmlformats.org/officeDocument/2006/math" xmlns:a14="http://schemas.microsoft.com/office/drawing/2010/main" xmlns:ma14="http://schemas.microsoft.com/office/mac/drawingml/2011/main" val="1"/>
+              <ma14:wrappingTextBoxFlag xmlns:ma14="http://schemas.microsoft.com/office/mac/drawingml/2011/main" xmlns:a14="http://schemas.microsoft.com/office/drawing/2010/main" xmlns:m="http://schemas.openxmlformats.org/officeDocument/2006/math" xmlns="" val="1"/>
             </a:ext>
           </a:extLst>
         </p:spPr>
@@ -7033,7 +8408,7 @@
           </a:ln>
           <a:extLst>
             <a:ext uri="{C572A759-6A51-4108-AA02-DFA0A04FC94B}">
-              <ma14:wrappingTextBoxFlag xmlns="" xmlns:m="http://schemas.openxmlformats.org/officeDocument/2006/math" xmlns:a14="http://schemas.microsoft.com/office/drawing/2010/main" xmlns:ma14="http://schemas.microsoft.com/office/mac/drawingml/2011/main" val="1"/>
+              <ma14:wrappingTextBoxFlag xmlns:ma14="http://schemas.microsoft.com/office/mac/drawingml/2011/main" xmlns:a14="http://schemas.microsoft.com/office/drawing/2010/main" xmlns:m="http://schemas.openxmlformats.org/officeDocument/2006/math" xmlns="" val="1"/>
             </a:ext>
           </a:extLst>
         </p:spPr>
@@ -7104,7 +8479,7 @@
           </a:ln>
           <a:extLst>
             <a:ext uri="{C572A759-6A51-4108-AA02-DFA0A04FC94B}">
-              <ma14:wrappingTextBoxFlag xmlns="" xmlns:m="http://schemas.openxmlformats.org/officeDocument/2006/math" xmlns:a14="http://schemas.microsoft.com/office/drawing/2010/main" xmlns:ma14="http://schemas.microsoft.com/office/mac/drawingml/2011/main" val="1"/>
+              <ma14:wrappingTextBoxFlag xmlns:ma14="http://schemas.microsoft.com/office/mac/drawingml/2011/main" xmlns:a14="http://schemas.microsoft.com/office/drawing/2010/main" xmlns:m="http://schemas.openxmlformats.org/officeDocument/2006/math" xmlns="" val="1"/>
             </a:ext>
           </a:extLst>
         </p:spPr>
@@ -7147,7 +8522,7 @@
           </a:ln>
           <a:extLst>
             <a:ext uri="{C572A759-6A51-4108-AA02-DFA0A04FC94B}">
-              <ma14:wrappingTextBoxFlag xmlns="" xmlns:m="http://schemas.openxmlformats.org/officeDocument/2006/math" xmlns:a14="http://schemas.microsoft.com/office/drawing/2010/main" xmlns:ma14="http://schemas.microsoft.com/office/mac/drawingml/2011/main" val="1"/>
+              <ma14:wrappingTextBoxFlag xmlns:ma14="http://schemas.microsoft.com/office/mac/drawingml/2011/main" xmlns:a14="http://schemas.microsoft.com/office/drawing/2010/main" xmlns:m="http://schemas.openxmlformats.org/officeDocument/2006/math" xmlns="" val="1"/>
             </a:ext>
           </a:extLst>
         </p:spPr>
@@ -7281,7 +8656,7 @@
           </a:ln>
           <a:extLst>
             <a:ext uri="{C572A759-6A51-4108-AA02-DFA0A04FC94B}">
-              <ma14:wrappingTextBoxFlag xmlns="" xmlns:m="http://schemas.openxmlformats.org/officeDocument/2006/math" xmlns:a14="http://schemas.microsoft.com/office/drawing/2010/main" xmlns:ma14="http://schemas.microsoft.com/office/mac/drawingml/2011/main" val="1"/>
+              <ma14:wrappingTextBoxFlag xmlns:ma14="http://schemas.microsoft.com/office/mac/drawingml/2011/main" xmlns:a14="http://schemas.microsoft.com/office/drawing/2010/main" xmlns:m="http://schemas.openxmlformats.org/officeDocument/2006/math" xmlns="" val="1"/>
             </a:ext>
           </a:extLst>
         </p:spPr>
@@ -7320,7 +8695,7 @@
           </a:ln>
           <a:extLst>
             <a:ext uri="{C572A759-6A51-4108-AA02-DFA0A04FC94B}">
-              <ma14:wrappingTextBoxFlag xmlns="" xmlns:m="http://schemas.openxmlformats.org/officeDocument/2006/math" xmlns:a14="http://schemas.microsoft.com/office/drawing/2010/main" xmlns:ma14="http://schemas.microsoft.com/office/mac/drawingml/2011/main" val="1"/>
+              <ma14:wrappingTextBoxFlag xmlns:ma14="http://schemas.microsoft.com/office/mac/drawingml/2011/main" xmlns:a14="http://schemas.microsoft.com/office/drawing/2010/main" xmlns:m="http://schemas.openxmlformats.org/officeDocument/2006/math" xmlns="" val="1"/>
             </a:ext>
           </a:extLst>
         </p:spPr>
@@ -7367,7 +8742,7 @@
           </a:ln>
           <a:extLst>
             <a:ext uri="{C572A759-6A51-4108-AA02-DFA0A04FC94B}">
-              <ma14:wrappingTextBoxFlag xmlns="" xmlns:m="http://schemas.openxmlformats.org/officeDocument/2006/math" xmlns:a14="http://schemas.microsoft.com/office/drawing/2010/main" xmlns:ma14="http://schemas.microsoft.com/office/mac/drawingml/2011/main" val="1"/>
+              <ma14:wrappingTextBoxFlag xmlns:ma14="http://schemas.microsoft.com/office/mac/drawingml/2011/main" xmlns:a14="http://schemas.microsoft.com/office/drawing/2010/main" xmlns:m="http://schemas.openxmlformats.org/officeDocument/2006/math" xmlns="" val="1"/>
             </a:ext>
           </a:extLst>
         </p:spPr>
@@ -7438,7 +8813,7 @@
           </a:ln>
           <a:extLst>
             <a:ext uri="{C572A759-6A51-4108-AA02-DFA0A04FC94B}">
-              <ma14:wrappingTextBoxFlag xmlns="" xmlns:m="http://schemas.openxmlformats.org/officeDocument/2006/math" xmlns:a14="http://schemas.microsoft.com/office/drawing/2010/main" xmlns:ma14="http://schemas.microsoft.com/office/mac/drawingml/2011/main" val="1"/>
+              <ma14:wrappingTextBoxFlag xmlns:ma14="http://schemas.microsoft.com/office/mac/drawingml/2011/main" xmlns:a14="http://schemas.microsoft.com/office/drawing/2010/main" xmlns:m="http://schemas.openxmlformats.org/officeDocument/2006/math" xmlns="" val="1"/>
             </a:ext>
           </a:extLst>
         </p:spPr>
@@ -7481,7 +8856,7 @@
           </a:ln>
           <a:extLst>
             <a:ext uri="{C572A759-6A51-4108-AA02-DFA0A04FC94B}">
-              <ma14:wrappingTextBoxFlag xmlns="" xmlns:m="http://schemas.openxmlformats.org/officeDocument/2006/math" xmlns:a14="http://schemas.microsoft.com/office/drawing/2010/main" xmlns:ma14="http://schemas.microsoft.com/office/mac/drawingml/2011/main" val="1"/>
+              <ma14:wrappingTextBoxFlag xmlns:ma14="http://schemas.microsoft.com/office/mac/drawingml/2011/main" xmlns:a14="http://schemas.microsoft.com/office/drawing/2010/main" xmlns:m="http://schemas.openxmlformats.org/officeDocument/2006/math" xmlns="" val="1"/>
             </a:ext>
           </a:extLst>
         </p:spPr>
@@ -7582,7 +8957,13 @@
   <p:cSld>
     <p:spTree>
       <p:nvGrpSpPr>
-        <p:cNvPr id="1" name=""/>
+        <p:cNvPr id="1" name="">
+          <a:extLst>
+            <a:ext uri="{FF2B5EF4-FFF2-40B4-BE49-F238E27FC236}">
+              <a16:creationId xmlns:a16="http://schemas.microsoft.com/office/drawing/2014/main" id="{5FA4CEF1-6AF1-BA11-CEDF-0DB93E2DA49E}"/>
+            </a:ext>
+          </a:extLst>
+        </p:cNvPr>
         <p:cNvGrpSpPr/>
         <p:nvPr/>
       </p:nvGrpSpPr>
@@ -7596,7 +8977,13 @@
       </p:grpSpPr>
       <p:sp>
         <p:nvSpPr>
-          <p:cNvPr id="153" name="Text 0"/>
+          <p:cNvPr id="144" name="Text 0">
+            <a:extLst>
+              <a:ext uri="{FF2B5EF4-FFF2-40B4-BE49-F238E27FC236}">
+                <a16:creationId xmlns:a16="http://schemas.microsoft.com/office/drawing/2014/main" id="{95A18080-2134-2494-394C-F08EE9F2CA20}"/>
+              </a:ext>
+            </a:extLst>
+          </p:cNvPr>
           <p:cNvSpPr txBox="1"/>
           <p:nvPr/>
         </p:nvSpPr>
@@ -7613,7 +9000,7 @@
           </a:ln>
           <a:extLst>
             <a:ext uri="{C572A759-6A51-4108-AA02-DFA0A04FC94B}">
-              <ma14:wrappingTextBoxFlag xmlns="" xmlns:m="http://schemas.openxmlformats.org/officeDocument/2006/math" xmlns:a14="http://schemas.microsoft.com/office/drawing/2010/main" xmlns:ma14="http://schemas.microsoft.com/office/mac/drawingml/2011/main" val="1"/>
+              <ma14:wrappingTextBoxFlag xmlns:ma14="http://schemas.microsoft.com/office/mac/drawingml/2011/main" xmlns:a14="http://schemas.microsoft.com/office/drawing/2010/main" xmlns:m="http://schemas.openxmlformats.org/officeDocument/2006/math" xmlns="" val="1"/>
             </a:ext>
           </a:extLst>
         </p:spPr>
@@ -7628,14 +9015,20 @@
           </a:lstStyle>
           <a:p>
             <a:r>
-              <a:t>🧮</a:t>
-            </a:r>
-          </a:p>
-        </p:txBody>
-      </p:sp>
-      <p:sp>
-        <p:nvSpPr>
-          <p:cNvPr id="154" name="Text 1"/>
+              <a:t>🧩</a:t>
+            </a:r>
+          </a:p>
+        </p:txBody>
+      </p:sp>
+      <p:sp>
+        <p:nvSpPr>
+          <p:cNvPr id="145" name="Text 1">
+            <a:extLst>
+              <a:ext uri="{FF2B5EF4-FFF2-40B4-BE49-F238E27FC236}">
+                <a16:creationId xmlns:a16="http://schemas.microsoft.com/office/drawing/2014/main" id="{CAFD375E-BCE8-6792-B97E-3FDE6F7670AA}"/>
+              </a:ext>
+            </a:extLst>
+          </p:cNvPr>
           <p:cNvSpPr txBox="1"/>
           <p:nvPr/>
         </p:nvSpPr>
@@ -7652,7 +9045,7 @@
           </a:ln>
           <a:extLst>
             <a:ext uri="{C572A759-6A51-4108-AA02-DFA0A04FC94B}">
-              <ma14:wrappingTextBoxFlag xmlns="" xmlns:m="http://schemas.openxmlformats.org/officeDocument/2006/math" xmlns:a14="http://schemas.microsoft.com/office/drawing/2010/main" xmlns:ma14="http://schemas.microsoft.com/office/mac/drawingml/2011/main" val="1"/>
+              <ma14:wrappingTextBoxFlag xmlns:ma14="http://schemas.microsoft.com/office/mac/drawingml/2011/main" xmlns:a14="http://schemas.microsoft.com/office/drawing/2010/main" xmlns:m="http://schemas.openxmlformats.org/officeDocument/2006/math" xmlns="" val="1"/>
             </a:ext>
           </a:extLst>
         </p:spPr>
@@ -7675,14 +9068,26 @@
           </a:lstStyle>
           <a:p>
             <a:r>
-              <a:t>Algorithms</a:t>
-            </a:r>
-          </a:p>
-        </p:txBody>
-      </p:sp>
-      <p:sp>
-        <p:nvSpPr>
-          <p:cNvPr id="155" name="Text 2"/>
+              <a:rPr lang="en-US" dirty="0"/>
+              <a:t>Lifecycle </a:t>
+            </a:r>
+            <a:r>
+              <a:rPr lang="en-US" dirty="0" err="1"/>
+              <a:t>Statechart</a:t>
+            </a:r>
+            <a:endParaRPr dirty="0"/>
+          </a:p>
+        </p:txBody>
+      </p:sp>
+      <p:sp>
+        <p:nvSpPr>
+          <p:cNvPr id="146" name="Text 2">
+            <a:extLst>
+              <a:ext uri="{FF2B5EF4-FFF2-40B4-BE49-F238E27FC236}">
+                <a16:creationId xmlns:a16="http://schemas.microsoft.com/office/drawing/2014/main" id="{809404B1-386B-5787-A47A-4F4A202767F6}"/>
+              </a:ext>
+            </a:extLst>
+          </p:cNvPr>
           <p:cNvSpPr txBox="1"/>
           <p:nvPr/>
         </p:nvSpPr>
@@ -7699,7 +9104,7 @@
           </a:ln>
           <a:extLst>
             <a:ext uri="{C572A759-6A51-4108-AA02-DFA0A04FC94B}">
-              <ma14:wrappingTextBoxFlag xmlns="" xmlns:m="http://schemas.openxmlformats.org/officeDocument/2006/math" xmlns:a14="http://schemas.microsoft.com/office/drawing/2010/main" xmlns:ma14="http://schemas.microsoft.com/office/mac/drawingml/2011/main" val="1"/>
+              <ma14:wrappingTextBoxFlag xmlns:ma14="http://schemas.microsoft.com/office/mac/drawingml/2011/main" xmlns:a14="http://schemas.microsoft.com/office/drawing/2010/main" xmlns:m="http://schemas.openxmlformats.org/officeDocument/2006/math" xmlns="" val="1"/>
             </a:ext>
           </a:extLst>
         </p:spPr>
@@ -7718,14 +9123,20 @@
           </a:lstStyle>
           <a:p>
             <a:r>
-              <a:t>Simple calculations create the trip estimate</a:t>
-            </a:r>
-          </a:p>
-        </p:txBody>
-      </p:sp>
-      <p:sp>
-        <p:nvSpPr>
-          <p:cNvPr id="156" name="Shape 3"/>
+              <a:t>Main classes and relationships</a:t>
+            </a:r>
+          </a:p>
+        </p:txBody>
+      </p:sp>
+      <p:sp>
+        <p:nvSpPr>
+          <p:cNvPr id="147" name="Shape 3">
+            <a:extLst>
+              <a:ext uri="{FF2B5EF4-FFF2-40B4-BE49-F238E27FC236}">
+                <a16:creationId xmlns:a16="http://schemas.microsoft.com/office/drawing/2014/main" id="{DB5453F4-E6FF-8BB7-44C8-E34F69404C4D}"/>
+              </a:ext>
+            </a:extLst>
+          </p:cNvPr>
           <p:cNvSpPr/>
           <p:nvPr/>
         </p:nvSpPr>
@@ -7753,7 +9164,13 @@
       </p:sp>
       <p:sp>
         <p:nvSpPr>
-          <p:cNvPr id="157" name="Text 4"/>
+          <p:cNvPr id="148" name="Text 4">
+            <a:extLst>
+              <a:ext uri="{FF2B5EF4-FFF2-40B4-BE49-F238E27FC236}">
+                <a16:creationId xmlns:a16="http://schemas.microsoft.com/office/drawing/2014/main" id="{39ACCC83-5FA8-EBB6-3286-15AB88D34ADB}"/>
+              </a:ext>
+            </a:extLst>
+          </p:cNvPr>
           <p:cNvSpPr txBox="1"/>
           <p:nvPr/>
         </p:nvSpPr>
@@ -7770,7 +9187,7 @@
           </a:ln>
           <a:extLst>
             <a:ext uri="{C572A759-6A51-4108-AA02-DFA0A04FC94B}">
-              <ma14:wrappingTextBoxFlag xmlns="" xmlns:m="http://schemas.openxmlformats.org/officeDocument/2006/math" xmlns:a14="http://schemas.microsoft.com/office/drawing/2010/main" xmlns:ma14="http://schemas.microsoft.com/office/mac/drawingml/2011/main" val="1"/>
+              <ma14:wrappingTextBoxFlag xmlns:ma14="http://schemas.microsoft.com/office/mac/drawingml/2011/main" xmlns:a14="http://schemas.microsoft.com/office/drawing/2010/main" xmlns:m="http://schemas.openxmlformats.org/officeDocument/2006/math" xmlns="" val="1"/>
             </a:ext>
           </a:extLst>
         </p:spPr>
@@ -7796,7 +9213,13 @@
       </p:sp>
       <p:sp>
         <p:nvSpPr>
-          <p:cNvPr id="158" name="Text 5"/>
+          <p:cNvPr id="149" name="Text 5">
+            <a:extLst>
+              <a:ext uri="{FF2B5EF4-FFF2-40B4-BE49-F238E27FC236}">
+                <a16:creationId xmlns:a16="http://schemas.microsoft.com/office/drawing/2014/main" id="{6CA953E9-0FC5-D9B2-721A-D19F76C9E582}"/>
+              </a:ext>
+            </a:extLst>
+          </p:cNvPr>
           <p:cNvSpPr txBox="1"/>
           <p:nvPr/>
         </p:nvSpPr>
@@ -7813,7 +9236,7 @@
           </a:ln>
           <a:extLst>
             <a:ext uri="{C572A759-6A51-4108-AA02-DFA0A04FC94B}">
-              <ma14:wrappingTextBoxFlag xmlns="" xmlns:m="http://schemas.openxmlformats.org/officeDocument/2006/math" xmlns:a14="http://schemas.microsoft.com/office/drawing/2010/main" xmlns:ma14="http://schemas.microsoft.com/office/mac/drawingml/2011/main" val="1"/>
+              <ma14:wrappingTextBoxFlag xmlns:ma14="http://schemas.microsoft.com/office/mac/drawingml/2011/main" xmlns:a14="http://schemas.microsoft.com/office/drawing/2010/main" xmlns:m="http://schemas.openxmlformats.org/officeDocument/2006/math" xmlns="" val="1"/>
             </a:ext>
           </a:extLst>
         </p:spPr>
@@ -7832,287 +9255,35 @@
           </a:lstStyle>
           <a:p>
             <a:r>
-              <a:t>08</a:t>
-            </a:r>
-          </a:p>
-        </p:txBody>
-      </p:sp>
-      <p:sp>
-        <p:nvSpPr>
-          <p:cNvPr id="159" name="Text 6"/>
-          <p:cNvSpPr txBox="1"/>
-          <p:nvPr/>
-        </p:nvSpPr>
-        <p:spPr>
-          <a:xfrm>
-            <a:off x="777240" y="1372869"/>
-            <a:ext cx="2011679" cy="317501"/>
-          </a:xfrm>
-          <a:prstGeom prst="rect">
-            <a:avLst/>
-          </a:prstGeom>
-          <a:ln w="12700">
-            <a:miter lim="400000"/>
-          </a:ln>
-          <a:extLst>
-            <a:ext uri="{C572A759-6A51-4108-AA02-DFA0A04FC94B}">
-              <ma14:wrappingTextBoxFlag xmlns="" xmlns:m="http://schemas.openxmlformats.org/officeDocument/2006/math" xmlns:a14="http://schemas.microsoft.com/office/drawing/2010/main" xmlns:ma14="http://schemas.microsoft.com/office/mac/drawingml/2011/main" val="1"/>
-            </a:ext>
-          </a:extLst>
-        </p:spPr>
-        <p:txBody>
-          <a:bodyPr lIns="0" tIns="0" rIns="0" bIns="0" anchor="ctr">
-            <a:spAutoFit/>
-          </a:bodyPr>
-          <a:lstStyle>
-            <a:lvl1pPr>
-              <a:defRPr sz="2100" b="1">
-                <a:solidFill>
-                  <a:srgbClr val="17324D"/>
-                </a:solidFill>
-              </a:defRPr>
-            </a:lvl1pPr>
-          </a:lstStyle>
-          <a:p>
-            <a:r>
-              <a:t>Fuel Cost</a:t>
-            </a:r>
-          </a:p>
-        </p:txBody>
-      </p:sp>
-      <p:sp>
-        <p:nvSpPr>
-          <p:cNvPr id="160" name="Text 7"/>
-          <p:cNvSpPr txBox="1"/>
-          <p:nvPr/>
-        </p:nvSpPr>
-        <p:spPr>
-          <a:xfrm>
-            <a:off x="777240" y="1695703"/>
-            <a:ext cx="5486401" cy="558801"/>
-          </a:xfrm>
-          <a:prstGeom prst="rect">
-            <a:avLst/>
-          </a:prstGeom>
-          <a:ln w="12700">
-            <a:miter lim="400000"/>
-          </a:ln>
-          <a:extLst>
-            <a:ext uri="{C572A759-6A51-4108-AA02-DFA0A04FC94B}">
-              <ma14:wrappingTextBoxFlag xmlns="" xmlns:m="http://schemas.openxmlformats.org/officeDocument/2006/math" xmlns:a14="http://schemas.microsoft.com/office/drawing/2010/main" xmlns:ma14="http://schemas.microsoft.com/office/mac/drawingml/2011/main" val="1"/>
-            </a:ext>
-          </a:extLst>
-        </p:spPr>
-        <p:txBody>
-          <a:bodyPr lIns="0" tIns="0" rIns="0" bIns="0" anchor="ctr">
-            <a:spAutoFit/>
-          </a:bodyPr>
-          <a:lstStyle>
-            <a:lvl1pPr>
-              <a:defRPr>
-                <a:solidFill>
-                  <a:srgbClr val="1F2937"/>
-                </a:solidFill>
-              </a:defRPr>
-            </a:lvl1pPr>
-          </a:lstStyle>
-          <a:p>
-            <a:r>
-              <a:t>(Route Distance / Vehicle MPG) × Fuel Price Per Gallon</a:t>
-            </a:r>
-          </a:p>
-        </p:txBody>
-      </p:sp>
-      <p:sp>
-        <p:nvSpPr>
-          <p:cNvPr id="161" name="Text 8"/>
-          <p:cNvSpPr txBox="1"/>
-          <p:nvPr/>
-        </p:nvSpPr>
-        <p:spPr>
-          <a:xfrm>
-            <a:off x="777239" y="2561590"/>
-            <a:ext cx="3108962" cy="317501"/>
-          </a:xfrm>
-          <a:prstGeom prst="rect">
-            <a:avLst/>
-          </a:prstGeom>
-          <a:ln w="12700">
-            <a:miter lim="400000"/>
-          </a:ln>
-          <a:extLst>
-            <a:ext uri="{C572A759-6A51-4108-AA02-DFA0A04FC94B}">
-              <ma14:wrappingTextBoxFlag xmlns="" xmlns:m="http://schemas.openxmlformats.org/officeDocument/2006/math" xmlns:a14="http://schemas.microsoft.com/office/drawing/2010/main" xmlns:ma14="http://schemas.microsoft.com/office/mac/drawingml/2011/main" val="1"/>
-            </a:ext>
-          </a:extLst>
-        </p:spPr>
-        <p:txBody>
-          <a:bodyPr lIns="0" tIns="0" rIns="0" bIns="0" anchor="ctr">
-            <a:spAutoFit/>
-          </a:bodyPr>
-          <a:lstStyle>
-            <a:lvl1pPr>
-              <a:defRPr sz="2100" b="1">
-                <a:solidFill>
-                  <a:srgbClr val="17324D"/>
-                </a:solidFill>
-              </a:defRPr>
-            </a:lvl1pPr>
-          </a:lstStyle>
-          <a:p>
-            <a:r>
-              <a:t>Total Estimated Cost</a:t>
-            </a:r>
-          </a:p>
-        </p:txBody>
-      </p:sp>
-      <p:sp>
-        <p:nvSpPr>
-          <p:cNvPr id="162" name="Text 9"/>
-          <p:cNvSpPr txBox="1"/>
-          <p:nvPr/>
-        </p:nvSpPr>
-        <p:spPr>
-          <a:xfrm>
-            <a:off x="777239" y="3024123"/>
-            <a:ext cx="4937762" cy="279401"/>
-          </a:xfrm>
-          <a:prstGeom prst="rect">
-            <a:avLst/>
-          </a:prstGeom>
-          <a:ln w="12700">
-            <a:miter lim="400000"/>
-          </a:ln>
-          <a:extLst>
-            <a:ext uri="{C572A759-6A51-4108-AA02-DFA0A04FC94B}">
-              <ma14:wrappingTextBoxFlag xmlns="" xmlns:m="http://schemas.openxmlformats.org/officeDocument/2006/math" xmlns:a14="http://schemas.microsoft.com/office/drawing/2010/main" xmlns:ma14="http://schemas.microsoft.com/office/mac/drawingml/2011/main" val="1"/>
-            </a:ext>
-          </a:extLst>
-        </p:spPr>
-        <p:txBody>
-          <a:bodyPr lIns="0" tIns="0" rIns="0" bIns="0" anchor="ctr">
-            <a:spAutoFit/>
-          </a:bodyPr>
-          <a:lstStyle>
-            <a:lvl1pPr>
-              <a:defRPr>
-                <a:solidFill>
-                  <a:srgbClr val="1F2937"/>
-                </a:solidFill>
-              </a:defRPr>
-            </a:lvl1pPr>
-          </a:lstStyle>
-          <a:p>
-            <a:r>
-              <a:t>Fuel Cost + Lodging Cost + Activity Cost</a:t>
-            </a:r>
-          </a:p>
-        </p:txBody>
-      </p:sp>
-      <p:sp>
-        <p:nvSpPr>
-          <p:cNvPr id="163" name="Text 10"/>
-          <p:cNvSpPr txBox="1"/>
-          <p:nvPr/>
-        </p:nvSpPr>
-        <p:spPr>
-          <a:xfrm>
-            <a:off x="777240" y="3750310"/>
-            <a:ext cx="2743201" cy="317501"/>
-          </a:xfrm>
-          <a:prstGeom prst="rect">
-            <a:avLst/>
-          </a:prstGeom>
-          <a:ln w="12700">
-            <a:miter lim="400000"/>
-          </a:ln>
-          <a:extLst>
-            <a:ext uri="{C572A759-6A51-4108-AA02-DFA0A04FC94B}">
-              <ma14:wrappingTextBoxFlag xmlns="" xmlns:m="http://schemas.openxmlformats.org/officeDocument/2006/math" xmlns:a14="http://schemas.microsoft.com/office/drawing/2010/main" xmlns:ma14="http://schemas.microsoft.com/office/mac/drawingml/2011/main" val="1"/>
-            </a:ext>
-          </a:extLst>
-        </p:spPr>
-        <p:txBody>
-          <a:bodyPr lIns="0" tIns="0" rIns="0" bIns="0" anchor="ctr">
-            <a:spAutoFit/>
-          </a:bodyPr>
-          <a:lstStyle>
-            <a:lvl1pPr>
-              <a:defRPr sz="2100" b="1">
-                <a:solidFill>
-                  <a:srgbClr val="17324D"/>
-                </a:solidFill>
-              </a:defRPr>
-            </a:lvl1pPr>
-          </a:lstStyle>
-          <a:p>
-            <a:r>
-              <a:t>Budget Difference</a:t>
-            </a:r>
-          </a:p>
-        </p:txBody>
-      </p:sp>
-      <p:sp>
-        <p:nvSpPr>
-          <p:cNvPr id="164" name="Text 11"/>
-          <p:cNvSpPr txBox="1"/>
-          <p:nvPr/>
-        </p:nvSpPr>
-        <p:spPr>
-          <a:xfrm>
-            <a:off x="777239" y="4212844"/>
-            <a:ext cx="4389122" cy="279401"/>
-          </a:xfrm>
-          <a:prstGeom prst="rect">
-            <a:avLst/>
-          </a:prstGeom>
-          <a:ln w="12700">
-            <a:miter lim="400000"/>
-          </a:ln>
-          <a:extLst>
-            <a:ext uri="{C572A759-6A51-4108-AA02-DFA0A04FC94B}">
-              <ma14:wrappingTextBoxFlag xmlns="" xmlns:m="http://schemas.openxmlformats.org/officeDocument/2006/math" xmlns:a14="http://schemas.microsoft.com/office/drawing/2010/main" xmlns:ma14="http://schemas.microsoft.com/office/mac/drawingml/2011/main" val="1"/>
-            </a:ext>
-          </a:extLst>
-        </p:spPr>
-        <p:txBody>
-          <a:bodyPr lIns="0" tIns="0" rIns="0" bIns="0" anchor="ctr">
-            <a:spAutoFit/>
-          </a:bodyPr>
-          <a:lstStyle>
-            <a:lvl1pPr>
-              <a:defRPr>
-                <a:solidFill>
-                  <a:srgbClr val="1F2937"/>
-                </a:solidFill>
-              </a:defRPr>
-            </a:lvl1pPr>
-          </a:lstStyle>
-          <a:p>
-            <a:r>
-              <a:t>Budget − Total Estimated Cost</a:t>
-            </a:r>
-          </a:p>
-        </p:txBody>
-      </p:sp>
-      <p:sp>
-        <p:nvSpPr>
-          <p:cNvPr id="165" name="Shape 12"/>
+              <a:t>07</a:t>
+            </a:r>
+          </a:p>
+        </p:txBody>
+      </p:sp>
+      <p:sp>
+        <p:nvSpPr>
+          <p:cNvPr id="150" name="Shape 6">
+            <a:extLst>
+              <a:ext uri="{FF2B5EF4-FFF2-40B4-BE49-F238E27FC236}">
+                <a16:creationId xmlns:a16="http://schemas.microsoft.com/office/drawing/2014/main" id="{3DEEDDDB-92A0-6C77-8412-447D5688FA6C}"/>
+              </a:ext>
+            </a:extLst>
+          </p:cNvPr>
           <p:cNvSpPr/>
           <p:nvPr/>
         </p:nvSpPr>
         <p:spPr>
           <a:xfrm>
-            <a:off x="6446520" y="1417319"/>
-            <a:ext cx="4846321" cy="3291842"/>
+            <a:off x="502919" y="1097280"/>
+            <a:ext cx="11201401" cy="5166360"/>
           </a:xfrm>
           <a:prstGeom prst="roundRect">
             <a:avLst>
-              <a:gd name="adj" fmla="val 3333"/>
+              <a:gd name="adj" fmla="val 1416"/>
             </a:avLst>
           </a:prstGeom>
           <a:solidFill>
-            <a:srgbClr val="E9F8F8"/>
+            <a:srgbClr val="FFFFFF"/>
           </a:solidFill>
           <a:ln w="12700">
             <a:solidFill>
@@ -8128,140 +9299,47 @@
           </a:p>
         </p:txBody>
       </p:sp>
-      <p:sp>
-        <p:nvSpPr>
-          <p:cNvPr id="166" name="Text 13"/>
-          <p:cNvSpPr txBox="1"/>
-          <p:nvPr/>
-        </p:nvSpPr>
-        <p:spPr>
-          <a:xfrm>
-            <a:off x="6720840" y="1738630"/>
-            <a:ext cx="4297681" cy="317501"/>
-          </a:xfrm>
-          <a:prstGeom prst="rect">
-            <a:avLst/>
-          </a:prstGeom>
-          <a:ln w="12700">
-            <a:miter lim="400000"/>
-          </a:ln>
-          <a:extLst>
-            <a:ext uri="{C572A759-6A51-4108-AA02-DFA0A04FC94B}">
-              <ma14:wrappingTextBoxFlag xmlns="" xmlns:m="http://schemas.openxmlformats.org/officeDocument/2006/math" xmlns:a14="http://schemas.microsoft.com/office/drawing/2010/main" xmlns:ma14="http://schemas.microsoft.com/office/mac/drawingml/2011/main" val="1"/>
-            </a:ext>
-          </a:extLst>
-        </p:spPr>
-        <p:txBody>
-          <a:bodyPr lIns="0" tIns="0" rIns="0" bIns="0" anchor="ctr">
-            <a:spAutoFit/>
-          </a:bodyPr>
-          <a:lstStyle>
-            <a:lvl1pPr>
-              <a:defRPr sz="2100" b="1">
-                <a:solidFill>
-                  <a:srgbClr val="17324D"/>
-                </a:solidFill>
-              </a:defRPr>
-            </a:lvl1pPr>
-          </a:lstStyle>
-          <a:p>
-            <a:r>
-              <a:t>Tested example</a:t>
-            </a:r>
-          </a:p>
-        </p:txBody>
-      </p:sp>
-      <p:sp>
-        <p:nvSpPr>
-          <p:cNvPr id="167" name="Text 14"/>
-          <p:cNvSpPr txBox="1"/>
-          <p:nvPr/>
-        </p:nvSpPr>
-        <p:spPr>
-          <a:xfrm>
-            <a:off x="6766559" y="2194560"/>
-            <a:ext cx="4160521" cy="2011680"/>
-          </a:xfrm>
-          <a:prstGeom prst="rect">
-            <a:avLst/>
-          </a:prstGeom>
-          <a:ln w="12700">
-            <a:miter lim="400000"/>
-          </a:ln>
-          <a:extLst>
-            <a:ext uri="{C572A759-6A51-4108-AA02-DFA0A04FC94B}">
-              <ma14:wrappingTextBoxFlag xmlns="" xmlns:m="http://schemas.openxmlformats.org/officeDocument/2006/math" xmlns:a14="http://schemas.microsoft.com/office/drawing/2010/main" xmlns:ma14="http://schemas.microsoft.com/office/mac/drawingml/2011/main" val="1"/>
-            </a:ext>
-          </a:extLst>
-        </p:spPr>
-        <p:txBody>
-          <a:bodyPr lIns="380" tIns="380" rIns="380" bIns="380">
-            <a:normAutofit/>
-          </a:bodyPr>
-          <a:lstStyle/>
-          <a:p>
-            <a:pPr>
-              <a:defRPr sz="1700">
-                <a:solidFill>
-                  <a:srgbClr val="1F2937"/>
-                </a:solidFill>
-              </a:defRPr>
-            </a:pPr>
-            <a:r>
-              <a:t>• 81.9 miles</a:t>
-            </a:r>
-          </a:p>
-          <a:p>
-            <a:pPr>
-              <a:defRPr sz="1700">
-                <a:solidFill>
-                  <a:srgbClr val="1F2937"/>
-                </a:solidFill>
-              </a:defRPr>
-            </a:pPr>
-            <a:r>
-              <a:t>• 28 MPG vehicle preset</a:t>
-            </a:r>
-          </a:p>
-          <a:p>
-            <a:pPr>
-              <a:defRPr sz="1700">
-                <a:solidFill>
-                  <a:srgbClr val="1F2937"/>
-                </a:solidFill>
-              </a:defRPr>
-            </a:pPr>
-            <a:r>
-              <a:t>• $3.38 per gallon</a:t>
-            </a:r>
-          </a:p>
-          <a:p>
-            <a:pPr>
-              <a:defRPr sz="1700">
-                <a:solidFill>
-                  <a:srgbClr val="1F2937"/>
-                </a:solidFill>
-              </a:defRPr>
-            </a:pPr>
-            <a:r>
-              <a:t>• ≈ $9.89 fuel cost</a:t>
-            </a:r>
-          </a:p>
-          <a:p>
-            <a:pPr>
-              <a:defRPr sz="1700">
-                <a:solidFill>
-                  <a:srgbClr val="1F2937"/>
-                </a:solidFill>
-              </a:defRPr>
-            </a:pPr>
-            <a:r>
-              <a:t>• Drive time ≈ 1 hr 29 min at 55 MPH</a:t>
-            </a:r>
-          </a:p>
-        </p:txBody>
-      </p:sp>
+      <p:pic>
+        <p:nvPicPr>
+          <p:cNvPr id="3" name="Picture 2">
+            <a:extLst>
+              <a:ext uri="{FF2B5EF4-FFF2-40B4-BE49-F238E27FC236}">
+                <a16:creationId xmlns:a16="http://schemas.microsoft.com/office/drawing/2014/main" id="{67183A10-8AA3-C674-075A-B64223C9B65F}"/>
+              </a:ext>
+            </a:extLst>
+          </p:cNvPr>
+          <p:cNvPicPr>
+            <a:picLocks noChangeAspect="1"/>
+          </p:cNvPicPr>
+          <p:nvPr/>
+        </p:nvPicPr>
+        <p:blipFill>
+          <a:blip r:embed="rId2">
+            <a:extLst>
+              <a:ext uri="{28A0092B-C50C-407E-A947-70E740481C1C}">
+                <a14:useLocalDpi xmlns:a14="http://schemas.microsoft.com/office/drawing/2010/main" val="0"/>
+              </a:ext>
+            </a:extLst>
+          </a:blip>
+          <a:srcRect/>
+          <a:stretch/>
+        </p:blipFill>
+        <p:spPr>
+          <a:xfrm>
+            <a:off x="1962128" y="1379728"/>
+            <a:ext cx="8653878" cy="4657344"/>
+          </a:xfrm>
+          <a:prstGeom prst="rect">
+            <a:avLst/>
+          </a:prstGeom>
+        </p:spPr>
+      </p:pic>
     </p:spTree>
+    <p:extLst>
+      <p:ext uri="{BB962C8B-B14F-4D97-AF65-F5344CB8AC3E}">
+        <p14:creationId xmlns:p14="http://schemas.microsoft.com/office/powerpoint/2010/main" val="251688176"/>
+      </p:ext>
+    </p:extLst>
   </p:cSld>
   <p:clrMapOvr>
     <a:masterClrMapping/>
@@ -8289,7 +9367,7 @@
       </p:grpSpPr>
       <p:sp>
         <p:nvSpPr>
-          <p:cNvPr id="169" name="Text 0"/>
+          <p:cNvPr id="153" name="Text 0"/>
           <p:cNvSpPr txBox="1"/>
           <p:nvPr/>
         </p:nvSpPr>
@@ -8306,7 +9384,7 @@
           </a:ln>
           <a:extLst>
             <a:ext uri="{C572A759-6A51-4108-AA02-DFA0A04FC94B}">
-              <ma14:wrappingTextBoxFlag xmlns="" xmlns:m="http://schemas.openxmlformats.org/officeDocument/2006/math" xmlns:a14="http://schemas.microsoft.com/office/drawing/2010/main" xmlns:ma14="http://schemas.microsoft.com/office/mac/drawingml/2011/main" val="1"/>
+              <ma14:wrappingTextBoxFlag xmlns:ma14="http://schemas.microsoft.com/office/mac/drawingml/2011/main" xmlns:a14="http://schemas.microsoft.com/office/drawing/2010/main" xmlns:m="http://schemas.openxmlformats.org/officeDocument/2006/math" xmlns="" val="1"/>
             </a:ext>
           </a:extLst>
         </p:spPr>
@@ -8321,14 +9399,14 @@
           </a:lstStyle>
           <a:p>
             <a:r>
-              <a:t>🧪</a:t>
-            </a:r>
-          </a:p>
-        </p:txBody>
-      </p:sp>
-      <p:sp>
-        <p:nvSpPr>
-          <p:cNvPr id="170" name="Text 1"/>
+              <a:t>🧮</a:t>
+            </a:r>
+          </a:p>
+        </p:txBody>
+      </p:sp>
+      <p:sp>
+        <p:nvSpPr>
+          <p:cNvPr id="154" name="Text 1"/>
           <p:cNvSpPr txBox="1"/>
           <p:nvPr/>
         </p:nvSpPr>
@@ -8345,7 +9423,7 @@
           </a:ln>
           <a:extLst>
             <a:ext uri="{C572A759-6A51-4108-AA02-DFA0A04FC94B}">
-              <ma14:wrappingTextBoxFlag xmlns="" xmlns:m="http://schemas.openxmlformats.org/officeDocument/2006/math" xmlns:a14="http://schemas.microsoft.com/office/drawing/2010/main" xmlns:ma14="http://schemas.microsoft.com/office/mac/drawingml/2011/main" val="1"/>
+              <ma14:wrappingTextBoxFlag xmlns:ma14="http://schemas.microsoft.com/office/mac/drawingml/2011/main" xmlns:a14="http://schemas.microsoft.com/office/drawing/2010/main" xmlns:m="http://schemas.openxmlformats.org/officeDocument/2006/math" xmlns="" val="1"/>
             </a:ext>
           </a:extLst>
         </p:spPr>
@@ -8368,14 +9446,14 @@
           </a:lstStyle>
           <a:p>
             <a:r>
-              <a:t>Acceptance testing</a:t>
-            </a:r>
-          </a:p>
-        </p:txBody>
-      </p:sp>
-      <p:sp>
-        <p:nvSpPr>
-          <p:cNvPr id="171" name="Text 2"/>
+              <a:t>Algorithms</a:t>
+            </a:r>
+          </a:p>
+        </p:txBody>
+      </p:sp>
+      <p:sp>
+        <p:nvSpPr>
+          <p:cNvPr id="155" name="Text 2"/>
           <p:cNvSpPr txBox="1"/>
           <p:nvPr/>
         </p:nvSpPr>
@@ -8392,7 +9470,7 @@
           </a:ln>
           <a:extLst>
             <a:ext uri="{C572A759-6A51-4108-AA02-DFA0A04FC94B}">
-              <ma14:wrappingTextBoxFlag xmlns="" xmlns:m="http://schemas.openxmlformats.org/officeDocument/2006/math" xmlns:a14="http://schemas.microsoft.com/office/drawing/2010/main" xmlns:ma14="http://schemas.microsoft.com/office/mac/drawingml/2011/main" val="1"/>
+              <ma14:wrappingTextBoxFlag xmlns:ma14="http://schemas.microsoft.com/office/mac/drawingml/2011/main" xmlns:a14="http://schemas.microsoft.com/office/drawing/2010/main" xmlns:m="http://schemas.openxmlformats.org/officeDocument/2006/math" xmlns="" val="1"/>
             </a:ext>
           </a:extLst>
         </p:spPr>
@@ -8411,14 +9489,14 @@
           </a:lstStyle>
           <a:p>
             <a:r>
-              <a:t>The main traveler workflow was tested</a:t>
-            </a:r>
-          </a:p>
-        </p:txBody>
-      </p:sp>
-      <p:sp>
-        <p:nvSpPr>
-          <p:cNvPr id="172" name="Shape 3"/>
+              <a:t>Simple calculations create the trip estimate</a:t>
+            </a:r>
+          </a:p>
+        </p:txBody>
+      </p:sp>
+      <p:sp>
+        <p:nvSpPr>
+          <p:cNvPr id="156" name="Shape 3"/>
           <p:cNvSpPr/>
           <p:nvPr/>
         </p:nvSpPr>
@@ -8446,7 +9524,7 @@
       </p:sp>
       <p:sp>
         <p:nvSpPr>
-          <p:cNvPr id="173" name="Text 4"/>
+          <p:cNvPr id="157" name="Text 4"/>
           <p:cNvSpPr txBox="1"/>
           <p:nvPr/>
         </p:nvSpPr>
@@ -8463,7 +9541,7 @@
           </a:ln>
           <a:extLst>
             <a:ext uri="{C572A759-6A51-4108-AA02-DFA0A04FC94B}">
-              <ma14:wrappingTextBoxFlag xmlns="" xmlns:m="http://schemas.openxmlformats.org/officeDocument/2006/math" xmlns:a14="http://schemas.microsoft.com/office/drawing/2010/main" xmlns:ma14="http://schemas.microsoft.com/office/mac/drawingml/2011/main" val="1"/>
+              <ma14:wrappingTextBoxFlag xmlns:ma14="http://schemas.microsoft.com/office/mac/drawingml/2011/main" xmlns:a14="http://schemas.microsoft.com/office/drawing/2010/main" xmlns:m="http://schemas.openxmlformats.org/officeDocument/2006/math" xmlns="" val="1"/>
             </a:ext>
           </a:extLst>
         </p:spPr>
@@ -8489,7 +9567,7 @@
       </p:sp>
       <p:sp>
         <p:nvSpPr>
-          <p:cNvPr id="174" name="Text 5"/>
+          <p:cNvPr id="158" name="Text 5"/>
           <p:cNvSpPr txBox="1"/>
           <p:nvPr/>
         </p:nvSpPr>
@@ -8506,7 +9584,7 @@
           </a:ln>
           <a:extLst>
             <a:ext uri="{C572A759-6A51-4108-AA02-DFA0A04FC94B}">
-              <ma14:wrappingTextBoxFlag xmlns="" xmlns:m="http://schemas.openxmlformats.org/officeDocument/2006/math" xmlns:a14="http://schemas.microsoft.com/office/drawing/2010/main" xmlns:ma14="http://schemas.microsoft.com/office/mac/drawingml/2011/main" val="1"/>
+              <ma14:wrappingTextBoxFlag xmlns:ma14="http://schemas.microsoft.com/office/mac/drawingml/2011/main" xmlns:a14="http://schemas.microsoft.com/office/drawing/2010/main" xmlns:m="http://schemas.openxmlformats.org/officeDocument/2006/math" xmlns="" val="1"/>
             </a:ext>
           </a:extLst>
         </p:spPr>
@@ -8525,31 +9603,31 @@
           </a:lstStyle>
           <a:p>
             <a:r>
-              <a:t>09</a:t>
-            </a:r>
-          </a:p>
-        </p:txBody>
-      </p:sp>
-      <p:sp>
-        <p:nvSpPr>
-          <p:cNvPr id="175" name="Text 6"/>
-          <p:cNvSpPr txBox="1"/>
-          <p:nvPr/>
-        </p:nvSpPr>
-        <p:spPr>
-          <a:xfrm>
-            <a:off x="868680" y="1469389"/>
-            <a:ext cx="2743201" cy="673101"/>
-          </a:xfrm>
-          <a:prstGeom prst="rect">
-            <a:avLst/>
-          </a:prstGeom>
-          <a:ln w="12700">
-            <a:miter lim="400000"/>
-          </a:ln>
-          <a:extLst>
-            <a:ext uri="{C572A759-6A51-4108-AA02-DFA0A04FC94B}">
-              <ma14:wrappingTextBoxFlag xmlns="" xmlns:m="http://schemas.openxmlformats.org/officeDocument/2006/math" xmlns:a14="http://schemas.microsoft.com/office/drawing/2010/main" xmlns:ma14="http://schemas.microsoft.com/office/mac/drawingml/2011/main" val="1"/>
+              <a:t>08</a:t>
+            </a:r>
+          </a:p>
+        </p:txBody>
+      </p:sp>
+      <p:sp>
+        <p:nvSpPr>
+          <p:cNvPr id="159" name="Text 6"/>
+          <p:cNvSpPr txBox="1"/>
+          <p:nvPr/>
+        </p:nvSpPr>
+        <p:spPr>
+          <a:xfrm>
+            <a:off x="777240" y="1372869"/>
+            <a:ext cx="2011679" cy="317501"/>
+          </a:xfrm>
+          <a:prstGeom prst="rect">
+            <a:avLst/>
+          </a:prstGeom>
+          <a:ln w="12700">
+            <a:miter lim="400000"/>
+          </a:ln>
+          <a:extLst>
+            <a:ext uri="{C572A759-6A51-4108-AA02-DFA0A04FC94B}">
+              <ma14:wrappingTextBoxFlag xmlns:ma14="http://schemas.microsoft.com/office/mac/drawingml/2011/main" xmlns:a14="http://schemas.microsoft.com/office/drawing/2010/main" xmlns:m="http://schemas.openxmlformats.org/officeDocument/2006/math" xmlns="" val="1"/>
             </a:ext>
           </a:extLst>
         </p:spPr>
@@ -8558,8 +9636,8 @@
             <a:spAutoFit/>
           </a:bodyPr>
           <a:lstStyle>
-            <a:lvl1pPr algn="ctr">
-              <a:defRPr sz="4400" b="1">
+            <a:lvl1pPr>
+              <a:defRPr sz="2100" b="1">
                 <a:solidFill>
                   <a:srgbClr val="17324D"/>
                 </a:solidFill>
@@ -8568,32 +9646,31 @@
           </a:lstStyle>
           <a:p>
             <a:r>
-              <a:rPr dirty="0"/>
-              <a:t>10</a:t>
-            </a:r>
-          </a:p>
-        </p:txBody>
-      </p:sp>
-      <p:sp>
-        <p:nvSpPr>
-          <p:cNvPr id="176" name="Text 7"/>
-          <p:cNvSpPr txBox="1"/>
-          <p:nvPr/>
-        </p:nvSpPr>
-        <p:spPr>
-          <a:xfrm>
-            <a:off x="868680" y="2233676"/>
-            <a:ext cx="2743201" cy="177801"/>
-          </a:xfrm>
-          <a:prstGeom prst="rect">
-            <a:avLst/>
-          </a:prstGeom>
-          <a:ln w="12700">
-            <a:miter lim="400000"/>
-          </a:ln>
-          <a:extLst>
-            <a:ext uri="{C572A759-6A51-4108-AA02-DFA0A04FC94B}">
-              <ma14:wrappingTextBoxFlag xmlns="" xmlns:m="http://schemas.openxmlformats.org/officeDocument/2006/math" xmlns:a14="http://schemas.microsoft.com/office/drawing/2010/main" xmlns:ma14="http://schemas.microsoft.com/office/mac/drawingml/2011/main" val="1"/>
+              <a:t>Fuel Cost</a:t>
+            </a:r>
+          </a:p>
+        </p:txBody>
+      </p:sp>
+      <p:sp>
+        <p:nvSpPr>
+          <p:cNvPr id="160" name="Text 7"/>
+          <p:cNvSpPr txBox="1"/>
+          <p:nvPr/>
+        </p:nvSpPr>
+        <p:spPr>
+          <a:xfrm>
+            <a:off x="777240" y="1695703"/>
+            <a:ext cx="5486401" cy="558801"/>
+          </a:xfrm>
+          <a:prstGeom prst="rect">
+            <a:avLst/>
+          </a:prstGeom>
+          <a:ln w="12700">
+            <a:miter lim="400000"/>
+          </a:ln>
+          <a:extLst>
+            <a:ext uri="{C572A759-6A51-4108-AA02-DFA0A04FC94B}">
+              <ma14:wrappingTextBoxFlag xmlns:ma14="http://schemas.microsoft.com/office/mac/drawingml/2011/main" xmlns:a14="http://schemas.microsoft.com/office/drawing/2010/main" xmlns:m="http://schemas.openxmlformats.org/officeDocument/2006/math" xmlns="" val="1"/>
             </a:ext>
           </a:extLst>
         </p:spPr>
@@ -8602,8 +9679,8 @@
             <a:spAutoFit/>
           </a:bodyPr>
           <a:lstStyle>
-            <a:lvl1pPr algn="ctr">
-              <a:defRPr sz="1200" b="1">
+            <a:lvl1pPr>
+              <a:defRPr>
                 <a:solidFill>
                   <a:srgbClr val="1F2937"/>
                 </a:solidFill>
@@ -8612,31 +9689,31 @@
           </a:lstStyle>
           <a:p>
             <a:r>
-              <a:t>TESTS EXECUTED</a:t>
-            </a:r>
-          </a:p>
-        </p:txBody>
-      </p:sp>
-      <p:sp>
-        <p:nvSpPr>
-          <p:cNvPr id="177" name="Text 8"/>
-          <p:cNvSpPr txBox="1"/>
-          <p:nvPr/>
-        </p:nvSpPr>
-        <p:spPr>
-          <a:xfrm>
-            <a:off x="868680" y="2513839"/>
-            <a:ext cx="2743201" cy="673101"/>
-          </a:xfrm>
-          <a:prstGeom prst="rect">
-            <a:avLst/>
-          </a:prstGeom>
-          <a:ln w="12700">
-            <a:miter lim="400000"/>
-          </a:ln>
-          <a:extLst>
-            <a:ext uri="{C572A759-6A51-4108-AA02-DFA0A04FC94B}">
-              <ma14:wrappingTextBoxFlag xmlns="" xmlns:m="http://schemas.openxmlformats.org/officeDocument/2006/math" xmlns:a14="http://schemas.microsoft.com/office/drawing/2010/main" xmlns:ma14="http://schemas.microsoft.com/office/mac/drawingml/2011/main" val="1"/>
+              <a:t>(Route Distance / Vehicle MPG) × Fuel Price Per Gallon</a:t>
+            </a:r>
+          </a:p>
+        </p:txBody>
+      </p:sp>
+      <p:sp>
+        <p:nvSpPr>
+          <p:cNvPr id="161" name="Text 8"/>
+          <p:cNvSpPr txBox="1"/>
+          <p:nvPr/>
+        </p:nvSpPr>
+        <p:spPr>
+          <a:xfrm>
+            <a:off x="777239" y="2561590"/>
+            <a:ext cx="3108962" cy="317501"/>
+          </a:xfrm>
+          <a:prstGeom prst="rect">
+            <a:avLst/>
+          </a:prstGeom>
+          <a:ln w="12700">
+            <a:miter lim="400000"/>
+          </a:ln>
+          <a:extLst>
+            <a:ext uri="{C572A759-6A51-4108-AA02-DFA0A04FC94B}">
+              <ma14:wrappingTextBoxFlag xmlns:ma14="http://schemas.microsoft.com/office/mac/drawingml/2011/main" xmlns:a14="http://schemas.microsoft.com/office/drawing/2010/main" xmlns:m="http://schemas.openxmlformats.org/officeDocument/2006/math" xmlns="" val="1"/>
             </a:ext>
           </a:extLst>
         </p:spPr>
@@ -8645,42 +9722,41 @@
             <a:spAutoFit/>
           </a:bodyPr>
           <a:lstStyle>
-            <a:lvl1pPr algn="ctr">
-              <a:defRPr sz="4400" b="1">
-                <a:solidFill>
-                  <a:srgbClr val="2F855A"/>
-                </a:solidFill>
-              </a:defRPr>
-            </a:lvl1pPr>
-          </a:lstStyle>
-          <a:p>
-            <a:r>
-              <a:rPr dirty="0"/>
-              <a:t>10</a:t>
-            </a:r>
-          </a:p>
-        </p:txBody>
-      </p:sp>
-      <p:sp>
-        <p:nvSpPr>
-          <p:cNvPr id="178" name="Text 9"/>
-          <p:cNvSpPr txBox="1"/>
-          <p:nvPr/>
-        </p:nvSpPr>
-        <p:spPr>
-          <a:xfrm>
-            <a:off x="868680" y="3278126"/>
-            <a:ext cx="2743201" cy="177801"/>
-          </a:xfrm>
-          <a:prstGeom prst="rect">
-            <a:avLst/>
-          </a:prstGeom>
-          <a:ln w="12700">
-            <a:miter lim="400000"/>
-          </a:ln>
-          <a:extLst>
-            <a:ext uri="{C572A759-6A51-4108-AA02-DFA0A04FC94B}">
-              <ma14:wrappingTextBoxFlag xmlns="" xmlns:m="http://schemas.openxmlformats.org/officeDocument/2006/math" xmlns:a14="http://schemas.microsoft.com/office/drawing/2010/main" xmlns:ma14="http://schemas.microsoft.com/office/mac/drawingml/2011/main" val="1"/>
+            <a:lvl1pPr>
+              <a:defRPr sz="2100" b="1">
+                <a:solidFill>
+                  <a:srgbClr val="17324D"/>
+                </a:solidFill>
+              </a:defRPr>
+            </a:lvl1pPr>
+          </a:lstStyle>
+          <a:p>
+            <a:r>
+              <a:t>Total Estimated Cost</a:t>
+            </a:r>
+          </a:p>
+        </p:txBody>
+      </p:sp>
+      <p:sp>
+        <p:nvSpPr>
+          <p:cNvPr id="162" name="Text 9"/>
+          <p:cNvSpPr txBox="1"/>
+          <p:nvPr/>
+        </p:nvSpPr>
+        <p:spPr>
+          <a:xfrm>
+            <a:off x="777239" y="3024123"/>
+            <a:ext cx="4937762" cy="279401"/>
+          </a:xfrm>
+          <a:prstGeom prst="rect">
+            <a:avLst/>
+          </a:prstGeom>
+          <a:ln w="12700">
+            <a:miter lim="400000"/>
+          </a:ln>
+          <a:extLst>
+            <a:ext uri="{C572A759-6A51-4108-AA02-DFA0A04FC94B}">
+              <ma14:wrappingTextBoxFlag xmlns:ma14="http://schemas.microsoft.com/office/mac/drawingml/2011/main" xmlns:a14="http://schemas.microsoft.com/office/drawing/2010/main" xmlns:m="http://schemas.openxmlformats.org/officeDocument/2006/math" xmlns="" val="1"/>
             </a:ext>
           </a:extLst>
         </p:spPr>
@@ -8689,8 +9765,8 @@
             <a:spAutoFit/>
           </a:bodyPr>
           <a:lstStyle>
-            <a:lvl1pPr algn="ctr">
-              <a:defRPr sz="1200" b="1">
+            <a:lvl1pPr>
+              <a:defRPr>
                 <a:solidFill>
                   <a:srgbClr val="1F2937"/>
                 </a:solidFill>
@@ -8699,32 +9775,31 @@
           </a:lstStyle>
           <a:p>
             <a:r>
-              <a:rPr dirty="0"/>
-              <a:t>PASSED</a:t>
-            </a:r>
-          </a:p>
-        </p:txBody>
-      </p:sp>
-      <p:sp>
-        <p:nvSpPr>
-          <p:cNvPr id="179" name="Text 10"/>
-          <p:cNvSpPr txBox="1"/>
-          <p:nvPr/>
-        </p:nvSpPr>
-        <p:spPr>
-          <a:xfrm>
-            <a:off x="868680" y="3554223"/>
-            <a:ext cx="2743201" cy="673101"/>
-          </a:xfrm>
-          <a:prstGeom prst="rect">
-            <a:avLst/>
-          </a:prstGeom>
-          <a:ln w="12700">
-            <a:miter lim="400000"/>
-          </a:ln>
-          <a:extLst>
-            <a:ext uri="{C572A759-6A51-4108-AA02-DFA0A04FC94B}">
-              <ma14:wrappingTextBoxFlag xmlns="" xmlns:m="http://schemas.openxmlformats.org/officeDocument/2006/math" xmlns:a14="http://schemas.microsoft.com/office/drawing/2010/main" xmlns:ma14="http://schemas.microsoft.com/office/mac/drawingml/2011/main" val="1"/>
+              <a:t>Fuel Cost + Lodging Cost + Activity Cost</a:t>
+            </a:r>
+          </a:p>
+        </p:txBody>
+      </p:sp>
+      <p:sp>
+        <p:nvSpPr>
+          <p:cNvPr id="163" name="Text 10"/>
+          <p:cNvSpPr txBox="1"/>
+          <p:nvPr/>
+        </p:nvSpPr>
+        <p:spPr>
+          <a:xfrm>
+            <a:off x="777240" y="3750310"/>
+            <a:ext cx="2743201" cy="317501"/>
+          </a:xfrm>
+          <a:prstGeom prst="rect">
+            <a:avLst/>
+          </a:prstGeom>
+          <a:ln w="12700">
+            <a:miter lim="400000"/>
+          </a:ln>
+          <a:extLst>
+            <a:ext uri="{C572A759-6A51-4108-AA02-DFA0A04FC94B}">
+              <ma14:wrappingTextBoxFlag xmlns:ma14="http://schemas.microsoft.com/office/mac/drawingml/2011/main" xmlns:a14="http://schemas.microsoft.com/office/drawing/2010/main" xmlns:m="http://schemas.openxmlformats.org/officeDocument/2006/math" xmlns="" val="1"/>
             </a:ext>
           </a:extLst>
         </p:spPr>
@@ -8733,42 +9808,41 @@
             <a:spAutoFit/>
           </a:bodyPr>
           <a:lstStyle>
-            <a:lvl1pPr algn="ctr">
-              <a:defRPr sz="4400" b="1">
-                <a:solidFill>
-                  <a:srgbClr val="C53030"/>
-                </a:solidFill>
-              </a:defRPr>
-            </a:lvl1pPr>
-          </a:lstStyle>
-          <a:p>
-            <a:r>
-              <a:rPr dirty="0"/>
-              <a:t>0</a:t>
-            </a:r>
-          </a:p>
-        </p:txBody>
-      </p:sp>
-      <p:sp>
-        <p:nvSpPr>
-          <p:cNvPr id="180" name="Text 11"/>
-          <p:cNvSpPr txBox="1"/>
-          <p:nvPr/>
-        </p:nvSpPr>
-        <p:spPr>
-          <a:xfrm>
-            <a:off x="868680" y="4318510"/>
-            <a:ext cx="2743201" cy="177801"/>
-          </a:xfrm>
-          <a:prstGeom prst="rect">
-            <a:avLst/>
-          </a:prstGeom>
-          <a:ln w="12700">
-            <a:miter lim="400000"/>
-          </a:ln>
-          <a:extLst>
-            <a:ext uri="{C572A759-6A51-4108-AA02-DFA0A04FC94B}">
-              <ma14:wrappingTextBoxFlag xmlns="" xmlns:m="http://schemas.openxmlformats.org/officeDocument/2006/math" xmlns:a14="http://schemas.microsoft.com/office/drawing/2010/main" xmlns:ma14="http://schemas.microsoft.com/office/mac/drawingml/2011/main" val="1"/>
+            <a:lvl1pPr>
+              <a:defRPr sz="2100" b="1">
+                <a:solidFill>
+                  <a:srgbClr val="17324D"/>
+                </a:solidFill>
+              </a:defRPr>
+            </a:lvl1pPr>
+          </a:lstStyle>
+          <a:p>
+            <a:r>
+              <a:t>Budget Difference</a:t>
+            </a:r>
+          </a:p>
+        </p:txBody>
+      </p:sp>
+      <p:sp>
+        <p:nvSpPr>
+          <p:cNvPr id="164" name="Text 11"/>
+          <p:cNvSpPr txBox="1"/>
+          <p:nvPr/>
+        </p:nvSpPr>
+        <p:spPr>
+          <a:xfrm>
+            <a:off x="777239" y="4212844"/>
+            <a:ext cx="4389122" cy="279401"/>
+          </a:xfrm>
+          <a:prstGeom prst="rect">
+            <a:avLst/>
+          </a:prstGeom>
+          <a:ln w="12700">
+            <a:miter lim="400000"/>
+          </a:ln>
+          <a:extLst>
+            <a:ext uri="{C572A759-6A51-4108-AA02-DFA0A04FC94B}">
+              <ma14:wrappingTextBoxFlag xmlns:ma14="http://schemas.microsoft.com/office/mac/drawingml/2011/main" xmlns:a14="http://schemas.microsoft.com/office/drawing/2010/main" xmlns:m="http://schemas.openxmlformats.org/officeDocument/2006/math" xmlns="" val="1"/>
             </a:ext>
           </a:extLst>
         </p:spPr>
@@ -8777,8 +9851,8 @@
             <a:spAutoFit/>
           </a:bodyPr>
           <a:lstStyle>
-            <a:lvl1pPr algn="ctr">
-              <a:defRPr sz="1200" b="1">
+            <a:lvl1pPr>
+              <a:defRPr>
                 <a:solidFill>
                   <a:srgbClr val="1F2937"/>
                 </a:solidFill>
@@ -8787,29 +9861,29 @@
           </a:lstStyle>
           <a:p>
             <a:r>
-              <a:t>FAILED</a:t>
-            </a:r>
-          </a:p>
-        </p:txBody>
-      </p:sp>
-      <p:sp>
-        <p:nvSpPr>
-          <p:cNvPr id="181" name="Shape 12"/>
+              <a:t>Budget − Total Estimated Cost</a:t>
+            </a:r>
+          </a:p>
+        </p:txBody>
+      </p:sp>
+      <p:sp>
+        <p:nvSpPr>
+          <p:cNvPr id="165" name="Shape 12"/>
           <p:cNvSpPr/>
           <p:nvPr/>
         </p:nvSpPr>
         <p:spPr>
           <a:xfrm>
-            <a:off x="868681" y="4845813"/>
-            <a:ext cx="2816352" cy="1463040"/>
+            <a:off x="6446520" y="1417319"/>
+            <a:ext cx="4846321" cy="3291842"/>
           </a:xfrm>
           <a:prstGeom prst="roundRect">
             <a:avLst>
-              <a:gd name="adj" fmla="val 7500"/>
+              <a:gd name="adj" fmla="val 3333"/>
             </a:avLst>
           </a:prstGeom>
           <a:solidFill>
-            <a:srgbClr val="F5F7FA"/>
+            <a:srgbClr val="E9F8F8"/>
           </a:solidFill>
           <a:ln w="12700">
             <a:solidFill>
@@ -8827,24 +9901,67 @@
       </p:sp>
       <p:sp>
         <p:nvSpPr>
-          <p:cNvPr id="182" name="Text 13"/>
-          <p:cNvSpPr txBox="1"/>
-          <p:nvPr/>
-        </p:nvSpPr>
-        <p:spPr>
-          <a:xfrm>
-            <a:off x="1188719" y="5165853"/>
-            <a:ext cx="9555482" cy="822961"/>
-          </a:xfrm>
-          <a:prstGeom prst="rect">
-            <a:avLst/>
-          </a:prstGeom>
-          <a:ln w="12700">
-            <a:miter lim="400000"/>
-          </a:ln>
-          <a:extLst>
-            <a:ext uri="{C572A759-6A51-4108-AA02-DFA0A04FC94B}">
-              <ma14:wrappingTextBoxFlag xmlns="" xmlns:m="http://schemas.openxmlformats.org/officeDocument/2006/math" xmlns:a14="http://schemas.microsoft.com/office/drawing/2010/main" xmlns:ma14="http://schemas.microsoft.com/office/mac/drawingml/2011/main" val="1"/>
+          <p:cNvPr id="166" name="Text 13"/>
+          <p:cNvSpPr txBox="1"/>
+          <p:nvPr/>
+        </p:nvSpPr>
+        <p:spPr>
+          <a:xfrm>
+            <a:off x="6720840" y="1738630"/>
+            <a:ext cx="4297681" cy="317501"/>
+          </a:xfrm>
+          <a:prstGeom prst="rect">
+            <a:avLst/>
+          </a:prstGeom>
+          <a:ln w="12700">
+            <a:miter lim="400000"/>
+          </a:ln>
+          <a:extLst>
+            <a:ext uri="{C572A759-6A51-4108-AA02-DFA0A04FC94B}">
+              <ma14:wrappingTextBoxFlag xmlns:ma14="http://schemas.microsoft.com/office/mac/drawingml/2011/main" xmlns:a14="http://schemas.microsoft.com/office/drawing/2010/main" xmlns:m="http://schemas.openxmlformats.org/officeDocument/2006/math" xmlns="" val="1"/>
+            </a:ext>
+          </a:extLst>
+        </p:spPr>
+        <p:txBody>
+          <a:bodyPr lIns="0" tIns="0" rIns="0" bIns="0" anchor="ctr">
+            <a:spAutoFit/>
+          </a:bodyPr>
+          <a:lstStyle>
+            <a:lvl1pPr>
+              <a:defRPr sz="2100" b="1">
+                <a:solidFill>
+                  <a:srgbClr val="17324D"/>
+                </a:solidFill>
+              </a:defRPr>
+            </a:lvl1pPr>
+          </a:lstStyle>
+          <a:p>
+            <a:r>
+              <a:t>Tested example</a:t>
+            </a:r>
+          </a:p>
+        </p:txBody>
+      </p:sp>
+      <p:sp>
+        <p:nvSpPr>
+          <p:cNvPr id="167" name="Text 14"/>
+          <p:cNvSpPr txBox="1"/>
+          <p:nvPr/>
+        </p:nvSpPr>
+        <p:spPr>
+          <a:xfrm>
+            <a:off x="6766559" y="2194560"/>
+            <a:ext cx="4160521" cy="2011680"/>
+          </a:xfrm>
+          <a:prstGeom prst="rect">
+            <a:avLst/>
+          </a:prstGeom>
+          <a:ln w="12700">
+            <a:miter lim="400000"/>
+          </a:ln>
+          <a:extLst>
+            <a:ext uri="{C572A759-6A51-4108-AA02-DFA0A04FC94B}">
+              <ma14:wrappingTextBoxFlag xmlns:ma14="http://schemas.microsoft.com/office/mac/drawingml/2011/main" xmlns:a14="http://schemas.microsoft.com/office/drawing/2010/main" xmlns:m="http://schemas.openxmlformats.org/officeDocument/2006/math" xmlns="" val="1"/>
             </a:ext>
           </a:extLst>
         </p:spPr>
@@ -8854,784 +9971,64 @@
           </a:bodyPr>
           <a:lstStyle/>
           <a:p>
-            <a:pPr defTabSz="512063">
-              <a:defRPr sz="839">
+            <a:pPr>
+              <a:defRPr sz="1700">
                 <a:solidFill>
                   <a:srgbClr val="1F2937"/>
                 </a:solidFill>
               </a:defRPr>
             </a:pPr>
             <a:r>
-              <a:rPr dirty="0"/>
-              <a:t>• Login and account access</a:t>
-            </a:r>
-          </a:p>
-          <a:p>
-            <a:pPr defTabSz="512063">
-              <a:defRPr sz="839">
+              <a:t>• 81.9 miles</a:t>
+            </a:r>
+          </a:p>
+          <a:p>
+            <a:pPr>
+              <a:defRPr sz="1700">
                 <a:solidFill>
                   <a:srgbClr val="1F2937"/>
                 </a:solidFill>
               </a:defRPr>
             </a:pPr>
             <a:r>
-              <a:rPr dirty="0"/>
-              <a:t>• Create, calculate, save, reopen, and delete a trip</a:t>
-            </a:r>
-          </a:p>
-          <a:p>
-            <a:pPr defTabSz="512063">
-              <a:defRPr sz="839">
+              <a:t>• 28 MPG vehicle preset</a:t>
+            </a:r>
+          </a:p>
+          <a:p>
+            <a:pPr>
+              <a:defRPr sz="1700">
                 <a:solidFill>
                   <a:srgbClr val="1F2937"/>
                 </a:solidFill>
               </a:defRPr>
             </a:pPr>
             <a:r>
-              <a:rPr dirty="0"/>
-              <a:t>• Invalid mileage and invalid budget validation</a:t>
-            </a:r>
-          </a:p>
-          <a:p>
-            <a:pPr defTabSz="512063">
-              <a:defRPr sz="839">
+              <a:t>• $3.38 per gallon</a:t>
+            </a:r>
+          </a:p>
+          <a:p>
+            <a:pPr>
+              <a:defRPr sz="1700">
                 <a:solidFill>
                   <a:srgbClr val="1F2937"/>
                 </a:solidFill>
               </a:defRPr>
             </a:pPr>
             <a:r>
-              <a:rPr dirty="0"/>
-              <a:t>• Logged-out save restriction</a:t>
-            </a:r>
-          </a:p>
-          <a:p>
-            <a:pPr defTabSz="512063">
-              <a:defRPr sz="839">
+              <a:t>• ≈ $9.89 fuel cost</a:t>
+            </a:r>
+          </a:p>
+          <a:p>
+            <a:pPr>
+              <a:defRPr sz="1700">
                 <a:solidFill>
                   <a:srgbClr val="1F2937"/>
                 </a:solidFill>
               </a:defRPr>
             </a:pPr>
             <a:r>
-              <a:rPr dirty="0"/>
-              <a:t>• Email-based trip filtering</a:t>
-            </a:r>
-          </a:p>
-        </p:txBody>
-      </p:sp>
-      <p:sp>
-        <p:nvSpPr>
-          <p:cNvPr id="183" name="Text 14"/>
-          <p:cNvSpPr txBox="1"/>
-          <p:nvPr/>
-        </p:nvSpPr>
-        <p:spPr>
-          <a:xfrm>
-            <a:off x="1188719" y="5280660"/>
-            <a:ext cx="9601201" cy="457201"/>
-          </a:xfrm>
-          <a:prstGeom prst="rect">
-            <a:avLst/>
-          </a:prstGeom>
-          <a:ln w="12700">
-            <a:miter lim="400000"/>
-          </a:ln>
-          <a:extLst>
-            <a:ext uri="{C572A759-6A51-4108-AA02-DFA0A04FC94B}">
-              <ma14:wrappingTextBoxFlag xmlns="" xmlns:m="http://schemas.openxmlformats.org/officeDocument/2006/math" xmlns:a14="http://schemas.microsoft.com/office/drawing/2010/main" xmlns:ma14="http://schemas.microsoft.com/office/mac/drawingml/2011/main" val="1"/>
-            </a:ext>
-          </a:extLst>
-        </p:spPr>
-        <p:txBody>
-          <a:bodyPr lIns="0" tIns="0" rIns="0" bIns="0" anchor="ctr">
-            <a:spAutoFit/>
-          </a:bodyPr>
-          <a:lstStyle/>
-          <a:p>
-            <a:pPr>
-              <a:defRPr sz="1500">
-                <a:solidFill>
-                  <a:srgbClr val="5F6B7A"/>
-                </a:solidFill>
-              </a:defRPr>
-            </a:pPr>
-            <a:endParaRPr/>
-          </a:p>
-        </p:txBody>
-      </p:sp>
-      <p:sp>
-        <p:nvSpPr>
-          <p:cNvPr id="2" name="TextBox 1">
-            <a:extLst>
-              <a:ext uri="{FF2B5EF4-FFF2-40B4-BE49-F238E27FC236}">
-                <a16:creationId xmlns:a16="http://schemas.microsoft.com/office/drawing/2014/main" id="{F7C3EED9-532D-CFA9-9896-38ED64C27EB4}"/>
-              </a:ext>
-            </a:extLst>
-          </p:cNvPr>
-          <p:cNvSpPr txBox="1"/>
-          <p:nvPr/>
-        </p:nvSpPr>
-        <p:spPr>
-          <a:xfrm>
-            <a:off x="868680" y="1119887"/>
-            <a:ext cx="2916937" cy="369330"/>
-          </a:xfrm>
-          <a:prstGeom prst="rect">
-            <a:avLst/>
-          </a:prstGeom>
-          <a:noFill/>
-          <a:ln w="12700" cap="flat">
-            <a:noFill/>
-            <a:miter lim="400000"/>
-          </a:ln>
-          <a:effectLst/>
-          <a:sp3d/>
-        </p:spPr>
-        <p:style>
-          <a:lnRef idx="0">
-            <a:scrgbClr r="0" g="0" b="0"/>
-          </a:lnRef>
-          <a:fillRef idx="0">
-            <a:scrgbClr r="0" g="0" b="0"/>
-          </a:fillRef>
-          <a:effectRef idx="0">
-            <a:scrgbClr r="0" g="0" b="0"/>
-          </a:effectRef>
-          <a:fontRef idx="none"/>
-        </p:style>
-        <p:txBody>
-          <a:bodyPr rot="0" spcFirstLastPara="1" vertOverflow="overflow" horzOverflow="overflow" vert="horz" wrap="square" lIns="45719" tIns="45719" rIns="45719" bIns="45719" numCol="1" spcCol="38100" rtlCol="0" anchor="t">
-            <a:spAutoFit/>
-          </a:bodyPr>
-          <a:lstStyle/>
-          <a:p>
-            <a:pPr marL="0" marR="0" indent="0" algn="l" defTabSz="914400" rtl="0" fontAlgn="auto" latinLnBrk="0" hangingPunct="0">
-              <a:lnSpc>
-                <a:spcPct val="100000"/>
-              </a:lnSpc>
-              <a:spcBef>
-                <a:spcPts val="0"/>
-              </a:spcBef>
-              <a:spcAft>
-                <a:spcPts val="0"/>
-              </a:spcAft>
-              <a:buClrTx/>
-              <a:buSzTx/>
-              <a:buFontTx/>
-              <a:buNone/>
-              <a:tabLst/>
-            </a:pPr>
-            <a:r>
-              <a:rPr kumimoji="0" lang="en-US" sz="1800" b="0" i="0" u="sng" strike="noStrike" cap="none" spc="0" normalizeH="0" baseline="0" dirty="0">
-                <a:ln>
-                  <a:noFill/>
-                </a:ln>
-                <a:solidFill>
-                  <a:srgbClr val="000000"/>
-                </a:solidFill>
-                <a:effectLst/>
-                <a:uFillTx/>
-                <a:latin typeface="+mj-lt"/>
-                <a:ea typeface="+mj-ea"/>
-                <a:cs typeface="+mj-cs"/>
-                <a:sym typeface="Aptos"/>
-              </a:rPr>
-              <a:t>Manual Acceptance Testing</a:t>
-            </a:r>
-          </a:p>
-        </p:txBody>
-      </p:sp>
-      <p:sp>
-        <p:nvSpPr>
-          <p:cNvPr id="4" name="Text 6">
-            <a:extLst>
-              <a:ext uri="{FF2B5EF4-FFF2-40B4-BE49-F238E27FC236}">
-                <a16:creationId xmlns:a16="http://schemas.microsoft.com/office/drawing/2014/main" id="{9174F026-5DF0-0D0F-E3B1-9F22D082FF0D}"/>
-              </a:ext>
-            </a:extLst>
-          </p:cNvPr>
-          <p:cNvSpPr txBox="1"/>
-          <p:nvPr/>
-        </p:nvSpPr>
-        <p:spPr>
-          <a:xfrm>
-            <a:off x="7568184" y="1489455"/>
-            <a:ext cx="2743201" cy="673101"/>
-          </a:xfrm>
-          <a:prstGeom prst="rect">
-            <a:avLst/>
-          </a:prstGeom>
-          <a:ln w="12700">
-            <a:miter lim="400000"/>
-          </a:ln>
-          <a:extLst>
-            <a:ext uri="{C572A759-6A51-4108-AA02-DFA0A04FC94B}">
-              <ma14:wrappingTextBoxFlag xmlns:ma14="http://schemas.microsoft.com/office/mac/drawingml/2011/main" xmlns:a14="http://schemas.microsoft.com/office/drawing/2010/main" xmlns:m="http://schemas.openxmlformats.org/officeDocument/2006/math" xmlns="" val="1"/>
-            </a:ext>
-          </a:extLst>
-        </p:spPr>
-        <p:txBody>
-          <a:bodyPr lIns="0" tIns="0" rIns="0" bIns="0" anchor="ctr">
-            <a:spAutoFit/>
-          </a:bodyPr>
-          <a:lstStyle>
-            <a:lvl1pPr algn="ctr">
-              <a:defRPr sz="4400" b="1">
-                <a:solidFill>
-                  <a:srgbClr val="17324D"/>
-                </a:solidFill>
-              </a:defRPr>
-            </a:lvl1pPr>
-          </a:lstStyle>
-          <a:p>
-            <a:r>
-              <a:rPr lang="en-US" dirty="0"/>
-              <a:t>29</a:t>
-            </a:r>
-            <a:endParaRPr dirty="0"/>
-          </a:p>
-        </p:txBody>
-      </p:sp>
-      <p:sp>
-        <p:nvSpPr>
-          <p:cNvPr id="6" name="Text 7">
-            <a:extLst>
-              <a:ext uri="{FF2B5EF4-FFF2-40B4-BE49-F238E27FC236}">
-                <a16:creationId xmlns:a16="http://schemas.microsoft.com/office/drawing/2014/main" id="{2EA4DDBB-E74F-3561-29B9-A135D8207962}"/>
-              </a:ext>
-            </a:extLst>
-          </p:cNvPr>
-          <p:cNvSpPr txBox="1"/>
-          <p:nvPr/>
-        </p:nvSpPr>
-        <p:spPr>
-          <a:xfrm>
-            <a:off x="7568184" y="2253742"/>
-            <a:ext cx="2743201" cy="177801"/>
-          </a:xfrm>
-          <a:prstGeom prst="rect">
-            <a:avLst/>
-          </a:prstGeom>
-          <a:ln w="12700">
-            <a:miter lim="400000"/>
-          </a:ln>
-          <a:extLst>
-            <a:ext uri="{C572A759-6A51-4108-AA02-DFA0A04FC94B}">
-              <ma14:wrappingTextBoxFlag xmlns:ma14="http://schemas.microsoft.com/office/mac/drawingml/2011/main" xmlns:a14="http://schemas.microsoft.com/office/drawing/2010/main" xmlns:m="http://schemas.openxmlformats.org/officeDocument/2006/math" xmlns="" val="1"/>
-            </a:ext>
-          </a:extLst>
-        </p:spPr>
-        <p:txBody>
-          <a:bodyPr lIns="0" tIns="0" rIns="0" bIns="0" anchor="ctr">
-            <a:spAutoFit/>
-          </a:bodyPr>
-          <a:lstStyle>
-            <a:lvl1pPr algn="ctr">
-              <a:defRPr sz="1200" b="1">
-                <a:solidFill>
-                  <a:srgbClr val="1F2937"/>
-                </a:solidFill>
-              </a:defRPr>
-            </a:lvl1pPr>
-          </a:lstStyle>
-          <a:p>
-            <a:r>
-              <a:t>TESTS EXECUTED</a:t>
-            </a:r>
-          </a:p>
-        </p:txBody>
-      </p:sp>
-      <p:sp>
-        <p:nvSpPr>
-          <p:cNvPr id="8" name="Text 8">
-            <a:extLst>
-              <a:ext uri="{FF2B5EF4-FFF2-40B4-BE49-F238E27FC236}">
-                <a16:creationId xmlns:a16="http://schemas.microsoft.com/office/drawing/2014/main" id="{234BC743-83B3-102C-69FF-D98CCF1CD1F7}"/>
-              </a:ext>
-            </a:extLst>
-          </p:cNvPr>
-          <p:cNvSpPr txBox="1"/>
-          <p:nvPr/>
-        </p:nvSpPr>
-        <p:spPr>
-          <a:xfrm>
-            <a:off x="7568184" y="2533905"/>
-            <a:ext cx="2743201" cy="673101"/>
-          </a:xfrm>
-          <a:prstGeom prst="rect">
-            <a:avLst/>
-          </a:prstGeom>
-          <a:ln w="12700">
-            <a:miter lim="400000"/>
-          </a:ln>
-          <a:extLst>
-            <a:ext uri="{C572A759-6A51-4108-AA02-DFA0A04FC94B}">
-              <ma14:wrappingTextBoxFlag xmlns:ma14="http://schemas.microsoft.com/office/mac/drawingml/2011/main" xmlns:a14="http://schemas.microsoft.com/office/drawing/2010/main" xmlns:m="http://schemas.openxmlformats.org/officeDocument/2006/math" xmlns="" val="1"/>
-            </a:ext>
-          </a:extLst>
-        </p:spPr>
-        <p:txBody>
-          <a:bodyPr lIns="0" tIns="0" rIns="0" bIns="0" anchor="ctr">
-            <a:spAutoFit/>
-          </a:bodyPr>
-          <a:lstStyle>
-            <a:lvl1pPr algn="ctr">
-              <a:defRPr sz="4400" b="1">
-                <a:solidFill>
-                  <a:srgbClr val="2F855A"/>
-                </a:solidFill>
-              </a:defRPr>
-            </a:lvl1pPr>
-          </a:lstStyle>
-          <a:p>
-            <a:r>
-              <a:rPr lang="en-US" dirty="0"/>
-              <a:t>29</a:t>
-            </a:r>
-            <a:endParaRPr dirty="0"/>
-          </a:p>
-        </p:txBody>
-      </p:sp>
-      <p:sp>
-        <p:nvSpPr>
-          <p:cNvPr id="10" name="Text 9">
-            <a:extLst>
-              <a:ext uri="{FF2B5EF4-FFF2-40B4-BE49-F238E27FC236}">
-                <a16:creationId xmlns:a16="http://schemas.microsoft.com/office/drawing/2014/main" id="{854C2577-CC82-D5B0-05B6-5F97E05D8A05}"/>
-              </a:ext>
-            </a:extLst>
-          </p:cNvPr>
-          <p:cNvSpPr txBox="1"/>
-          <p:nvPr/>
-        </p:nvSpPr>
-        <p:spPr>
-          <a:xfrm>
-            <a:off x="7568184" y="3298192"/>
-            <a:ext cx="2743201" cy="177801"/>
-          </a:xfrm>
-          <a:prstGeom prst="rect">
-            <a:avLst/>
-          </a:prstGeom>
-          <a:ln w="12700">
-            <a:miter lim="400000"/>
-          </a:ln>
-          <a:extLst>
-            <a:ext uri="{C572A759-6A51-4108-AA02-DFA0A04FC94B}">
-              <ma14:wrappingTextBoxFlag xmlns:ma14="http://schemas.microsoft.com/office/mac/drawingml/2011/main" xmlns:a14="http://schemas.microsoft.com/office/drawing/2010/main" xmlns:m="http://schemas.openxmlformats.org/officeDocument/2006/math" xmlns="" val="1"/>
-            </a:ext>
-          </a:extLst>
-        </p:spPr>
-        <p:txBody>
-          <a:bodyPr lIns="0" tIns="0" rIns="0" bIns="0" anchor="ctr">
-            <a:spAutoFit/>
-          </a:bodyPr>
-          <a:lstStyle>
-            <a:lvl1pPr algn="ctr">
-              <a:defRPr sz="1200" b="1">
-                <a:solidFill>
-                  <a:srgbClr val="1F2937"/>
-                </a:solidFill>
-              </a:defRPr>
-            </a:lvl1pPr>
-          </a:lstStyle>
-          <a:p>
-            <a:r>
-              <a:rPr dirty="0"/>
-              <a:t>PASSED</a:t>
-            </a:r>
-          </a:p>
-        </p:txBody>
-      </p:sp>
-      <p:sp>
-        <p:nvSpPr>
-          <p:cNvPr id="12" name="Text 10">
-            <a:extLst>
-              <a:ext uri="{FF2B5EF4-FFF2-40B4-BE49-F238E27FC236}">
-                <a16:creationId xmlns:a16="http://schemas.microsoft.com/office/drawing/2014/main" id="{84EF8046-C457-4F85-6F8E-0B6239273614}"/>
-              </a:ext>
-            </a:extLst>
-          </p:cNvPr>
-          <p:cNvSpPr txBox="1"/>
-          <p:nvPr/>
-        </p:nvSpPr>
-        <p:spPr>
-          <a:xfrm>
-            <a:off x="7568184" y="3574289"/>
-            <a:ext cx="2743201" cy="673101"/>
-          </a:xfrm>
-          <a:prstGeom prst="rect">
-            <a:avLst/>
-          </a:prstGeom>
-          <a:ln w="12700">
-            <a:miter lim="400000"/>
-          </a:ln>
-          <a:extLst>
-            <a:ext uri="{C572A759-6A51-4108-AA02-DFA0A04FC94B}">
-              <ma14:wrappingTextBoxFlag xmlns:ma14="http://schemas.microsoft.com/office/mac/drawingml/2011/main" xmlns:a14="http://schemas.microsoft.com/office/drawing/2010/main" xmlns:m="http://schemas.openxmlformats.org/officeDocument/2006/math" xmlns="" val="1"/>
-            </a:ext>
-          </a:extLst>
-        </p:spPr>
-        <p:txBody>
-          <a:bodyPr lIns="0" tIns="0" rIns="0" bIns="0" anchor="ctr">
-            <a:spAutoFit/>
-          </a:bodyPr>
-          <a:lstStyle>
-            <a:lvl1pPr algn="ctr">
-              <a:defRPr sz="4400" b="1">
-                <a:solidFill>
-                  <a:srgbClr val="C53030"/>
-                </a:solidFill>
-              </a:defRPr>
-            </a:lvl1pPr>
-          </a:lstStyle>
-          <a:p>
-            <a:r>
-              <a:rPr dirty="0"/>
-              <a:t>0</a:t>
-            </a:r>
-          </a:p>
-        </p:txBody>
-      </p:sp>
-      <p:sp>
-        <p:nvSpPr>
-          <p:cNvPr id="14" name="Text 11">
-            <a:extLst>
-              <a:ext uri="{FF2B5EF4-FFF2-40B4-BE49-F238E27FC236}">
-                <a16:creationId xmlns:a16="http://schemas.microsoft.com/office/drawing/2014/main" id="{BBF37B52-C78C-27D1-67DE-0FB46CD59CF1}"/>
-              </a:ext>
-            </a:extLst>
-          </p:cNvPr>
-          <p:cNvSpPr txBox="1"/>
-          <p:nvPr/>
-        </p:nvSpPr>
-        <p:spPr>
-          <a:xfrm>
-            <a:off x="7568184" y="4335144"/>
-            <a:ext cx="2743201" cy="184666"/>
-          </a:xfrm>
-          <a:prstGeom prst="rect">
-            <a:avLst/>
-          </a:prstGeom>
-          <a:ln w="12700">
-            <a:miter lim="400000"/>
-          </a:ln>
-          <a:extLst>
-            <a:ext uri="{C572A759-6A51-4108-AA02-DFA0A04FC94B}">
-              <ma14:wrappingTextBoxFlag xmlns:ma14="http://schemas.microsoft.com/office/mac/drawingml/2011/main" xmlns:a14="http://schemas.microsoft.com/office/drawing/2010/main" xmlns:m="http://schemas.openxmlformats.org/officeDocument/2006/math" xmlns="" val="1"/>
-            </a:ext>
-          </a:extLst>
-        </p:spPr>
-        <p:txBody>
-          <a:bodyPr lIns="0" tIns="0" rIns="0" bIns="0" anchor="ctr">
-            <a:spAutoFit/>
-          </a:bodyPr>
-          <a:lstStyle>
-            <a:lvl1pPr algn="ctr">
-              <a:defRPr sz="1200" b="1">
-                <a:solidFill>
-                  <a:srgbClr val="1F2937"/>
-                </a:solidFill>
-              </a:defRPr>
-            </a:lvl1pPr>
-          </a:lstStyle>
-          <a:p>
-            <a:r>
-              <a:rPr dirty="0"/>
-              <a:t>FAIL</a:t>
-            </a:r>
-            <a:r>
-              <a:rPr lang="en-US" dirty="0"/>
-              <a:t>URES</a:t>
-            </a:r>
-            <a:endParaRPr dirty="0"/>
-          </a:p>
-        </p:txBody>
-      </p:sp>
-      <p:sp>
-        <p:nvSpPr>
-          <p:cNvPr id="16" name="TextBox 15">
-            <a:extLst>
-              <a:ext uri="{FF2B5EF4-FFF2-40B4-BE49-F238E27FC236}">
-                <a16:creationId xmlns:a16="http://schemas.microsoft.com/office/drawing/2014/main" id="{54D99836-A5AE-68D8-1AB7-8C53511A4882}"/>
-              </a:ext>
-            </a:extLst>
-          </p:cNvPr>
-          <p:cNvSpPr txBox="1"/>
-          <p:nvPr/>
-        </p:nvSpPr>
-        <p:spPr>
-          <a:xfrm>
-            <a:off x="7367016" y="1117092"/>
-            <a:ext cx="3313177" cy="369330"/>
-          </a:xfrm>
-          <a:prstGeom prst="rect">
-            <a:avLst/>
-          </a:prstGeom>
-          <a:noFill/>
-          <a:ln w="12700" cap="flat">
-            <a:noFill/>
-            <a:miter lim="400000"/>
-          </a:ln>
-          <a:effectLst/>
-          <a:sp3d/>
-        </p:spPr>
-        <p:style>
-          <a:lnRef idx="0">
-            <a:scrgbClr r="0" g="0" b="0"/>
-          </a:lnRef>
-          <a:fillRef idx="0">
-            <a:scrgbClr r="0" g="0" b="0"/>
-          </a:fillRef>
-          <a:effectRef idx="0">
-            <a:scrgbClr r="0" g="0" b="0"/>
-          </a:effectRef>
-          <a:fontRef idx="none"/>
-        </p:style>
-        <p:txBody>
-          <a:bodyPr rot="0" spcFirstLastPara="1" vertOverflow="overflow" horzOverflow="overflow" vert="horz" wrap="square" lIns="45719" tIns="45719" rIns="45719" bIns="45719" numCol="1" spcCol="38100" rtlCol="0" anchor="t">
-            <a:spAutoFit/>
-          </a:bodyPr>
-          <a:lstStyle/>
-          <a:p>
-            <a:pPr marL="0" marR="0" indent="0" algn="l" defTabSz="914400" rtl="0" fontAlgn="auto" latinLnBrk="0" hangingPunct="0">
-              <a:lnSpc>
-                <a:spcPct val="100000"/>
-              </a:lnSpc>
-              <a:spcBef>
-                <a:spcPts val="0"/>
-              </a:spcBef>
-              <a:spcAft>
-                <a:spcPts val="0"/>
-              </a:spcAft>
-              <a:buClrTx/>
-              <a:buSzTx/>
-              <a:buFontTx/>
-              <a:buNone/>
-              <a:tabLst/>
-            </a:pPr>
-            <a:r>
-              <a:rPr lang="en-US" u="sng" dirty="0"/>
-              <a:t>Automated</a:t>
-            </a:r>
-            <a:r>
-              <a:rPr kumimoji="0" lang="en-US" sz="1800" b="0" i="0" u="sng" strike="noStrike" cap="none" spc="0" normalizeH="0" baseline="0" dirty="0">
-                <a:ln>
-                  <a:noFill/>
-                </a:ln>
-                <a:solidFill>
-                  <a:srgbClr val="000000"/>
-                </a:solidFill>
-                <a:effectLst/>
-                <a:uFillTx/>
-                <a:latin typeface="+mj-lt"/>
-                <a:ea typeface="+mj-ea"/>
-                <a:cs typeface="+mj-cs"/>
-                <a:sym typeface="Aptos"/>
-              </a:rPr>
-              <a:t> Acceptance Testing</a:t>
-            </a:r>
-          </a:p>
-        </p:txBody>
-      </p:sp>
-      <p:sp>
-        <p:nvSpPr>
-          <p:cNvPr id="18" name="Text 10">
-            <a:extLst>
-              <a:ext uri="{FF2B5EF4-FFF2-40B4-BE49-F238E27FC236}">
-                <a16:creationId xmlns:a16="http://schemas.microsoft.com/office/drawing/2014/main" id="{C4E0FB12-3D40-F929-F0A4-EB1E4A0485DA}"/>
-              </a:ext>
-            </a:extLst>
-          </p:cNvPr>
-          <p:cNvSpPr txBox="1"/>
-          <p:nvPr/>
-        </p:nvSpPr>
-        <p:spPr>
-          <a:xfrm>
-            <a:off x="7568184" y="4477956"/>
-            <a:ext cx="2743201" cy="673101"/>
-          </a:xfrm>
-          <a:prstGeom prst="rect">
-            <a:avLst/>
-          </a:prstGeom>
-          <a:ln w="12700">
-            <a:miter lim="400000"/>
-          </a:ln>
-          <a:extLst>
-            <a:ext uri="{C572A759-6A51-4108-AA02-DFA0A04FC94B}">
-              <ma14:wrappingTextBoxFlag xmlns="" xmlns:m="http://schemas.openxmlformats.org/officeDocument/2006/math" xmlns:a14="http://schemas.microsoft.com/office/drawing/2010/main" xmlns:ma14="http://schemas.microsoft.com/office/mac/drawingml/2011/main" val="1"/>
-            </a:ext>
-          </a:extLst>
-        </p:spPr>
-        <p:txBody>
-          <a:bodyPr lIns="0" tIns="0" rIns="0" bIns="0" anchor="ctr">
-            <a:spAutoFit/>
-          </a:bodyPr>
-          <a:lstStyle>
-            <a:lvl1pPr algn="ctr">
-              <a:defRPr sz="4400" b="1">
-                <a:solidFill>
-                  <a:srgbClr val="C53030"/>
-                </a:solidFill>
-              </a:defRPr>
-            </a:lvl1pPr>
-          </a:lstStyle>
-          <a:p>
-            <a:r>
-              <a:rPr dirty="0"/>
-              <a:t>0</a:t>
-            </a:r>
-          </a:p>
-        </p:txBody>
-      </p:sp>
-      <p:sp>
-        <p:nvSpPr>
-          <p:cNvPr id="20" name="Text 11">
-            <a:extLst>
-              <a:ext uri="{FF2B5EF4-FFF2-40B4-BE49-F238E27FC236}">
-                <a16:creationId xmlns:a16="http://schemas.microsoft.com/office/drawing/2014/main" id="{3E2FF421-11F4-A539-2979-211A7201AFB7}"/>
-              </a:ext>
-            </a:extLst>
-          </p:cNvPr>
-          <p:cNvSpPr txBox="1"/>
-          <p:nvPr/>
-        </p:nvSpPr>
-        <p:spPr>
-          <a:xfrm>
-            <a:off x="7568184" y="5238811"/>
-            <a:ext cx="2743201" cy="184666"/>
-          </a:xfrm>
-          <a:prstGeom prst="rect">
-            <a:avLst/>
-          </a:prstGeom>
-          <a:ln w="12700">
-            <a:miter lim="400000"/>
-          </a:ln>
-          <a:extLst>
-            <a:ext uri="{C572A759-6A51-4108-AA02-DFA0A04FC94B}">
-              <ma14:wrappingTextBoxFlag xmlns="" xmlns:m="http://schemas.openxmlformats.org/officeDocument/2006/math" xmlns:a14="http://schemas.microsoft.com/office/drawing/2010/main" xmlns:ma14="http://schemas.microsoft.com/office/mac/drawingml/2011/main" val="1"/>
-            </a:ext>
-          </a:extLst>
-        </p:spPr>
-        <p:txBody>
-          <a:bodyPr lIns="0" tIns="0" rIns="0" bIns="0" anchor="ctr">
-            <a:spAutoFit/>
-          </a:bodyPr>
-          <a:lstStyle>
-            <a:lvl1pPr algn="ctr">
-              <a:defRPr sz="1200" b="1">
-                <a:solidFill>
-                  <a:srgbClr val="1F2937"/>
-                </a:solidFill>
-              </a:defRPr>
-            </a:lvl1pPr>
-          </a:lstStyle>
-          <a:p>
-            <a:r>
-              <a:rPr lang="en-US" dirty="0"/>
-              <a:t>ERRORS</a:t>
-            </a:r>
-          </a:p>
-        </p:txBody>
-      </p:sp>
-      <p:sp>
-        <p:nvSpPr>
-          <p:cNvPr id="22" name="Text 10">
-            <a:extLst>
-              <a:ext uri="{FF2B5EF4-FFF2-40B4-BE49-F238E27FC236}">
-                <a16:creationId xmlns:a16="http://schemas.microsoft.com/office/drawing/2014/main" id="{019179B0-E5A2-0617-C373-C8310918B785}"/>
-              </a:ext>
-            </a:extLst>
-          </p:cNvPr>
-          <p:cNvSpPr txBox="1"/>
-          <p:nvPr/>
-        </p:nvSpPr>
-        <p:spPr>
-          <a:xfrm>
-            <a:off x="7568184" y="5363332"/>
-            <a:ext cx="2743201" cy="673101"/>
-          </a:xfrm>
-          <a:prstGeom prst="rect">
-            <a:avLst/>
-          </a:prstGeom>
-          <a:ln w="12700">
-            <a:miter lim="400000"/>
-          </a:ln>
-          <a:extLst>
-            <a:ext uri="{C572A759-6A51-4108-AA02-DFA0A04FC94B}">
-              <ma14:wrappingTextBoxFlag xmlns="" xmlns:m="http://schemas.openxmlformats.org/officeDocument/2006/math" xmlns:a14="http://schemas.microsoft.com/office/drawing/2010/main" xmlns:ma14="http://schemas.microsoft.com/office/mac/drawingml/2011/main" val="1"/>
-            </a:ext>
-          </a:extLst>
-        </p:spPr>
-        <p:txBody>
-          <a:bodyPr lIns="0" tIns="0" rIns="0" bIns="0" anchor="ctr">
-            <a:spAutoFit/>
-          </a:bodyPr>
-          <a:lstStyle>
-            <a:lvl1pPr algn="ctr">
-              <a:defRPr sz="4400" b="1">
-                <a:solidFill>
-                  <a:srgbClr val="C53030"/>
-                </a:solidFill>
-              </a:defRPr>
-            </a:lvl1pPr>
-          </a:lstStyle>
-          <a:p>
-            <a:r>
-              <a:rPr dirty="0"/>
-              <a:t>0</a:t>
-            </a:r>
-          </a:p>
-        </p:txBody>
-      </p:sp>
-      <p:sp>
-        <p:nvSpPr>
-          <p:cNvPr id="24" name="Text 11">
-            <a:extLst>
-              <a:ext uri="{FF2B5EF4-FFF2-40B4-BE49-F238E27FC236}">
-                <a16:creationId xmlns:a16="http://schemas.microsoft.com/office/drawing/2014/main" id="{03FB4C5D-43D7-CE02-4B67-094CBC53C91B}"/>
-              </a:ext>
-            </a:extLst>
-          </p:cNvPr>
-          <p:cNvSpPr txBox="1"/>
-          <p:nvPr/>
-        </p:nvSpPr>
-        <p:spPr>
-          <a:xfrm>
-            <a:off x="7568184" y="6124187"/>
-            <a:ext cx="2743201" cy="184666"/>
-          </a:xfrm>
-          <a:prstGeom prst="rect">
-            <a:avLst/>
-          </a:prstGeom>
-          <a:ln w="12700">
-            <a:miter lim="400000"/>
-          </a:ln>
-          <a:extLst>
-            <a:ext uri="{C572A759-6A51-4108-AA02-DFA0A04FC94B}">
-              <ma14:wrappingTextBoxFlag xmlns="" xmlns:m="http://schemas.openxmlformats.org/officeDocument/2006/math" xmlns:a14="http://schemas.microsoft.com/office/drawing/2010/main" xmlns:ma14="http://schemas.microsoft.com/office/mac/drawingml/2011/main" val="1"/>
-            </a:ext>
-          </a:extLst>
-        </p:spPr>
-        <p:txBody>
-          <a:bodyPr lIns="0" tIns="0" rIns="0" bIns="0" anchor="ctr">
-            <a:spAutoFit/>
-          </a:bodyPr>
-          <a:lstStyle>
-            <a:lvl1pPr algn="ctr">
-              <a:defRPr sz="1200" b="1">
-                <a:solidFill>
-                  <a:srgbClr val="1F2937"/>
-                </a:solidFill>
-              </a:defRPr>
-            </a:lvl1pPr>
-          </a:lstStyle>
-          <a:p>
-            <a:r>
-              <a:rPr lang="en-US" dirty="0"/>
-              <a:t>SKIPPED</a:t>
-            </a:r>
-            <a:endParaRPr dirty="0"/>
+              <a:t>• Drive time ≈ 1 hr 29 min at 55 MPH</a:t>
+            </a:r>
           </a:p>
         </p:txBody>
       </p:sp>
